--- a/reports/Cambodia_Food_Price_Forecast.pptx
+++ b/reports/Cambodia_Food_Price_Forecast.pptx
@@ -20,9 +20,6 @@
     <p:sldId id="268" r:id="rId19"/>
     <p:sldId id="269" r:id="rId20"/>
     <p:sldId id="270" r:id="rId21"/>
-    <p:sldId id="271" r:id="rId22"/>
-    <p:sldId id="272" r:id="rId23"/>
-    <p:sldId id="273" r:id="rId24"/>
   </p:sldIdLst>
   <p:sldSz cx="12191695" cy="6858000" type="screen4x3"/>
   <p:notesSz cx="6858000" cy="9144000"/>
@@ -5450,7 +5447,7 @@
                 </a:solidFill>
                 <a:latin typeface="Consolas"/>
               </a:rPr>
-              <a:t>0.460955</a:t>
+              <a:t>0.458068</a:t>
             </a:r>
           </a:p>
         </p:txBody>
@@ -5534,7 +5531,7 @@
                 </a:solidFill>
                 <a:latin typeface="Consolas"/>
               </a:rPr>
-              <a:t>0.4609556</a:t>
+              <a:t>0.458068</a:t>
             </a:r>
           </a:p>
         </p:txBody>
@@ -5722,7 +5719,7 @@
                 </a:solidFill>
                 <a:latin typeface="Consolas"/>
               </a:rPr>
-              <a:t>THE RESULT</a:t>
+              <a:t>PRODUCT</a:t>
             </a:r>
           </a:p>
         </p:txBody>
@@ -5764,7 +5761,7 @@
                 </a:solidFill>
                 <a:latin typeface="Georgia"/>
               </a:rPr>
-              <a:t>It runs</a:t>
+              <a:t>A forecast people</a:t>
             </a:r>
           </a:p>
         </p:txBody>
@@ -5806,7 +5803,7 @@
                 </a:solidFill>
                 <a:latin typeface="Georgia"/>
               </a:rPr>
-              <a:t>in a browser</a:t>
+              <a:t>can actually open</a:t>
             </a:r>
           </a:p>
         </p:txBody>
@@ -5861,92 +5858,136 @@
         </p:nvSpPr>
         <p:spPr>
           <a:xfrm>
-            <a:off x="822960" y="2194560"/>
-            <a:ext cx="5120640" cy="1097280"/>
-          </a:xfrm>
-          <a:prstGeom prst="rect">
-            <a:avLst/>
-          </a:prstGeom>
-          <a:noFill/>
-        </p:spPr>
-        <p:txBody>
-          <a:bodyPr wrap="square" anchor="t" lIns="0" rIns="0" tIns="0" bIns="0">
-            <a:spAutoFit/>
-          </a:bodyPr>
-          <a:lstStyle/>
-          <a:p>
-            <a:pPr algn="l">
-              <a:lnSpc>
-                <a:spcPct val="150000"/>
-              </a:lnSpc>
-              <a:spcAft>
-                <a:spcPts val="0"/>
-              </a:spcAft>
-            </a:pPr>
-            <a:r>
-              <a:rPr sz="1550" b="0" i="0">
+            <a:off x="822960" y="2148840"/>
+            <a:ext cx="5577840" cy="914400"/>
+          </a:xfrm>
+          <a:prstGeom prst="rect">
+            <a:avLst/>
+          </a:prstGeom>
+          <a:noFill/>
+        </p:spPr>
+        <p:txBody>
+          <a:bodyPr wrap="square" anchor="t" lIns="0" rIns="0" tIns="0" bIns="0">
+            <a:spAutoFit/>
+          </a:bodyPr>
+          <a:lstStyle/>
+          <a:p>
+            <a:pPr algn="l">
+              <a:lnSpc>
+                <a:spcPct val="145000"/>
+              </a:lnSpc>
+              <a:spcAft>
+                <a:spcPts val="0"/>
+              </a:spcAft>
+            </a:pPr>
+            <a:r>
+              <a:rPr sz="1600" b="0" i="0">
                 <a:solidFill>
                   <a:srgbClr val="191E19"/>
                 </a:solidFill>
                 <a:latin typeface="Segoe UI"/>
               </a:rPr>
-              <a:t>Nuxt 4 on Vercel. The default forecast is server-rendered, so the chart is on screen at first paint — no spinner, no empty state.</a:t>
-            </a:r>
-          </a:p>
-        </p:txBody>
-      </p:sp>
-      <p:sp>
-        <p:nvSpPr>
-          <p:cNvPr id="8" name="TextBox 7"/>
-          <p:cNvSpPr txBox="1"/>
-          <p:nvPr/>
-        </p:nvSpPr>
-        <p:spPr>
-          <a:xfrm>
-            <a:off x="822960" y="3383280"/>
-            <a:ext cx="5029200" cy="256032"/>
-          </a:xfrm>
-          <a:prstGeom prst="rect">
-            <a:avLst/>
-          </a:prstGeom>
-          <a:noFill/>
-        </p:spPr>
-        <p:txBody>
-          <a:bodyPr wrap="square" anchor="t" lIns="0" rIns="0" tIns="0" bIns="0">
-            <a:spAutoFit/>
-          </a:bodyPr>
-          <a:lstStyle/>
-          <a:p>
-            <a:pPr algn="l">
-              <a:lnSpc>
-                <a:spcPct val="130000"/>
-              </a:lnSpc>
-              <a:spcAft>
-                <a:spcPts val="0"/>
-              </a:spcAft>
-            </a:pPr>
-            <a:r>
-              <a:rPr sz="1400" b="1" i="0">
+              <a:t>The model is not left in the notebook. Nuxt serves the same prediction engine through a web page, API routes and a Telegram webhook.</a:t>
+            </a:r>
+          </a:p>
+        </p:txBody>
+      </p:sp>
+      <p:sp>
+        <p:nvSpPr>
+          <p:cNvPr id="8" name="Rectangle 7"/>
+          <p:cNvSpPr/>
+          <p:nvPr/>
+        </p:nvSpPr>
+        <p:spPr>
+          <a:xfrm>
+            <a:off x="822960" y="3392424"/>
+            <a:ext cx="54864" cy="438912"/>
+          </a:xfrm>
+          <a:prstGeom prst="rect">
+            <a:avLst/>
+          </a:prstGeom>
+          <a:solidFill>
+            <a:srgbClr val="2F5D46"/>
+          </a:solidFill>
+          <a:ln>
+            <a:noFill/>
+          </a:ln>
+          <a:effectLst/>
+        </p:spPr>
+        <p:style>
+          <a:lnRef idx="1">
+            <a:schemeClr val="accent1"/>
+          </a:lnRef>
+          <a:fillRef idx="3">
+            <a:schemeClr val="accent1"/>
+          </a:fillRef>
+          <a:effectRef idx="2">
+            <a:schemeClr val="accent1"/>
+          </a:effectRef>
+          <a:fontRef idx="minor">
+            <a:schemeClr val="lt1"/>
+          </a:fontRef>
+        </p:style>
+        <p:txBody>
+          <a:bodyPr rtlCol="0" anchor="ctr"/>
+          <a:lstStyle/>
+          <a:p>
+            <a:pPr algn="ctr"/>
+          </a:p>
+        </p:txBody>
+      </p:sp>
+      <p:sp>
+        <p:nvSpPr>
+          <p:cNvPr id="9" name="TextBox 8"/>
+          <p:cNvSpPr txBox="1"/>
+          <p:nvPr/>
+        </p:nvSpPr>
+        <p:spPr>
+          <a:xfrm>
+            <a:off x="1097280" y="3337560"/>
+            <a:ext cx="1325880" cy="274320"/>
+          </a:xfrm>
+          <a:prstGeom prst="rect">
+            <a:avLst/>
+          </a:prstGeom>
+          <a:noFill/>
+        </p:spPr>
+        <p:txBody>
+          <a:bodyPr wrap="square" anchor="t" lIns="0" rIns="0" tIns="0" bIns="0">
+            <a:spAutoFit/>
+          </a:bodyPr>
+          <a:lstStyle/>
+          <a:p>
+            <a:pPr algn="l">
+              <a:lnSpc>
+                <a:spcPct val="130000"/>
+              </a:lnSpc>
+              <a:spcAft>
+                <a:spcPts val="0"/>
+              </a:spcAft>
+            </a:pPr>
+            <a:r>
+              <a:rPr sz="1450" b="1" i="0">
                 <a:solidFill>
                   <a:srgbClr val="191E19"/>
                 </a:solidFill>
                 <a:latin typeface="Segoe UI"/>
               </a:rPr>
-              <a:t>Dependent dropdowns</a:t>
-            </a:r>
-          </a:p>
-        </p:txBody>
-      </p:sp>
-      <p:sp>
-        <p:nvSpPr>
-          <p:cNvPr id="9" name="TextBox 8"/>
-          <p:cNvSpPr txBox="1"/>
-          <p:nvPr/>
-        </p:nvSpPr>
-        <p:spPr>
-          <a:xfrm>
-            <a:off x="822960" y="3630168"/>
-            <a:ext cx="4937760" cy="365760"/>
+              <a:t>Browser</a:t>
+            </a:r>
+          </a:p>
+        </p:txBody>
+      </p:sp>
+      <p:sp>
+        <p:nvSpPr>
+          <p:cNvPr id="10" name="TextBox 9"/>
+          <p:cNvSpPr txBox="1"/>
+          <p:nvPr/>
+        </p:nvSpPr>
+        <p:spPr>
+          <a:xfrm>
+            <a:off x="2514600" y="3337560"/>
+            <a:ext cx="3886200" cy="457200"/>
           </a:xfrm>
           <a:prstGeom prst="rect">
             <a:avLst/>
@@ -5968,69 +6009,113 @@
               </a:spcAft>
             </a:pPr>
             <a:r>
-              <a:rPr sz="1250" b="0" i="0">
+              <a:rPr sz="1280" b="0" i="0">
                 <a:solidFill>
                   <a:srgbClr val="5C625A"/>
                 </a:solidFill>
                 <a:latin typeface="Segoe UI"/>
               </a:rPr>
-              <a:t>picking a commodity narrows the markets to those that carry it</a:t>
-            </a:r>
-          </a:p>
-        </p:txBody>
-      </p:sp>
-      <p:sp>
-        <p:nvSpPr>
-          <p:cNvPr id="10" name="TextBox 9"/>
-          <p:cNvSpPr txBox="1"/>
-          <p:nvPr/>
-        </p:nvSpPr>
-        <p:spPr>
-          <a:xfrm>
-            <a:off x="822960" y="4096512"/>
-            <a:ext cx="5029200" cy="256032"/>
-          </a:xfrm>
-          <a:prstGeom prst="rect">
-            <a:avLst/>
-          </a:prstGeom>
-          <a:noFill/>
-        </p:spPr>
-        <p:txBody>
-          <a:bodyPr wrap="square" anchor="t" lIns="0" rIns="0" tIns="0" bIns="0">
-            <a:spAutoFit/>
-          </a:bodyPr>
-          <a:lstStyle/>
-          <a:p>
-            <a:pPr algn="l">
-              <a:lnSpc>
-                <a:spcPct val="130000"/>
-              </a:lnSpc>
-              <a:spcAft>
-                <a:spcPts val="0"/>
-              </a:spcAft>
-            </a:pPr>
-            <a:r>
-              <a:rPr sz="1400" b="1" i="0">
+              <a:t>Choose a commodity and market, then see the latest price, forecast and chart.</a:t>
+            </a:r>
+          </a:p>
+        </p:txBody>
+      </p:sp>
+      <p:sp>
+        <p:nvSpPr>
+          <p:cNvPr id="11" name="Rectangle 10"/>
+          <p:cNvSpPr/>
+          <p:nvPr/>
+        </p:nvSpPr>
+        <p:spPr>
+          <a:xfrm>
+            <a:off x="822960" y="4050792"/>
+            <a:ext cx="54864" cy="438912"/>
+          </a:xfrm>
+          <a:prstGeom prst="rect">
+            <a:avLst/>
+          </a:prstGeom>
+          <a:solidFill>
+            <a:srgbClr val="2F5D46"/>
+          </a:solidFill>
+          <a:ln>
+            <a:noFill/>
+          </a:ln>
+          <a:effectLst/>
+        </p:spPr>
+        <p:style>
+          <a:lnRef idx="1">
+            <a:schemeClr val="accent1"/>
+          </a:lnRef>
+          <a:fillRef idx="3">
+            <a:schemeClr val="accent1"/>
+          </a:fillRef>
+          <a:effectRef idx="2">
+            <a:schemeClr val="accent1"/>
+          </a:effectRef>
+          <a:fontRef idx="minor">
+            <a:schemeClr val="lt1"/>
+          </a:fontRef>
+        </p:style>
+        <p:txBody>
+          <a:bodyPr rtlCol="0" anchor="ctr"/>
+          <a:lstStyle/>
+          <a:p>
+            <a:pPr algn="ctr"/>
+          </a:p>
+        </p:txBody>
+      </p:sp>
+      <p:sp>
+        <p:nvSpPr>
+          <p:cNvPr id="12" name="TextBox 11"/>
+          <p:cNvSpPr txBox="1"/>
+          <p:nvPr/>
+        </p:nvSpPr>
+        <p:spPr>
+          <a:xfrm>
+            <a:off x="1097280" y="3995928"/>
+            <a:ext cx="1325880" cy="274320"/>
+          </a:xfrm>
+          <a:prstGeom prst="rect">
+            <a:avLst/>
+          </a:prstGeom>
+          <a:noFill/>
+        </p:spPr>
+        <p:txBody>
+          <a:bodyPr wrap="square" anchor="t" lIns="0" rIns="0" tIns="0" bIns="0">
+            <a:spAutoFit/>
+          </a:bodyPr>
+          <a:lstStyle/>
+          <a:p>
+            <a:pPr algn="l">
+              <a:lnSpc>
+                <a:spcPct val="130000"/>
+              </a:lnSpc>
+              <a:spcAft>
+                <a:spcPts val="0"/>
+              </a:spcAft>
+            </a:pPr>
+            <a:r>
+              <a:rPr sz="1450" b="1" i="0">
                 <a:solidFill>
                   <a:srgbClr val="191E19"/>
                 </a:solidFill>
                 <a:latin typeface="Segoe UI"/>
               </a:rPr>
-              <a:t>Fuzzy input</a:t>
-            </a:r>
-          </a:p>
-        </p:txBody>
-      </p:sp>
-      <p:sp>
-        <p:nvSpPr>
-          <p:cNvPr id="11" name="TextBox 10"/>
-          <p:cNvSpPr txBox="1"/>
-          <p:nvPr/>
-        </p:nvSpPr>
-        <p:spPr>
-          <a:xfrm>
-            <a:off x="822960" y="4343400"/>
-            <a:ext cx="4937760" cy="365760"/>
+              <a:t>API</a:t>
+            </a:r>
+          </a:p>
+        </p:txBody>
+      </p:sp>
+      <p:sp>
+        <p:nvSpPr>
+          <p:cNvPr id="13" name="TextBox 12"/>
+          <p:cNvSpPr txBox="1"/>
+          <p:nvPr/>
+        </p:nvSpPr>
+        <p:spPr>
+          <a:xfrm>
+            <a:off x="2514600" y="3995928"/>
+            <a:ext cx="3886200" cy="457200"/>
           </a:xfrm>
           <a:prstGeom prst="rect">
             <a:avLst/>
@@ -6052,69 +6137,113 @@
               </a:spcAft>
             </a:pPr>
             <a:r>
-              <a:rPr sz="1250" b="0" i="0">
+              <a:rPr sz="1280" b="0" i="0">
                 <a:solidFill>
                   <a:srgbClr val="5C625A"/>
                 </a:solidFill>
                 <a:latin typeface="Segoe UI"/>
               </a:rPr>
-              <a:t>"rice" resolves to Rice (mixed, low quality) — shortest match wins</a:t>
-            </a:r>
-          </a:p>
-        </p:txBody>
-      </p:sp>
-      <p:sp>
-        <p:nvSpPr>
-          <p:cNvPr id="12" name="TextBox 11"/>
-          <p:cNvSpPr txBox="1"/>
-          <p:nvPr/>
-        </p:nvSpPr>
-        <p:spPr>
-          <a:xfrm>
-            <a:off x="822960" y="4809744"/>
-            <a:ext cx="5029200" cy="256032"/>
-          </a:xfrm>
-          <a:prstGeom prst="rect">
-            <a:avLst/>
-          </a:prstGeom>
-          <a:noFill/>
-        </p:spPr>
-        <p:txBody>
-          <a:bodyPr wrap="square" anchor="t" lIns="0" rIns="0" tIns="0" bIns="0">
-            <a:spAutoFit/>
-          </a:bodyPr>
-          <a:lstStyle/>
-          <a:p>
-            <a:pPr algn="l">
-              <a:lnSpc>
-                <a:spcPct val="130000"/>
-              </a:lnSpc>
-              <a:spcAft>
-                <a:spcPts val="0"/>
-              </a:spcAft>
-            </a:pPr>
-            <a:r>
-              <a:rPr sz="1400" b="1" i="0">
+              <a:t>/api/predict returns the same forecast for the web UI and outside clients.</a:t>
+            </a:r>
+          </a:p>
+        </p:txBody>
+      </p:sp>
+      <p:sp>
+        <p:nvSpPr>
+          <p:cNvPr id="14" name="Rectangle 13"/>
+          <p:cNvSpPr/>
+          <p:nvPr/>
+        </p:nvSpPr>
+        <p:spPr>
+          <a:xfrm>
+            <a:off x="822960" y="4709160"/>
+            <a:ext cx="54864" cy="438912"/>
+          </a:xfrm>
+          <a:prstGeom prst="rect">
+            <a:avLst/>
+          </a:prstGeom>
+          <a:solidFill>
+            <a:srgbClr val="2F5D46"/>
+          </a:solidFill>
+          <a:ln>
+            <a:noFill/>
+          </a:ln>
+          <a:effectLst/>
+        </p:spPr>
+        <p:style>
+          <a:lnRef idx="1">
+            <a:schemeClr val="accent1"/>
+          </a:lnRef>
+          <a:fillRef idx="3">
+            <a:schemeClr val="accent1"/>
+          </a:fillRef>
+          <a:effectRef idx="2">
+            <a:schemeClr val="accent1"/>
+          </a:effectRef>
+          <a:fontRef idx="minor">
+            <a:schemeClr val="lt1"/>
+          </a:fontRef>
+        </p:style>
+        <p:txBody>
+          <a:bodyPr rtlCol="0" anchor="ctr"/>
+          <a:lstStyle/>
+          <a:p>
+            <a:pPr algn="ctr"/>
+          </a:p>
+        </p:txBody>
+      </p:sp>
+      <p:sp>
+        <p:nvSpPr>
+          <p:cNvPr id="15" name="TextBox 14"/>
+          <p:cNvSpPr txBox="1"/>
+          <p:nvPr/>
+        </p:nvSpPr>
+        <p:spPr>
+          <a:xfrm>
+            <a:off x="1097280" y="4654296"/>
+            <a:ext cx="1325880" cy="274320"/>
+          </a:xfrm>
+          <a:prstGeom prst="rect">
+            <a:avLst/>
+          </a:prstGeom>
+          <a:noFill/>
+        </p:spPr>
+        <p:txBody>
+          <a:bodyPr wrap="square" anchor="t" lIns="0" rIns="0" tIns="0" bIns="0">
+            <a:spAutoFit/>
+          </a:bodyPr>
+          <a:lstStyle/>
+          <a:p>
+            <a:pPr algn="l">
+              <a:lnSpc>
+                <a:spcPct val="130000"/>
+              </a:lnSpc>
+              <a:spcAft>
+                <a:spcPts val="0"/>
+              </a:spcAft>
+            </a:pPr>
+            <a:r>
+              <a:rPr sz="1450" b="1" i="0">
                 <a:solidFill>
                   <a:srgbClr val="191E19"/>
                 </a:solidFill>
                 <a:latin typeface="Segoe UI"/>
               </a:rPr>
-              <a:t>Cached at the edge</a:t>
-            </a:r>
-          </a:p>
-        </p:txBody>
-      </p:sp>
-      <p:sp>
-        <p:nvSpPr>
-          <p:cNvPr id="13" name="TextBox 12"/>
-          <p:cNvSpPr txBox="1"/>
-          <p:nvPr/>
-        </p:nvSpPr>
-        <p:spPr>
-          <a:xfrm>
-            <a:off x="822960" y="5056632"/>
-            <a:ext cx="4937760" cy="365760"/>
+              <a:t>Telegram</a:t>
+            </a:r>
+          </a:p>
+        </p:txBody>
+      </p:sp>
+      <p:sp>
+        <p:nvSpPr>
+          <p:cNvPr id="16" name="TextBox 15"/>
+          <p:cNvSpPr txBox="1"/>
+          <p:nvPr/>
+        </p:nvSpPr>
+        <p:spPr>
+          <a:xfrm>
+            <a:off x="2514600" y="4654296"/>
+            <a:ext cx="3886200" cy="457200"/>
           </a:xfrm>
           <a:prstGeom prst="rect">
             <a:avLst/>
@@ -6136,69 +6265,113 @@
               </a:spcAft>
             </a:pPr>
             <a:r>
-              <a:rPr sz="1250" b="0" i="0">
+              <a:rPr sz="1280" b="0" i="0">
                 <a:solidFill>
                   <a:srgbClr val="5C625A"/>
                 </a:solidFill>
                 <a:latin typeface="Segoe UI"/>
               </a:rPr>
-              <a:t>options for a day, forecasts for an hour</a:t>
-            </a:r>
-          </a:p>
-        </p:txBody>
-      </p:sp>
-      <p:sp>
-        <p:nvSpPr>
-          <p:cNvPr id="14" name="TextBox 13"/>
-          <p:cNvSpPr txBox="1"/>
-          <p:nvPr/>
-        </p:nvSpPr>
-        <p:spPr>
-          <a:xfrm>
-            <a:off x="822960" y="5522976"/>
-            <a:ext cx="5029200" cy="256032"/>
-          </a:xfrm>
-          <a:prstGeom prst="rect">
-            <a:avLst/>
-          </a:prstGeom>
-          <a:noFill/>
-        </p:spPr>
-        <p:txBody>
-          <a:bodyPr wrap="square" anchor="t" lIns="0" rIns="0" tIns="0" bIns="0">
-            <a:spAutoFit/>
-          </a:bodyPr>
-          <a:lstStyle/>
-          <a:p>
-            <a:pPr algn="l">
-              <a:lnSpc>
-                <a:spcPct val="130000"/>
-              </a:lnSpc>
-              <a:spcAft>
-                <a:spcPts val="0"/>
-              </a:spcAft>
-            </a:pPr>
-            <a:r>
-              <a:rPr sz="1400" b="1" i="0">
+              <a:t>/predict rice phnom penh gives a fast text answer with a small sparkline.</a:t>
+            </a:r>
+          </a:p>
+        </p:txBody>
+      </p:sp>
+      <p:sp>
+        <p:nvSpPr>
+          <p:cNvPr id="17" name="Rectangle 16"/>
+          <p:cNvSpPr/>
+          <p:nvPr/>
+        </p:nvSpPr>
+        <p:spPr>
+          <a:xfrm>
+            <a:off x="822960" y="5367528"/>
+            <a:ext cx="54864" cy="438912"/>
+          </a:xfrm>
+          <a:prstGeom prst="rect">
+            <a:avLst/>
+          </a:prstGeom>
+          <a:solidFill>
+            <a:srgbClr val="2F5D46"/>
+          </a:solidFill>
+          <a:ln>
+            <a:noFill/>
+          </a:ln>
+          <a:effectLst/>
+        </p:spPr>
+        <p:style>
+          <a:lnRef idx="1">
+            <a:schemeClr val="accent1"/>
+          </a:lnRef>
+          <a:fillRef idx="3">
+            <a:schemeClr val="accent1"/>
+          </a:fillRef>
+          <a:effectRef idx="2">
+            <a:schemeClr val="accent1"/>
+          </a:effectRef>
+          <a:fontRef idx="minor">
+            <a:schemeClr val="lt1"/>
+          </a:fontRef>
+        </p:style>
+        <p:txBody>
+          <a:bodyPr rtlCol="0" anchor="ctr"/>
+          <a:lstStyle/>
+          <a:p>
+            <a:pPr algn="ctr"/>
+          </a:p>
+        </p:txBody>
+      </p:sp>
+      <p:sp>
+        <p:nvSpPr>
+          <p:cNvPr id="18" name="TextBox 17"/>
+          <p:cNvSpPr txBox="1"/>
+          <p:nvPr/>
+        </p:nvSpPr>
+        <p:spPr>
+          <a:xfrm>
+            <a:off x="1097280" y="5312664"/>
+            <a:ext cx="1325880" cy="274320"/>
+          </a:xfrm>
+          <a:prstGeom prst="rect">
+            <a:avLst/>
+          </a:prstGeom>
+          <a:noFill/>
+        </p:spPr>
+        <p:txBody>
+          <a:bodyPr wrap="square" anchor="t" lIns="0" rIns="0" tIns="0" bIns="0">
+            <a:spAutoFit/>
+          </a:bodyPr>
+          <a:lstStyle/>
+          <a:p>
+            <a:pPr algn="l">
+              <a:lnSpc>
+                <a:spcPct val="130000"/>
+              </a:lnSpc>
+              <a:spcAft>
+                <a:spcPts val="0"/>
+              </a:spcAft>
+            </a:pPr>
+            <a:r>
+              <a:rPr sz="1450" b="1" i="0">
                 <a:solidFill>
                   <a:srgbClr val="191E19"/>
                 </a:solidFill>
                 <a:latin typeface="Segoe UI"/>
               </a:rPr>
-              <a:t>Responsive to 390px</a:t>
-            </a:r>
-          </a:p>
-        </p:txBody>
-      </p:sp>
-      <p:sp>
-        <p:nvSpPr>
-          <p:cNvPr id="15" name="TextBox 14"/>
-          <p:cNvSpPr txBox="1"/>
-          <p:nvPr/>
-        </p:nvSpPr>
-        <p:spPr>
-          <a:xfrm>
-            <a:off x="822960" y="5769864"/>
-            <a:ext cx="4937760" cy="365760"/>
+              <a:t>Deployment</a:t>
+            </a:r>
+          </a:p>
+        </p:txBody>
+      </p:sp>
+      <p:sp>
+        <p:nvSpPr>
+          <p:cNvPr id="19" name="TextBox 18"/>
+          <p:cNvSpPr txBox="1"/>
+          <p:nvPr/>
+        </p:nvSpPr>
+        <p:spPr>
+          <a:xfrm>
+            <a:off x="2514600" y="5312664"/>
+            <a:ext cx="3886200" cy="457200"/>
           </a:xfrm>
           <a:prstGeom prst="rect">
             <a:avLst/>
@@ -6220,20 +6393,20 @@
               </a:spcAft>
             </a:pPr>
             <a:r>
-              <a:rPr sz="1250" b="0" i="0">
+              <a:rPr sz="1280" b="0" i="0">
                 <a:solidFill>
                   <a:srgbClr val="5C625A"/>
                 </a:solidFill>
                 <a:latin typeface="Segoe UI"/>
               </a:rPr>
-              <a:t>the chart switches to a narrower viewBox, not smaller type</a:t>
+              <a:t>Vercel only receives the Nuxt app and JSON artifacts, not Python ML libraries.</a:t>
             </a:r>
           </a:p>
         </p:txBody>
       </p:sp>
       <p:pic>
         <p:nvPicPr>
-          <p:cNvPr id="16" name="Picture 15" descr="hero.png"/>
+          <p:cNvPr id="20" name="Picture 19" descr="hero.png"/>
           <p:cNvPicPr>
             <a:picLocks noChangeAspect="1"/>
           </p:cNvPicPr>
@@ -6247,14 +6420,56 @@
         </p:blipFill>
         <p:spPr>
           <a:xfrm>
-            <a:off x="6766560" y="457200"/>
-            <a:ext cx="5273269" cy="5943600"/>
+            <a:off x="6629400" y="548640"/>
+            <a:ext cx="5070451" cy="5715000"/>
           </a:xfrm>
           <a:prstGeom prst="rect">
             <a:avLst/>
           </a:prstGeom>
         </p:spPr>
       </p:pic>
+      <p:sp>
+        <p:nvSpPr>
+          <p:cNvPr id="21" name="TextBox 20"/>
+          <p:cNvSpPr txBox="1"/>
+          <p:nvPr/>
+        </p:nvSpPr>
+        <p:spPr>
+          <a:xfrm>
+            <a:off x="822960" y="6199632"/>
+            <a:ext cx="9631375" cy="457200"/>
+          </a:xfrm>
+          <a:prstGeom prst="rect">
+            <a:avLst/>
+          </a:prstGeom>
+          <a:noFill/>
+        </p:spPr>
+        <p:txBody>
+          <a:bodyPr wrap="square" anchor="t" lIns="0" rIns="0" tIns="0" bIns="0">
+            <a:spAutoFit/>
+          </a:bodyPr>
+          <a:lstStyle/>
+          <a:p>
+            <a:pPr algn="l">
+              <a:lnSpc>
+                <a:spcPct val="135000"/>
+              </a:lnSpc>
+              <a:spcAft>
+                <a:spcPts val="0"/>
+              </a:spcAft>
+            </a:pPr>
+            <a:r>
+              <a:rPr sz="950" b="0" i="0" spc="60">
+                <a:solidFill>
+                  <a:srgbClr val="5C625A"/>
+                </a:solidFill>
+                <a:latin typeface="Consolas"/>
+              </a:rPr>
+              <a:t>One trained model, one TypeScript engine, two user-facing surfaces.</a:t>
+            </a:r>
+          </a:p>
+        </p:txBody>
+      </p:sp>
     </p:spTree>
   </p:cSld>
   <p:clrMapOvr>
@@ -6354,7 +6569,7 @@
                 </a:solidFill>
                 <a:latin typeface="Consolas"/>
               </a:rPr>
-              <a:t>DESIGN DECISION</a:t>
+              <a:t>DESIGN CHOICE</a:t>
             </a:r>
           </a:p>
         </p:txBody>
@@ -6396,7 +6611,7 @@
                 </a:solidFill>
                 <a:latin typeface="Georgia"/>
               </a:rPr>
-              <a:t>Where the record ends</a:t>
+              <a:t>The forecast must</a:t>
             </a:r>
           </a:p>
         </p:txBody>
@@ -6438,7 +6653,7 @@
                 </a:solidFill>
                 <a:latin typeface="Georgia"/>
               </a:rPr>
-              <a:t>must be unmistakable</a:t>
+              <a:t>look different</a:t>
             </a:r>
           </a:p>
         </p:txBody>
@@ -6501,8 +6716,8 @@
         </p:blipFill>
         <p:spPr>
           <a:xfrm>
-            <a:off x="822960" y="2194560"/>
-            <a:ext cx="6675120" cy="3287245"/>
+            <a:off x="822960" y="2148840"/>
+            <a:ext cx="6583680" cy="3242214"/>
           </a:xfrm>
           <a:prstGeom prst="rect">
             <a:avLst/>
@@ -6517,36 +6732,36 @@
         </p:nvSpPr>
         <p:spPr>
           <a:xfrm>
-            <a:off x="7955279" y="2194560"/>
-            <a:ext cx="3383280" cy="1645920"/>
-          </a:xfrm>
-          <a:prstGeom prst="rect">
-            <a:avLst/>
-          </a:prstGeom>
-          <a:noFill/>
-        </p:spPr>
-        <p:txBody>
-          <a:bodyPr wrap="square" anchor="t" lIns="0" rIns="0" tIns="0" bIns="0">
-            <a:spAutoFit/>
-          </a:bodyPr>
-          <a:lstStyle/>
-          <a:p>
-            <a:pPr algn="l">
-              <a:lnSpc>
-                <a:spcPct val="150000"/>
-              </a:lnSpc>
-              <a:spcAft>
-                <a:spcPts val="0"/>
-              </a:spcAft>
-            </a:pPr>
-            <a:r>
-              <a:rPr sz="1450" b="0" i="0">
+            <a:off x="7818120" y="2148840"/>
+            <a:ext cx="3520440" cy="1097280"/>
+          </a:xfrm>
+          <a:prstGeom prst="rect">
+            <a:avLst/>
+          </a:prstGeom>
+          <a:noFill/>
+        </p:spPr>
+        <p:txBody>
+          <a:bodyPr wrap="square" anchor="t" lIns="0" rIns="0" tIns="0" bIns="0">
+            <a:spAutoFit/>
+          </a:bodyPr>
+          <a:lstStyle/>
+          <a:p>
+            <a:pPr algn="l">
+              <a:lnSpc>
+                <a:spcPct val="145000"/>
+              </a:lnSpc>
+              <a:spcAft>
+                <a:spcPts val="0"/>
+              </a:spcAft>
+            </a:pPr>
+            <a:r>
+              <a:rPr sz="1500" b="0" i="0">
                 <a:solidFill>
                   <a:srgbClr val="191E19"/>
                 </a:solidFill>
                 <a:latin typeface="Segoe UI"/>
               </a:rPr>
-              <a:t>A charting library would draw the forecast as the next point on the same line. That is a lie of omission: it renders a model estimate with exactly the same authority as a recorded observation.</a:t>
+              <a:t>A normal line chart can accidentally overpromise. If the predicted point looks exactly like a real observation, the audience reads it as fact.</a:t>
             </a:r>
           </a:p>
         </p:txBody>
@@ -6559,7 +6774,7 @@
         </p:nvSpPr>
         <p:spPr>
           <a:xfrm>
-            <a:off x="7955279" y="3950208"/>
+            <a:off x="7818120" y="3776472"/>
             <a:ext cx="146304" cy="146304"/>
           </a:xfrm>
           <a:prstGeom prst="rect">
@@ -6603,30 +6818,30 @@
         </p:nvSpPr>
         <p:spPr>
           <a:xfrm>
-            <a:off x="8229600" y="3886200"/>
-            <a:ext cx="3108960" cy="256032"/>
-          </a:xfrm>
-          <a:prstGeom prst="rect">
-            <a:avLst/>
-          </a:prstGeom>
-          <a:noFill/>
-        </p:spPr>
-        <p:txBody>
-          <a:bodyPr wrap="square" anchor="t" lIns="0" rIns="0" tIns="0" bIns="0">
-            <a:spAutoFit/>
-          </a:bodyPr>
-          <a:lstStyle/>
-          <a:p>
-            <a:pPr algn="l">
-              <a:lnSpc>
-                <a:spcPct val="130000"/>
-              </a:lnSpc>
-              <a:spcAft>
-                <a:spcPts val="0"/>
-              </a:spcAft>
-            </a:pPr>
-            <a:r>
-              <a:rPr sz="1300" b="1" i="0">
+            <a:off x="8092440" y="3703320"/>
+            <a:ext cx="3200400" cy="256032"/>
+          </a:xfrm>
+          <a:prstGeom prst="rect">
+            <a:avLst/>
+          </a:prstGeom>
+          <a:noFill/>
+        </p:spPr>
+        <p:txBody>
+          <a:bodyPr wrap="square" anchor="t" lIns="0" rIns="0" tIns="0" bIns="0">
+            <a:spAutoFit/>
+          </a:bodyPr>
+          <a:lstStyle/>
+          <a:p>
+            <a:pPr algn="l">
+              <a:lnSpc>
+                <a:spcPct val="130000"/>
+              </a:lnSpc>
+              <a:spcAft>
+                <a:spcPts val="0"/>
+              </a:spcAft>
+            </a:pPr>
+            <a:r>
+              <a:rPr sz="1350" b="1" i="0">
                 <a:solidFill>
                   <a:srgbClr val="191E19"/>
                 </a:solidFill>
@@ -6645,30 +6860,30 @@
         </p:nvSpPr>
         <p:spPr>
           <a:xfrm>
-            <a:off x="8229600" y="4114800"/>
-            <a:ext cx="3108960" cy="256032"/>
-          </a:xfrm>
-          <a:prstGeom prst="rect">
-            <a:avLst/>
-          </a:prstGeom>
-          <a:noFill/>
-        </p:spPr>
-        <p:txBody>
-          <a:bodyPr wrap="square" anchor="t" lIns="0" rIns="0" tIns="0" bIns="0">
-            <a:spAutoFit/>
-          </a:bodyPr>
-          <a:lstStyle/>
-          <a:p>
-            <a:pPr algn="l">
-              <a:lnSpc>
-                <a:spcPct val="130000"/>
-              </a:lnSpc>
-              <a:spcAft>
-                <a:spcPts val="0"/>
-              </a:spcAft>
-            </a:pPr>
-            <a:r>
-              <a:rPr sz="1200" b="0" i="0">
+            <a:off x="8092440" y="3941064"/>
+            <a:ext cx="3154680" cy="274320"/>
+          </a:xfrm>
+          <a:prstGeom prst="rect">
+            <a:avLst/>
+          </a:prstGeom>
+          <a:noFill/>
+        </p:spPr>
+        <p:txBody>
+          <a:bodyPr wrap="square" anchor="t" lIns="0" rIns="0" tIns="0" bIns="0">
+            <a:spAutoFit/>
+          </a:bodyPr>
+          <a:lstStyle/>
+          <a:p>
+            <a:pPr algn="l">
+              <a:lnSpc>
+                <a:spcPct val="130000"/>
+              </a:lnSpc>
+              <a:spcAft>
+                <a:spcPts val="0"/>
+              </a:spcAft>
+            </a:pPr>
+            <a:r>
+              <a:rPr sz="1220" b="0" i="0">
                 <a:solidFill>
                   <a:srgbClr val="5C625A"/>
                 </a:solidFill>
@@ -6687,7 +6902,7 @@
         </p:nvSpPr>
         <p:spPr>
           <a:xfrm>
-            <a:off x="7955279" y="4498848"/>
+            <a:off x="7818120" y="4379976"/>
             <a:ext cx="146304" cy="146304"/>
           </a:xfrm>
           <a:prstGeom prst="rect">
@@ -6731,36 +6946,36 @@
         </p:nvSpPr>
         <p:spPr>
           <a:xfrm>
-            <a:off x="8229600" y="4434840"/>
-            <a:ext cx="3108960" cy="256032"/>
-          </a:xfrm>
-          <a:prstGeom prst="rect">
-            <a:avLst/>
-          </a:prstGeom>
-          <a:noFill/>
-        </p:spPr>
-        <p:txBody>
-          <a:bodyPr wrap="square" anchor="t" lIns="0" rIns="0" tIns="0" bIns="0">
-            <a:spAutoFit/>
-          </a:bodyPr>
-          <a:lstStyle/>
-          <a:p>
-            <a:pPr algn="l">
-              <a:lnSpc>
-                <a:spcPct val="130000"/>
-              </a:lnSpc>
-              <a:spcAft>
-                <a:spcPts val="0"/>
-              </a:spcAft>
-            </a:pPr>
-            <a:r>
-              <a:rPr sz="1300" b="1" i="0">
+            <a:off x="8092440" y="4306824"/>
+            <a:ext cx="3200400" cy="256032"/>
+          </a:xfrm>
+          <a:prstGeom prst="rect">
+            <a:avLst/>
+          </a:prstGeom>
+          <a:noFill/>
+        </p:spPr>
+        <p:txBody>
+          <a:bodyPr wrap="square" anchor="t" lIns="0" rIns="0" tIns="0" bIns="0">
+            <a:spAutoFit/>
+          </a:bodyPr>
+          <a:lstStyle/>
+          <a:p>
+            <a:pPr algn="l">
+              <a:lnSpc>
+                <a:spcPct val="130000"/>
+              </a:lnSpc>
+              <a:spcAft>
+                <a:spcPts val="0"/>
+              </a:spcAft>
+            </a:pPr>
+            <a:r>
+              <a:rPr sz="1350" b="1" i="0">
                 <a:solidFill>
                   <a:srgbClr val="191E19"/>
                 </a:solidFill>
                 <a:latin typeface="Segoe UI"/>
               </a:rPr>
-              <a:t>Dashed amber</a:t>
+              <a:t>Dashed segment</a:t>
             </a:r>
           </a:p>
         </p:txBody>
@@ -6773,36 +6988,36 @@
         </p:nvSpPr>
         <p:spPr>
           <a:xfrm>
-            <a:off x="8229600" y="4663440"/>
-            <a:ext cx="3108960" cy="256032"/>
-          </a:xfrm>
-          <a:prstGeom prst="rect">
-            <a:avLst/>
-          </a:prstGeom>
-          <a:noFill/>
-        </p:spPr>
-        <p:txBody>
-          <a:bodyPr wrap="square" anchor="t" lIns="0" rIns="0" tIns="0" bIns="0">
-            <a:spAutoFit/>
-          </a:bodyPr>
-          <a:lstStyle/>
-          <a:p>
-            <a:pPr algn="l">
-              <a:lnSpc>
-                <a:spcPct val="130000"/>
-              </a:lnSpc>
-              <a:spcAft>
-                <a:spcPts val="0"/>
-              </a:spcAft>
-            </a:pPr>
-            <a:r>
-              <a:rPr sz="1200" b="0" i="0">
+            <a:off x="8092440" y="4544568"/>
+            <a:ext cx="3154680" cy="274320"/>
+          </a:xfrm>
+          <a:prstGeom prst="rect">
+            <a:avLst/>
+          </a:prstGeom>
+          <a:noFill/>
+        </p:spPr>
+        <p:txBody>
+          <a:bodyPr wrap="square" anchor="t" lIns="0" rIns="0" tIns="0" bIns="0">
+            <a:spAutoFit/>
+          </a:bodyPr>
+          <a:lstStyle/>
+          <a:p>
+            <a:pPr algn="l">
+              <a:lnSpc>
+                <a:spcPct val="130000"/>
+              </a:lnSpc>
+              <a:spcAft>
+                <a:spcPts val="0"/>
+              </a:spcAft>
+            </a:pPr>
+            <a:r>
+              <a:rPr sz="1220" b="0" i="0">
                 <a:solidFill>
                   <a:srgbClr val="5C625A"/>
                 </a:solidFill>
                 <a:latin typeface="Segoe UI"/>
               </a:rPr>
-              <a:t>the model's estimate, rising</a:t>
+              <a:t>model estimate</a:t>
             </a:r>
           </a:p>
         </p:txBody>
@@ -6815,7 +7030,135 @@
         </p:nvSpPr>
         <p:spPr>
           <a:xfrm>
-            <a:off x="7955279" y="5047488"/>
+            <a:off x="7818120" y="4983480"/>
+            <a:ext cx="146304" cy="146304"/>
+          </a:xfrm>
+          <a:prstGeom prst="rect">
+            <a:avLst/>
+          </a:prstGeom>
+          <a:solidFill>
+            <a:srgbClr val="5C625A"/>
+          </a:solidFill>
+          <a:ln>
+            <a:noFill/>
+          </a:ln>
+          <a:effectLst/>
+        </p:spPr>
+        <p:style>
+          <a:lnRef idx="1">
+            <a:schemeClr val="accent1"/>
+          </a:lnRef>
+          <a:fillRef idx="3">
+            <a:schemeClr val="accent1"/>
+          </a:fillRef>
+          <a:effectRef idx="2">
+            <a:schemeClr val="accent1"/>
+          </a:effectRef>
+          <a:fontRef idx="minor">
+            <a:schemeClr val="lt1"/>
+          </a:fontRef>
+        </p:style>
+        <p:txBody>
+          <a:bodyPr rtlCol="0" anchor="ctr"/>
+          <a:lstStyle/>
+          <a:p>
+            <a:pPr algn="ctr"/>
+          </a:p>
+        </p:txBody>
+      </p:sp>
+      <p:sp>
+        <p:nvSpPr>
+          <p:cNvPr id="16" name="TextBox 15"/>
+          <p:cNvSpPr txBox="1"/>
+          <p:nvPr/>
+        </p:nvSpPr>
+        <p:spPr>
+          <a:xfrm>
+            <a:off x="8092440" y="4910328"/>
+            <a:ext cx="3200400" cy="256032"/>
+          </a:xfrm>
+          <a:prstGeom prst="rect">
+            <a:avLst/>
+          </a:prstGeom>
+          <a:noFill/>
+        </p:spPr>
+        <p:txBody>
+          <a:bodyPr wrap="square" anchor="t" lIns="0" rIns="0" tIns="0" bIns="0">
+            <a:spAutoFit/>
+          </a:bodyPr>
+          <a:lstStyle/>
+          <a:p>
+            <a:pPr algn="l">
+              <a:lnSpc>
+                <a:spcPct val="130000"/>
+              </a:lnSpc>
+              <a:spcAft>
+                <a:spcPts val="0"/>
+              </a:spcAft>
+            </a:pPr>
+            <a:r>
+              <a:rPr sz="1350" b="1" i="0">
+                <a:solidFill>
+                  <a:srgbClr val="191E19"/>
+                </a:solidFill>
+                <a:latin typeface="Segoe UI"/>
+              </a:rPr>
+              <a:t>Hollow ring</a:t>
+            </a:r>
+          </a:p>
+        </p:txBody>
+      </p:sp>
+      <p:sp>
+        <p:nvSpPr>
+          <p:cNvPr id="17" name="TextBox 16"/>
+          <p:cNvSpPr txBox="1"/>
+          <p:nvPr/>
+        </p:nvSpPr>
+        <p:spPr>
+          <a:xfrm>
+            <a:off x="8092440" y="5148072"/>
+            <a:ext cx="3154680" cy="274320"/>
+          </a:xfrm>
+          <a:prstGeom prst="rect">
+            <a:avLst/>
+          </a:prstGeom>
+          <a:noFill/>
+        </p:spPr>
+        <p:txBody>
+          <a:bodyPr wrap="square" anchor="t" lIns="0" rIns="0" tIns="0" bIns="0">
+            <a:spAutoFit/>
+          </a:bodyPr>
+          <a:lstStyle/>
+          <a:p>
+            <a:pPr algn="l">
+              <a:lnSpc>
+                <a:spcPct val="130000"/>
+              </a:lnSpc>
+              <a:spcAft>
+                <a:spcPts val="0"/>
+              </a:spcAft>
+            </a:pPr>
+            <a:r>
+              <a:rPr sz="1220" b="0" i="0">
+                <a:solidFill>
+                  <a:srgbClr val="5C625A"/>
+                </a:solidFill>
+                <a:latin typeface="Segoe UI"/>
+              </a:rPr>
+              <a:t>not an observed price</a:t>
+            </a:r>
+          </a:p>
+        </p:txBody>
+      </p:sp>
+      <p:sp>
+        <p:nvSpPr>
+          <p:cNvPr id="18" name="Rectangle 17"/>
+          <p:cNvSpPr/>
+          <p:nvPr/>
+        </p:nvSpPr>
+        <p:spPr>
+          <a:xfrm>
+            <a:off x="7818120" y="5586984"/>
             <a:ext cx="146304" cy="146304"/>
           </a:xfrm>
           <a:prstGeom prst="rect">
@@ -6853,212 +7196,84 @@
       </p:sp>
       <p:sp>
         <p:nvSpPr>
-          <p:cNvPr id="16" name="TextBox 15"/>
-          <p:cNvSpPr txBox="1"/>
-          <p:nvPr/>
-        </p:nvSpPr>
-        <p:spPr>
-          <a:xfrm>
-            <a:off x="8229600" y="4983480"/>
-            <a:ext cx="3108960" cy="256032"/>
-          </a:xfrm>
-          <a:prstGeom prst="rect">
-            <a:avLst/>
-          </a:prstGeom>
-          <a:noFill/>
-        </p:spPr>
-        <p:txBody>
-          <a:bodyPr wrap="square" anchor="t" lIns="0" rIns="0" tIns="0" bIns="0">
-            <a:spAutoFit/>
-          </a:bodyPr>
-          <a:lstStyle/>
-          <a:p>
-            <a:pPr algn="l">
-              <a:lnSpc>
-                <a:spcPct val="130000"/>
-              </a:lnSpc>
-              <a:spcAft>
-                <a:spcPts val="0"/>
-              </a:spcAft>
-            </a:pPr>
-            <a:r>
-              <a:rPr sz="1300" b="1" i="0">
+          <p:cNvPr id="19" name="TextBox 18"/>
+          <p:cNvSpPr txBox="1"/>
+          <p:nvPr/>
+        </p:nvSpPr>
+        <p:spPr>
+          <a:xfrm>
+            <a:off x="8092440" y="5513832"/>
+            <a:ext cx="3200400" cy="256032"/>
+          </a:xfrm>
+          <a:prstGeom prst="rect">
+            <a:avLst/>
+          </a:prstGeom>
+          <a:noFill/>
+        </p:spPr>
+        <p:txBody>
+          <a:bodyPr wrap="square" anchor="t" lIns="0" rIns="0" tIns="0" bIns="0">
+            <a:spAutoFit/>
+          </a:bodyPr>
+          <a:lstStyle/>
+          <a:p>
+            <a:pPr algn="l">
+              <a:lnSpc>
+                <a:spcPct val="130000"/>
+              </a:lnSpc>
+              <a:spcAft>
+                <a:spcPts val="0"/>
+              </a:spcAft>
+            </a:pPr>
+            <a:r>
+              <a:rPr sz="1350" b="1" i="0">
                 <a:solidFill>
                   <a:srgbClr val="191E19"/>
                 </a:solidFill>
                 <a:latin typeface="Segoe UI"/>
               </a:rPr>
-              <a:t>Dashed red</a:t>
-            </a:r>
-          </a:p>
-        </p:txBody>
-      </p:sp>
-      <p:sp>
-        <p:nvSpPr>
-          <p:cNvPr id="17" name="TextBox 16"/>
-          <p:cNvSpPr txBox="1"/>
-          <p:nvPr/>
-        </p:nvSpPr>
-        <p:spPr>
-          <a:xfrm>
-            <a:off x="8229600" y="5212080"/>
-            <a:ext cx="3108960" cy="256032"/>
-          </a:xfrm>
-          <a:prstGeom prst="rect">
-            <a:avLst/>
-          </a:prstGeom>
-          <a:noFill/>
-        </p:spPr>
-        <p:txBody>
-          <a:bodyPr wrap="square" anchor="t" lIns="0" rIns="0" tIns="0" bIns="0">
-            <a:spAutoFit/>
-          </a:bodyPr>
-          <a:lstStyle/>
-          <a:p>
-            <a:pPr algn="l">
-              <a:lnSpc>
-                <a:spcPct val="130000"/>
-              </a:lnSpc>
-              <a:spcAft>
-                <a:spcPts val="0"/>
-              </a:spcAft>
-            </a:pPr>
-            <a:r>
-              <a:rPr sz="1200" b="0" i="0">
+              <a:t>Stale warning</a:t>
+            </a:r>
+          </a:p>
+        </p:txBody>
+      </p:sp>
+      <p:sp>
+        <p:nvSpPr>
+          <p:cNvPr id="20" name="TextBox 19"/>
+          <p:cNvSpPr txBox="1"/>
+          <p:nvPr/>
+        </p:nvSpPr>
+        <p:spPr>
+          <a:xfrm>
+            <a:off x="8092440" y="5751576"/>
+            <a:ext cx="3154680" cy="274320"/>
+          </a:xfrm>
+          <a:prstGeom prst="rect">
+            <a:avLst/>
+          </a:prstGeom>
+          <a:noFill/>
+        </p:spPr>
+        <p:txBody>
+          <a:bodyPr wrap="square" anchor="t" lIns="0" rIns="0" tIns="0" bIns="0">
+            <a:spAutoFit/>
+          </a:bodyPr>
+          <a:lstStyle/>
+          <a:p>
+            <a:pPr algn="l">
+              <a:lnSpc>
+                <a:spcPct val="130000"/>
+              </a:lnSpc>
+              <a:spcAft>
+                <a:spcPts val="0"/>
+              </a:spcAft>
+            </a:pPr>
+            <a:r>
+              <a:rPr sz="1220" b="0" i="0">
                 <a:solidFill>
                   <a:srgbClr val="5C625A"/>
                 </a:solidFill>
                 <a:latin typeface="Segoe UI"/>
               </a:rPr>
-              <a:t>the model's estimate, falling</a:t>
-            </a:r>
-          </a:p>
-        </p:txBody>
-      </p:sp>
-      <p:sp>
-        <p:nvSpPr>
-          <p:cNvPr id="18" name="Rectangle 17"/>
-          <p:cNvSpPr/>
-          <p:nvPr/>
-        </p:nvSpPr>
-        <p:spPr>
-          <a:xfrm>
-            <a:off x="7955279" y="5596128"/>
-            <a:ext cx="146304" cy="146304"/>
-          </a:xfrm>
-          <a:prstGeom prst="rect">
-            <a:avLst/>
-          </a:prstGeom>
-          <a:solidFill>
-            <a:srgbClr val="5C625A"/>
-          </a:solidFill>
-          <a:ln>
-            <a:noFill/>
-          </a:ln>
-          <a:effectLst/>
-        </p:spPr>
-        <p:style>
-          <a:lnRef idx="1">
-            <a:schemeClr val="accent1"/>
-          </a:lnRef>
-          <a:fillRef idx="3">
-            <a:schemeClr val="accent1"/>
-          </a:fillRef>
-          <a:effectRef idx="2">
-            <a:schemeClr val="accent1"/>
-          </a:effectRef>
-          <a:fontRef idx="minor">
-            <a:schemeClr val="lt1"/>
-          </a:fontRef>
-        </p:style>
-        <p:txBody>
-          <a:bodyPr rtlCol="0" anchor="ctr"/>
-          <a:lstStyle/>
-          <a:p>
-            <a:pPr algn="ctr"/>
-          </a:p>
-        </p:txBody>
-      </p:sp>
-      <p:sp>
-        <p:nvSpPr>
-          <p:cNvPr id="19" name="TextBox 18"/>
-          <p:cNvSpPr txBox="1"/>
-          <p:nvPr/>
-        </p:nvSpPr>
-        <p:spPr>
-          <a:xfrm>
-            <a:off x="8229600" y="5532120"/>
-            <a:ext cx="3108960" cy="256032"/>
-          </a:xfrm>
-          <a:prstGeom prst="rect">
-            <a:avLst/>
-          </a:prstGeom>
-          <a:noFill/>
-        </p:spPr>
-        <p:txBody>
-          <a:bodyPr wrap="square" anchor="t" lIns="0" rIns="0" tIns="0" bIns="0">
-            <a:spAutoFit/>
-          </a:bodyPr>
-          <a:lstStyle/>
-          <a:p>
-            <a:pPr algn="l">
-              <a:lnSpc>
-                <a:spcPct val="130000"/>
-              </a:lnSpc>
-              <a:spcAft>
-                <a:spcPts val="0"/>
-              </a:spcAft>
-            </a:pPr>
-            <a:r>
-              <a:rPr sz="1300" b="1" i="0">
-                <a:solidFill>
-                  <a:srgbClr val="191E19"/>
-                </a:solidFill>
-                <a:latin typeface="Segoe UI"/>
-              </a:rPr>
-              <a:t>Hollow ring</a:t>
-            </a:r>
-          </a:p>
-        </p:txBody>
-      </p:sp>
-      <p:sp>
-        <p:nvSpPr>
-          <p:cNvPr id="20" name="TextBox 19"/>
-          <p:cNvSpPr txBox="1"/>
-          <p:nvPr/>
-        </p:nvSpPr>
-        <p:spPr>
-          <a:xfrm>
-            <a:off x="8229600" y="5760720"/>
-            <a:ext cx="3108960" cy="256032"/>
-          </a:xfrm>
-          <a:prstGeom prst="rect">
-            <a:avLst/>
-          </a:prstGeom>
-          <a:noFill/>
-        </p:spPr>
-        <p:txBody>
-          <a:bodyPr wrap="square" anchor="t" lIns="0" rIns="0" tIns="0" bIns="0">
-            <a:spAutoFit/>
-          </a:bodyPr>
-          <a:lstStyle/>
-          <a:p>
-            <a:pPr algn="l">
-              <a:lnSpc>
-                <a:spcPct val="130000"/>
-              </a:lnSpc>
-              <a:spcAft>
-                <a:spcPts val="0"/>
-              </a:spcAft>
-            </a:pPr>
-            <a:r>
-              <a:rPr sz="1200" b="0" i="0">
-                <a:solidFill>
-                  <a:srgbClr val="5C625A"/>
-                </a:solidFill>
-                <a:latin typeface="Segoe UI"/>
-              </a:rPr>
-              <a:t>not an observation</a:t>
+              <a:t>shown when the latest real data is old</a:t>
             </a:r>
           </a:p>
         </p:txBody>
@@ -7100,7 +7315,7 @@
                 </a:solidFill>
                 <a:latin typeface="Consolas"/>
               </a:rPr>
-              <a:t>Hand-rolled SVG — about 200 lines, no charting library.</a:t>
+              <a:t>The visual design protects the user from confusing an estimate with official market data.</a:t>
             </a:r>
           </a:p>
         </p:txBody>
@@ -7204,7 +7419,7 @@
                 </a:solidFill>
                 <a:latin typeface="Consolas"/>
               </a:rPr>
-              <a:t>FORECAST HORIZON</a:t>
+              <a:t>LIMITS</a:t>
             </a:r>
           </a:p>
         </p:txBody>
@@ -7246,7 +7461,7 @@
                 </a:solidFill>
                 <a:latin typeface="Georgia"/>
               </a:rPr>
-              <a:t>One period past the record,</a:t>
+              <a:t>Strong result,</a:t>
             </a:r>
           </a:p>
         </p:txBody>
@@ -7288,7 +7503,7 @@
                 </a:solidFill>
                 <a:latin typeface="Georgia"/>
               </a:rPr>
-              <a:t>not one month past today</a:t>
+              <a:t>clear next step</a:t>
             </a:r>
           </a:p>
         </p:txBody>
@@ -7343,476 +7558,50 @@
         </p:nvSpPr>
         <p:spPr>
           <a:xfrm>
-            <a:off x="822960" y="2240280"/>
-            <a:ext cx="5120640" cy="1463040"/>
-          </a:xfrm>
-          <a:prstGeom prst="rect">
-            <a:avLst/>
-          </a:prstGeom>
-          <a:noFill/>
-        </p:spPr>
-        <p:txBody>
-          <a:bodyPr wrap="square" anchor="t" lIns="0" rIns="0" tIns="0" bIns="0">
-            <a:spAutoFit/>
-          </a:bodyPr>
-          <a:lstStyle/>
-          <a:p>
-            <a:pPr algn="l">
-              <a:lnSpc>
-                <a:spcPct val="150000"/>
-              </a:lnSpc>
-              <a:spcAft>
-                <a:spcPts val="0"/>
-              </a:spcAft>
-            </a:pPr>
-            <a:r>
-              <a:rPr sz="1600" b="0" i="0">
+            <a:off x="822960" y="2148840"/>
+            <a:ext cx="10058400" cy="685800"/>
+          </a:xfrm>
+          <a:prstGeom prst="rect">
+            <a:avLst/>
+          </a:prstGeom>
+          <a:noFill/>
+        </p:spPr>
+        <p:txBody>
+          <a:bodyPr wrap="square" anchor="t" lIns="0" rIns="0" tIns="0" bIns="0">
+            <a:spAutoFit/>
+          </a:bodyPr>
+          <a:lstStyle/>
+          <a:p>
+            <a:pPr algn="l">
+              <a:lnSpc>
+                <a:spcPct val="140000"/>
+              </a:lnSpc>
+              <a:spcAft>
+                <a:spcPts val="0"/>
+              </a:spcAft>
+            </a:pPr>
+            <a:r>
+              <a:rPr sz="1550" b="0" i="0">
                 <a:solidFill>
                   <a:srgbClr val="191E19"/>
                 </a:solidFill>
                 <a:latin typeface="Segoe UI"/>
               </a:rPr>
-              <a:t>The model forecasts one reporting period past each series' own last observation — not one month past today. Series stopped reporting at very different times, so that date differs for every commodity and market.</a:t>
-            </a:r>
-          </a:p>
-        </p:txBody>
-      </p:sp>
-      <p:sp>
-        <p:nvSpPr>
-          <p:cNvPr id="8" name="TextBox 7"/>
-          <p:cNvSpPr txBox="1"/>
-          <p:nvPr/>
-        </p:nvSpPr>
-        <p:spPr>
-          <a:xfrm>
-            <a:off x="822960" y="3794760"/>
-            <a:ext cx="5120640" cy="274320"/>
-          </a:xfrm>
-          <a:prstGeom prst="rect">
-            <a:avLst/>
-          </a:prstGeom>
-          <a:noFill/>
-        </p:spPr>
-        <p:txBody>
-          <a:bodyPr wrap="square" anchor="t" lIns="0" rIns="0" tIns="0" bIns="0">
-            <a:spAutoFit/>
-          </a:bodyPr>
-          <a:lstStyle/>
-          <a:p>
-            <a:pPr algn="l">
-              <a:lnSpc>
-                <a:spcPct val="130000"/>
-              </a:lnSpc>
-              <a:spcAft>
-                <a:spcPts val="0"/>
-              </a:spcAft>
-            </a:pPr>
-            <a:r>
-              <a:rPr sz="1000" b="0" i="0" spc="160">
-                <a:solidFill>
-                  <a:srgbClr val="5C625A"/>
-                </a:solidFill>
-                <a:latin typeface="Consolas"/>
-              </a:rPr>
-              <a:t>LAST OBSERVATION ACROSS 3,442 SERVED SERIES</a:t>
-            </a:r>
-          </a:p>
-        </p:txBody>
-      </p:sp>
-      <p:sp>
-        <p:nvSpPr>
-          <p:cNvPr id="9" name="Rectangle 8"/>
+              <a:t>The model performs well, but the honest boundary is important: it forecasts from recent prices, so shocks and stale series remain hard.</a:t>
+            </a:r>
+          </a:p>
+        </p:txBody>
+      </p:sp>
+      <p:sp>
+        <p:nvSpPr>
+          <p:cNvPr id="8" name="Rectangle 7"/>
           <p:cNvSpPr/>
           <p:nvPr/>
         </p:nvSpPr>
         <p:spPr>
           <a:xfrm>
-            <a:off x="822960" y="4160520"/>
-            <a:ext cx="957782" cy="201168"/>
-          </a:xfrm>
-          <a:prstGeom prst="rect">
-            <a:avLst/>
-          </a:prstGeom>
-          <a:solidFill>
-            <a:srgbClr val="2F5D46"/>
-          </a:solidFill>
-          <a:ln>
-            <a:noFill/>
-          </a:ln>
-          <a:effectLst/>
-        </p:spPr>
-        <p:style>
-          <a:lnRef idx="1">
-            <a:schemeClr val="accent1"/>
-          </a:lnRef>
-          <a:fillRef idx="3">
-            <a:schemeClr val="accent1"/>
-          </a:fillRef>
-          <a:effectRef idx="2">
-            <a:schemeClr val="accent1"/>
-          </a:effectRef>
-          <a:fontRef idx="minor">
-            <a:schemeClr val="lt1"/>
-          </a:fontRef>
-        </p:style>
-        <p:txBody>
-          <a:bodyPr rtlCol="0" anchor="ctr"/>
-          <a:lstStyle/>
-          <a:p>
-            <a:pPr algn="ctr"/>
-          </a:p>
-        </p:txBody>
-      </p:sp>
-      <p:sp>
-        <p:nvSpPr>
-          <p:cNvPr id="10" name="TextBox 9"/>
-          <p:cNvSpPr txBox="1"/>
-          <p:nvPr/>
-        </p:nvSpPr>
-        <p:spPr>
-          <a:xfrm>
-            <a:off x="1872182" y="4133088"/>
-            <a:ext cx="640080" cy="274320"/>
-          </a:xfrm>
-          <a:prstGeom prst="rect">
-            <a:avLst/>
-          </a:prstGeom>
-          <a:noFill/>
-        </p:spPr>
-        <p:txBody>
-          <a:bodyPr wrap="square" anchor="t" lIns="0" rIns="0" tIns="0" bIns="0">
-            <a:spAutoFit/>
-          </a:bodyPr>
-          <a:lstStyle/>
-          <a:p>
-            <a:pPr algn="l">
-              <a:lnSpc>
-                <a:spcPct val="130000"/>
-              </a:lnSpc>
-              <a:spcAft>
-                <a:spcPts val="0"/>
-              </a:spcAft>
-            </a:pPr>
-            <a:r>
-              <a:rPr sz="1150" b="1" i="0">
-                <a:solidFill>
-                  <a:srgbClr val="2F5D46"/>
-                </a:solidFill>
-                <a:latin typeface="Consolas"/>
-              </a:rPr>
-              <a:t>34%</a:t>
-            </a:r>
-          </a:p>
-        </p:txBody>
-      </p:sp>
-      <p:sp>
-        <p:nvSpPr>
-          <p:cNvPr id="11" name="TextBox 10"/>
-          <p:cNvSpPr txBox="1"/>
-          <p:nvPr/>
-        </p:nvSpPr>
-        <p:spPr>
-          <a:xfrm>
-            <a:off x="822960" y="4398264"/>
-            <a:ext cx="4937760" cy="274320"/>
-          </a:xfrm>
-          <a:prstGeom prst="rect">
-            <a:avLst/>
-          </a:prstGeom>
-          <a:noFill/>
-        </p:spPr>
-        <p:txBody>
-          <a:bodyPr wrap="square" anchor="t" lIns="0" rIns="0" tIns="0" bIns="0">
-            <a:spAutoFit/>
-          </a:bodyPr>
-          <a:lstStyle/>
-          <a:p>
-            <a:pPr algn="l">
-              <a:lnSpc>
-                <a:spcPct val="130000"/>
-              </a:lnSpc>
-              <a:spcAft>
-                <a:spcPts val="0"/>
-              </a:spcAft>
-            </a:pPr>
-            <a:r>
-              <a:rPr sz="1250" b="0" i="0">
-                <a:solidFill>
-                  <a:srgbClr val="5C625A"/>
-                </a:solidFill>
-                <a:latin typeface="Segoe UI"/>
-              </a:rPr>
-              <a:t>2026-03 — still reporting  ·  1,163</a:t>
-            </a:r>
-          </a:p>
-        </p:txBody>
-      </p:sp>
-      <p:sp>
-        <p:nvSpPr>
-          <p:cNvPr id="12" name="Rectangle 11"/>
-          <p:cNvSpPr/>
-          <p:nvPr/>
-        </p:nvSpPr>
-        <p:spPr>
-          <a:xfrm>
-            <a:off x="822960" y="4818888"/>
-            <a:ext cx="286593" cy="201168"/>
-          </a:xfrm>
-          <a:prstGeom prst="rect">
-            <a:avLst/>
-          </a:prstGeom>
-          <a:solidFill>
-            <a:srgbClr val="A06D05"/>
-          </a:solidFill>
-          <a:ln>
-            <a:noFill/>
-          </a:ln>
-          <a:effectLst/>
-        </p:spPr>
-        <p:style>
-          <a:lnRef idx="1">
-            <a:schemeClr val="accent1"/>
-          </a:lnRef>
-          <a:fillRef idx="3">
-            <a:schemeClr val="accent1"/>
-          </a:fillRef>
-          <a:effectRef idx="2">
-            <a:schemeClr val="accent1"/>
-          </a:effectRef>
-          <a:fontRef idx="minor">
-            <a:schemeClr val="lt1"/>
-          </a:fontRef>
-        </p:style>
-        <p:txBody>
-          <a:bodyPr rtlCol="0" anchor="ctr"/>
-          <a:lstStyle/>
-          <a:p>
-            <a:pPr algn="ctr"/>
-          </a:p>
-        </p:txBody>
-      </p:sp>
-      <p:sp>
-        <p:nvSpPr>
-          <p:cNvPr id="13" name="TextBox 12"/>
-          <p:cNvSpPr txBox="1"/>
-          <p:nvPr/>
-        </p:nvSpPr>
-        <p:spPr>
-          <a:xfrm>
-            <a:off x="1200993" y="4791456"/>
-            <a:ext cx="640080" cy="274320"/>
-          </a:xfrm>
-          <a:prstGeom prst="rect">
-            <a:avLst/>
-          </a:prstGeom>
-          <a:noFill/>
-        </p:spPr>
-        <p:txBody>
-          <a:bodyPr wrap="square" anchor="t" lIns="0" rIns="0" tIns="0" bIns="0">
-            <a:spAutoFit/>
-          </a:bodyPr>
-          <a:lstStyle/>
-          <a:p>
-            <a:pPr algn="l">
-              <a:lnSpc>
-                <a:spcPct val="130000"/>
-              </a:lnSpc>
-              <a:spcAft>
-                <a:spcPts val="0"/>
-              </a:spcAft>
-            </a:pPr>
-            <a:r>
-              <a:rPr sz="1150" b="1" i="0">
-                <a:solidFill>
-                  <a:srgbClr val="A06D05"/>
-                </a:solidFill>
-                <a:latin typeface="Consolas"/>
-              </a:rPr>
-              <a:t>10%</a:t>
-            </a:r>
-          </a:p>
-        </p:txBody>
-      </p:sp>
-      <p:sp>
-        <p:nvSpPr>
-          <p:cNvPr id="14" name="TextBox 13"/>
-          <p:cNvSpPr txBox="1"/>
-          <p:nvPr/>
-        </p:nvSpPr>
-        <p:spPr>
-          <a:xfrm>
-            <a:off x="822960" y="5056632"/>
-            <a:ext cx="4937760" cy="274320"/>
-          </a:xfrm>
-          <a:prstGeom prst="rect">
-            <a:avLst/>
-          </a:prstGeom>
-          <a:noFill/>
-        </p:spPr>
-        <p:txBody>
-          <a:bodyPr wrap="square" anchor="t" lIns="0" rIns="0" tIns="0" bIns="0">
-            <a:spAutoFit/>
-          </a:bodyPr>
-          <a:lstStyle/>
-          <a:p>
-            <a:pPr algn="l">
-              <a:lnSpc>
-                <a:spcPct val="130000"/>
-              </a:lnSpc>
-              <a:spcAft>
-                <a:spcPts val="0"/>
-              </a:spcAft>
-            </a:pPr>
-            <a:r>
-              <a:rPr sz="1250" b="0" i="0">
-                <a:solidFill>
-                  <a:srgbClr val="5C625A"/>
-                </a:solidFill>
-                <a:latin typeface="Segoe UI"/>
-              </a:rPr>
-              <a:t>2025 — recently stopped  ·  348</a:t>
-            </a:r>
-          </a:p>
-        </p:txBody>
-      </p:sp>
-      <p:sp>
-        <p:nvSpPr>
-          <p:cNvPr id="15" name="Rectangle 14"/>
-          <p:cNvSpPr/>
-          <p:nvPr/>
-        </p:nvSpPr>
-        <p:spPr>
-          <a:xfrm>
-            <a:off x="822960" y="5477256"/>
-            <a:ext cx="1590264" cy="201168"/>
-          </a:xfrm>
-          <a:prstGeom prst="rect">
-            <a:avLst/>
-          </a:prstGeom>
-          <a:solidFill>
-            <a:srgbClr val="6B2545"/>
-          </a:solidFill>
-          <a:ln>
-            <a:noFill/>
-          </a:ln>
-          <a:effectLst/>
-        </p:spPr>
-        <p:style>
-          <a:lnRef idx="1">
-            <a:schemeClr val="accent1"/>
-          </a:lnRef>
-          <a:fillRef idx="3">
-            <a:schemeClr val="accent1"/>
-          </a:fillRef>
-          <a:effectRef idx="2">
-            <a:schemeClr val="accent1"/>
-          </a:effectRef>
-          <a:fontRef idx="minor">
-            <a:schemeClr val="lt1"/>
-          </a:fontRef>
-        </p:style>
-        <p:txBody>
-          <a:bodyPr rtlCol="0" anchor="ctr"/>
-          <a:lstStyle/>
-          <a:p>
-            <a:pPr algn="ctr"/>
-          </a:p>
-        </p:txBody>
-      </p:sp>
-      <p:sp>
-        <p:nvSpPr>
-          <p:cNvPr id="16" name="TextBox 15"/>
-          <p:cNvSpPr txBox="1"/>
-          <p:nvPr/>
-        </p:nvSpPr>
-        <p:spPr>
-          <a:xfrm>
-            <a:off x="2504664" y="5449824"/>
-            <a:ext cx="640080" cy="274320"/>
-          </a:xfrm>
-          <a:prstGeom prst="rect">
-            <a:avLst/>
-          </a:prstGeom>
-          <a:noFill/>
-        </p:spPr>
-        <p:txBody>
-          <a:bodyPr wrap="square" anchor="t" lIns="0" rIns="0" tIns="0" bIns="0">
-            <a:spAutoFit/>
-          </a:bodyPr>
-          <a:lstStyle/>
-          <a:p>
-            <a:pPr algn="l">
-              <a:lnSpc>
-                <a:spcPct val="130000"/>
-              </a:lnSpc>
-              <a:spcAft>
-                <a:spcPts val="0"/>
-              </a:spcAft>
-            </a:pPr>
-            <a:r>
-              <a:rPr sz="1150" b="1" i="0">
-                <a:solidFill>
-                  <a:srgbClr val="6B2545"/>
-                </a:solidFill>
-                <a:latin typeface="Consolas"/>
-              </a:rPr>
-              <a:t>56%</a:t>
-            </a:r>
-          </a:p>
-        </p:txBody>
-      </p:sp>
-      <p:sp>
-        <p:nvSpPr>
-          <p:cNvPr id="17" name="TextBox 16"/>
-          <p:cNvSpPr txBox="1"/>
-          <p:nvPr/>
-        </p:nvSpPr>
-        <p:spPr>
-          <a:xfrm>
-            <a:off x="822960" y="5715000"/>
-            <a:ext cx="4937760" cy="274320"/>
-          </a:xfrm>
-          <a:prstGeom prst="rect">
-            <a:avLst/>
-          </a:prstGeom>
-          <a:noFill/>
-        </p:spPr>
-        <p:txBody>
-          <a:bodyPr wrap="square" anchor="t" lIns="0" rIns="0" tIns="0" bIns="0">
-            <a:spAutoFit/>
-          </a:bodyPr>
-          <a:lstStyle/>
-          <a:p>
-            <a:pPr algn="l">
-              <a:lnSpc>
-                <a:spcPct val="130000"/>
-              </a:lnSpc>
-              <a:spcAft>
-                <a:spcPts val="0"/>
-              </a:spcAft>
-            </a:pPr>
-            <a:r>
-              <a:rPr sz="1250" b="0" i="0">
-                <a:solidFill>
-                  <a:srgbClr val="5C625A"/>
-                </a:solidFill>
-                <a:latin typeface="Segoe UI"/>
-              </a:rPr>
-              <a:t>2024 or earlier — stale  ·  1,931</a:t>
-            </a:r>
-          </a:p>
-        </p:txBody>
-      </p:sp>
-      <p:sp>
-        <p:nvSpPr>
-          <p:cNvPr id="18" name="Rectangle 17"/>
-          <p:cNvSpPr/>
-          <p:nvPr/>
-        </p:nvSpPr>
-        <p:spPr>
-          <a:xfrm>
-            <a:off x="6336792" y="2194560"/>
-            <a:ext cx="5029200" cy="3611880"/>
+            <a:off x="822960" y="3063240"/>
+            <a:ext cx="10545775" cy="804672"/>
           </a:xfrm>
           <a:prstGeom prst="rect">
             <a:avLst/>
@@ -7851,14 +7640,14 @@
       </p:sp>
       <p:sp>
         <p:nvSpPr>
-          <p:cNvPr id="19" name="Rectangle 18"/>
+          <p:cNvPr id="9" name="Rectangle 8"/>
           <p:cNvSpPr/>
           <p:nvPr/>
         </p:nvSpPr>
         <p:spPr>
           <a:xfrm>
-            <a:off x="6336792" y="2194560"/>
-            <a:ext cx="45720" cy="3611880"/>
+            <a:off x="822960" y="3063240"/>
+            <a:ext cx="45720" cy="804672"/>
           </a:xfrm>
           <a:prstGeom prst="rect">
             <a:avLst/>
@@ -7895,129 +7684,439 @@
       </p:sp>
       <p:sp>
         <p:nvSpPr>
+          <p:cNvPr id="10" name="TextBox 9"/>
+          <p:cNvSpPr txBox="1"/>
+          <p:nvPr/>
+        </p:nvSpPr>
+        <p:spPr>
+          <a:xfrm>
+            <a:off x="1143000" y="3246120"/>
+            <a:ext cx="2286000" cy="274320"/>
+          </a:xfrm>
+          <a:prstGeom prst="rect">
+            <a:avLst/>
+          </a:prstGeom>
+          <a:noFill/>
+        </p:spPr>
+        <p:txBody>
+          <a:bodyPr wrap="square" anchor="t" lIns="0" rIns="0" tIns="0" bIns="0">
+            <a:spAutoFit/>
+          </a:bodyPr>
+          <a:lstStyle/>
+          <a:p>
+            <a:pPr algn="l">
+              <a:lnSpc>
+                <a:spcPct val="130000"/>
+              </a:lnSpc>
+              <a:spcAft>
+                <a:spcPts val="0"/>
+              </a:spcAft>
+            </a:pPr>
+            <a:r>
+              <a:rPr sz="1000" b="0" i="0" spc="140">
+                <a:solidFill>
+                  <a:srgbClr val="5C625A"/>
+                </a:solidFill>
+                <a:latin typeface="Consolas"/>
+              </a:rPr>
+              <a:t>WHAT WORKS</a:t>
+            </a:r>
+          </a:p>
+        </p:txBody>
+      </p:sp>
+      <p:sp>
+        <p:nvSpPr>
+          <p:cNvPr id="11" name="TextBox 10"/>
+          <p:cNvSpPr txBox="1"/>
+          <p:nvPr/>
+        </p:nvSpPr>
+        <p:spPr>
+          <a:xfrm>
+            <a:off x="3520440" y="3218688"/>
+            <a:ext cx="7498079" cy="411480"/>
+          </a:xfrm>
+          <a:prstGeom prst="rect">
+            <a:avLst/>
+          </a:prstGeom>
+          <a:noFill/>
+        </p:spPr>
+        <p:txBody>
+          <a:bodyPr wrap="square" anchor="t" lIns="0" rIns="0" tIns="0" bIns="0">
+            <a:spAutoFit/>
+          </a:bodyPr>
+          <a:lstStyle/>
+          <a:p>
+            <a:pPr algn="l">
+              <a:lnSpc>
+                <a:spcPct val="125000"/>
+              </a:lnSpc>
+              <a:spcAft>
+                <a:spcPts val="0"/>
+              </a:spcAft>
+            </a:pPr>
+            <a:r>
+              <a:rPr sz="1400" b="0" i="0">
+                <a:solidFill>
+                  <a:srgbClr val="191E19"/>
+                </a:solidFill>
+                <a:latin typeface="Segoe UI"/>
+              </a:rPr>
+              <a:t>R2 = 0.950; average error about $0.164 on held-out prices.</a:t>
+            </a:r>
+          </a:p>
+        </p:txBody>
+      </p:sp>
+      <p:sp>
+        <p:nvSpPr>
+          <p:cNvPr id="12" name="Rectangle 11"/>
+          <p:cNvSpPr/>
+          <p:nvPr/>
+        </p:nvSpPr>
+        <p:spPr>
+          <a:xfrm>
+            <a:off x="822960" y="4023360"/>
+            <a:ext cx="10545775" cy="804672"/>
+          </a:xfrm>
+          <a:prstGeom prst="rect">
+            <a:avLst/>
+          </a:prstGeom>
+          <a:solidFill>
+            <a:srgbClr val="FCFBF7"/>
+          </a:solidFill>
+          <a:ln w="12700">
+            <a:solidFill>
+              <a:srgbClr val="DCD9C9"/>
+            </a:solidFill>
+          </a:ln>
+          <a:effectLst/>
+        </p:spPr>
+        <p:style>
+          <a:lnRef idx="1">
+            <a:schemeClr val="accent1"/>
+          </a:lnRef>
+          <a:fillRef idx="3">
+            <a:schemeClr val="accent1"/>
+          </a:fillRef>
+          <a:effectRef idx="2">
+            <a:schemeClr val="accent1"/>
+          </a:effectRef>
+          <a:fontRef idx="minor">
+            <a:schemeClr val="lt1"/>
+          </a:fontRef>
+        </p:style>
+        <p:txBody>
+          <a:bodyPr rtlCol="0" anchor="ctr"/>
+          <a:lstStyle/>
+          <a:p>
+            <a:pPr algn="ctr"/>
+          </a:p>
+        </p:txBody>
+      </p:sp>
+      <p:sp>
+        <p:nvSpPr>
+          <p:cNvPr id="13" name="Rectangle 12"/>
+          <p:cNvSpPr/>
+          <p:nvPr/>
+        </p:nvSpPr>
+        <p:spPr>
+          <a:xfrm>
+            <a:off x="822960" y="4023360"/>
+            <a:ext cx="45720" cy="804672"/>
+          </a:xfrm>
+          <a:prstGeom prst="rect">
+            <a:avLst/>
+          </a:prstGeom>
+          <a:solidFill>
+            <a:srgbClr val="6B2545"/>
+          </a:solidFill>
+          <a:ln>
+            <a:noFill/>
+          </a:ln>
+          <a:effectLst/>
+        </p:spPr>
+        <p:style>
+          <a:lnRef idx="1">
+            <a:schemeClr val="accent1"/>
+          </a:lnRef>
+          <a:fillRef idx="3">
+            <a:schemeClr val="accent1"/>
+          </a:fillRef>
+          <a:effectRef idx="2">
+            <a:schemeClr val="accent1"/>
+          </a:effectRef>
+          <a:fontRef idx="minor">
+            <a:schemeClr val="lt1"/>
+          </a:fontRef>
+        </p:style>
+        <p:txBody>
+          <a:bodyPr rtlCol="0" anchor="ctr"/>
+          <a:lstStyle/>
+          <a:p>
+            <a:pPr algn="ctr"/>
+          </a:p>
+        </p:txBody>
+      </p:sp>
+      <p:sp>
+        <p:nvSpPr>
+          <p:cNvPr id="14" name="TextBox 13"/>
+          <p:cNvSpPr txBox="1"/>
+          <p:nvPr/>
+        </p:nvSpPr>
+        <p:spPr>
+          <a:xfrm>
+            <a:off x="1143000" y="4206240"/>
+            <a:ext cx="2286000" cy="274320"/>
+          </a:xfrm>
+          <a:prstGeom prst="rect">
+            <a:avLst/>
+          </a:prstGeom>
+          <a:noFill/>
+        </p:spPr>
+        <p:txBody>
+          <a:bodyPr wrap="square" anchor="t" lIns="0" rIns="0" tIns="0" bIns="0">
+            <a:spAutoFit/>
+          </a:bodyPr>
+          <a:lstStyle/>
+          <a:p>
+            <a:pPr algn="l">
+              <a:lnSpc>
+                <a:spcPct val="130000"/>
+              </a:lnSpc>
+              <a:spcAft>
+                <a:spcPts val="0"/>
+              </a:spcAft>
+            </a:pPr>
+            <a:r>
+              <a:rPr sz="1000" b="0" i="0" spc="140">
+                <a:solidFill>
+                  <a:srgbClr val="5C625A"/>
+                </a:solidFill>
+                <a:latin typeface="Consolas"/>
+              </a:rPr>
+              <a:t>WHAT IS MISSING</a:t>
+            </a:r>
+          </a:p>
+        </p:txBody>
+      </p:sp>
+      <p:sp>
+        <p:nvSpPr>
+          <p:cNvPr id="15" name="TextBox 14"/>
+          <p:cNvSpPr txBox="1"/>
+          <p:nvPr/>
+        </p:nvSpPr>
+        <p:spPr>
+          <a:xfrm>
+            <a:off x="3520440" y="4178808"/>
+            <a:ext cx="7498079" cy="411480"/>
+          </a:xfrm>
+          <a:prstGeom prst="rect">
+            <a:avLst/>
+          </a:prstGeom>
+          <a:noFill/>
+        </p:spPr>
+        <p:txBody>
+          <a:bodyPr wrap="square" anchor="t" lIns="0" rIns="0" tIns="0" bIns="0">
+            <a:spAutoFit/>
+          </a:bodyPr>
+          <a:lstStyle/>
+          <a:p>
+            <a:pPr algn="l">
+              <a:lnSpc>
+                <a:spcPct val="125000"/>
+              </a:lnSpc>
+              <a:spcAft>
+                <a:spcPts val="0"/>
+              </a:spcAft>
+            </a:pPr>
+            <a:r>
+              <a:rPr sz="1400" b="0" i="0">
+                <a:solidFill>
+                  <a:srgbClr val="191E19"/>
+                </a:solidFill>
+                <a:latin typeface="Segoe UI"/>
+              </a:rPr>
+              <a:t>Fuel cost, rainfall, import pressure, holidays and local shocks are not in the model.</a:t>
+            </a:r>
+          </a:p>
+        </p:txBody>
+      </p:sp>
+      <p:sp>
+        <p:nvSpPr>
+          <p:cNvPr id="16" name="Rectangle 15"/>
+          <p:cNvSpPr/>
+          <p:nvPr/>
+        </p:nvSpPr>
+        <p:spPr>
+          <a:xfrm>
+            <a:off x="822960" y="4983480"/>
+            <a:ext cx="10545775" cy="804672"/>
+          </a:xfrm>
+          <a:prstGeom prst="rect">
+            <a:avLst/>
+          </a:prstGeom>
+          <a:solidFill>
+            <a:srgbClr val="FCFBF7"/>
+          </a:solidFill>
+          <a:ln w="12700">
+            <a:solidFill>
+              <a:srgbClr val="DCD9C9"/>
+            </a:solidFill>
+          </a:ln>
+          <a:effectLst/>
+        </p:spPr>
+        <p:style>
+          <a:lnRef idx="1">
+            <a:schemeClr val="accent1"/>
+          </a:lnRef>
+          <a:fillRef idx="3">
+            <a:schemeClr val="accent1"/>
+          </a:fillRef>
+          <a:effectRef idx="2">
+            <a:schemeClr val="accent1"/>
+          </a:effectRef>
+          <a:fontRef idx="minor">
+            <a:schemeClr val="lt1"/>
+          </a:fontRef>
+        </p:style>
+        <p:txBody>
+          <a:bodyPr rtlCol="0" anchor="ctr"/>
+          <a:lstStyle/>
+          <a:p>
+            <a:pPr algn="ctr"/>
+          </a:p>
+        </p:txBody>
+      </p:sp>
+      <p:sp>
+        <p:nvSpPr>
+          <p:cNvPr id="17" name="Rectangle 16"/>
+          <p:cNvSpPr/>
+          <p:nvPr/>
+        </p:nvSpPr>
+        <p:spPr>
+          <a:xfrm>
+            <a:off x="822960" y="4983480"/>
+            <a:ext cx="45720" cy="804672"/>
+          </a:xfrm>
+          <a:prstGeom prst="rect">
+            <a:avLst/>
+          </a:prstGeom>
+          <a:solidFill>
+            <a:srgbClr val="A06D05"/>
+          </a:solidFill>
+          <a:ln>
+            <a:noFill/>
+          </a:ln>
+          <a:effectLst/>
+        </p:spPr>
+        <p:style>
+          <a:lnRef idx="1">
+            <a:schemeClr val="accent1"/>
+          </a:lnRef>
+          <a:fillRef idx="3">
+            <a:schemeClr val="accent1"/>
+          </a:fillRef>
+          <a:effectRef idx="2">
+            <a:schemeClr val="accent1"/>
+          </a:effectRef>
+          <a:fontRef idx="minor">
+            <a:schemeClr val="lt1"/>
+          </a:fontRef>
+        </p:style>
+        <p:txBody>
+          <a:bodyPr rtlCol="0" anchor="ctr"/>
+          <a:lstStyle/>
+          <a:p>
+            <a:pPr algn="ctr"/>
+          </a:p>
+        </p:txBody>
+      </p:sp>
+      <p:sp>
+        <p:nvSpPr>
+          <p:cNvPr id="18" name="TextBox 17"/>
+          <p:cNvSpPr txBox="1"/>
+          <p:nvPr/>
+        </p:nvSpPr>
+        <p:spPr>
+          <a:xfrm>
+            <a:off x="1143000" y="5166360"/>
+            <a:ext cx="2286000" cy="274320"/>
+          </a:xfrm>
+          <a:prstGeom prst="rect">
+            <a:avLst/>
+          </a:prstGeom>
+          <a:noFill/>
+        </p:spPr>
+        <p:txBody>
+          <a:bodyPr wrap="square" anchor="t" lIns="0" rIns="0" tIns="0" bIns="0">
+            <a:spAutoFit/>
+          </a:bodyPr>
+          <a:lstStyle/>
+          <a:p>
+            <a:pPr algn="l">
+              <a:lnSpc>
+                <a:spcPct val="130000"/>
+              </a:lnSpc>
+              <a:spcAft>
+                <a:spcPts val="0"/>
+              </a:spcAft>
+            </a:pPr>
+            <a:r>
+              <a:rPr sz="1000" b="0" i="0" spc="140">
+                <a:solidFill>
+                  <a:srgbClr val="5C625A"/>
+                </a:solidFill>
+                <a:latin typeface="Consolas"/>
+              </a:rPr>
+              <a:t>WHAT I WOULD ADD</a:t>
+            </a:r>
+          </a:p>
+        </p:txBody>
+      </p:sp>
+      <p:sp>
+        <p:nvSpPr>
+          <p:cNvPr id="19" name="TextBox 18"/>
+          <p:cNvSpPr txBox="1"/>
+          <p:nvPr/>
+        </p:nvSpPr>
+        <p:spPr>
+          <a:xfrm>
+            <a:off x="3520440" y="5138928"/>
+            <a:ext cx="7498079" cy="411480"/>
+          </a:xfrm>
+          <a:prstGeom prst="rect">
+            <a:avLst/>
+          </a:prstGeom>
+          <a:noFill/>
+        </p:spPr>
+        <p:txBody>
+          <a:bodyPr wrap="square" anchor="t" lIns="0" rIns="0" tIns="0" bIns="0">
+            <a:spAutoFit/>
+          </a:bodyPr>
+          <a:lstStyle/>
+          <a:p>
+            <a:pPr algn="l">
+              <a:lnSpc>
+                <a:spcPct val="125000"/>
+              </a:lnSpc>
+              <a:spcAft>
+                <a:spcPts val="0"/>
+              </a:spcAft>
+            </a:pPr>
+            <a:r>
+              <a:rPr sz="1400" b="0" i="0">
+                <a:solidFill>
+                  <a:srgbClr val="191E19"/>
+                </a:solidFill>
+                <a:latin typeface="Segoe UI"/>
+              </a:rPr>
+              <a:t>Prediction intervals, external economic/weather features and scheduled monthly retraining.</a:t>
+            </a:r>
+          </a:p>
+        </p:txBody>
+      </p:sp>
+      <p:sp>
+        <p:nvSpPr>
           <p:cNvPr id="20" name="TextBox 19"/>
-          <p:cNvSpPr txBox="1"/>
-          <p:nvPr/>
-        </p:nvSpPr>
-        <p:spPr>
-          <a:xfrm>
-            <a:off x="6702552" y="2487168"/>
-            <a:ext cx="4297680" cy="274320"/>
-          </a:xfrm>
-          <a:prstGeom prst="rect">
-            <a:avLst/>
-          </a:prstGeom>
-          <a:noFill/>
-        </p:spPr>
-        <p:txBody>
-          <a:bodyPr wrap="square" anchor="t" lIns="0" rIns="0" tIns="0" bIns="0">
-            <a:spAutoFit/>
-          </a:bodyPr>
-          <a:lstStyle/>
-          <a:p>
-            <a:pPr algn="l">
-              <a:lnSpc>
-                <a:spcPct val="130000"/>
-              </a:lnSpc>
-              <a:spcAft>
-                <a:spcPts val="0"/>
-              </a:spcAft>
-            </a:pPr>
-            <a:r>
-              <a:rPr sz="1000" b="0" i="0" spc="160">
-                <a:solidFill>
-                  <a:srgbClr val="2F5D46"/>
-                </a:solidFill>
-                <a:latin typeface="Consolas"/>
-              </a:rPr>
-              <a:t>SO IS IT ACTUALLY FORECASTING?</a:t>
-            </a:r>
-          </a:p>
-        </p:txBody>
-      </p:sp>
-      <p:sp>
-        <p:nvSpPr>
-          <p:cNvPr id="21" name="TextBox 20"/>
-          <p:cNvSpPr txBox="1"/>
-          <p:nvPr/>
-        </p:nvSpPr>
-        <p:spPr>
-          <a:xfrm>
-            <a:off x="6702552" y="2926080"/>
-            <a:ext cx="4297680" cy="2651760"/>
-          </a:xfrm>
-          <a:prstGeom prst="rect">
-            <a:avLst/>
-          </a:prstGeom>
-          <a:noFill/>
-        </p:spPr>
-        <p:txBody>
-          <a:bodyPr wrap="square" anchor="t" lIns="0" rIns="0" tIns="0" bIns="0">
-            <a:spAutoFit/>
-          </a:bodyPr>
-          <a:lstStyle/>
-          <a:p>
-            <a:pPr algn="l">
-              <a:lnSpc>
-                <a:spcPct val="140000"/>
-              </a:lnSpc>
-              <a:spcAft>
-                <a:spcPts val="1200"/>
-              </a:spcAft>
-            </a:pPr>
-            <a:r>
-              <a:rPr sz="1900" b="1" i="0">
-                <a:solidFill>
-                  <a:srgbClr val="191E19"/>
-                </a:solidFill>
-                <a:latin typeface="Georgia"/>
-              </a:rPr>
-              <a:t>Yes — and that is what the test period measures.</a:t>
-            </a:r>
-          </a:p>
-          <a:p>
-            <a:pPr algn="l">
-              <a:lnSpc>
-                <a:spcPct val="140000"/>
-              </a:lnSpc>
-              <a:spcAft>
-                <a:spcPts val="1200"/>
-              </a:spcAft>
-            </a:pPr>
-            <a:r>
-              <a:rPr sz="1350" b="0" i="0">
-                <a:solidFill>
-                  <a:srgbClr val="5C625A"/>
-                </a:solidFill>
-                <a:latin typeface="Segoe UI"/>
-              </a:rPr>
-              <a:t>Training stopped at 2025-04-15; all 9,776 test rows fall after it. The model was scored on dates it had never seen — a real out-of-sample forecast.</a:t>
-            </a:r>
-          </a:p>
-          <a:p>
-            <a:pPr algn="l">
-              <a:lnSpc>
-                <a:spcPct val="140000"/>
-              </a:lnSpc>
-              <a:spcAft>
-                <a:spcPts val="0"/>
-              </a:spcAft>
-            </a:pPr>
-            <a:r>
-              <a:rPr sz="1350" b="0" i="0">
-                <a:solidFill>
-                  <a:srgbClr val="5C625A"/>
-                </a:solidFill>
-                <a:latin typeface="Segoe UI"/>
-              </a:rPr>
-              <a:t>What it cannot do is forecast today from a series that went quiet in 2022 — and the app prints the real date rather than hiding it.</a:t>
-            </a:r>
-          </a:p>
-        </p:txBody>
-      </p:sp>
-      <p:sp>
-        <p:nvSpPr>
-          <p:cNvPr id="22" name="TextBox 21"/>
           <p:cNvSpPr txBox="1"/>
           <p:nvPr/>
         </p:nvSpPr>
@@ -8052,7 +8151,7 @@
                 </a:solidFill>
                 <a:latin typeface="Consolas"/>
               </a:rPr>
-              <a:t>Rice at Phnom Penh, wholesale: last recorded June 2022, so the app labels its forecast July 2022 — not next month.</a:t>
+              <a:t>This is a credible forecasting prototype, not a replacement for field data or official price monitoring.</a:t>
             </a:r>
           </a:p>
         </p:txBody>
@@ -8127,7 +8226,7 @@
         </p:nvSpPr>
         <p:spPr>
           <a:xfrm>
-            <a:off x="822960" y="566928"/>
+            <a:off x="822960" y="1234440"/>
             <a:ext cx="10545775" cy="274320"/>
           </a:xfrm>
           <a:prstGeom prst="rect">
@@ -8150,13 +8249,13 @@
               </a:spcAft>
             </a:pPr>
             <a:r>
-              <a:rPr sz="1050" b="0" i="0" spc="200">
-                <a:solidFill>
-                  <a:srgbClr val="5C625A"/>
+              <a:rPr sz="1100" b="0" i="0" spc="240">
+                <a:solidFill>
+                  <a:srgbClr val="2F5D46"/>
                 </a:solidFill>
                 <a:latin typeface="Consolas"/>
               </a:rPr>
-              <a:t>SECOND SURFACE</a:t>
+              <a:t>FINAL TAKEAWAY</a:t>
             </a:r>
           </a:p>
         </p:txBody>
@@ -8169,8 +8268,8 @@
         </p:nvSpPr>
         <p:spPr>
           <a:xfrm>
-            <a:off x="822960" y="932688"/>
-            <a:ext cx="10545775" cy="640080"/>
+            <a:off x="822960" y="1737360"/>
+            <a:ext cx="10545775" cy="822960"/>
           </a:xfrm>
           <a:prstGeom prst="rect">
             <a:avLst/>
@@ -8192,13 +8291,13 @@
               </a:spcAft>
             </a:pPr>
             <a:r>
-              <a:rPr sz="3600" b="1" i="0">
+              <a:rPr sz="5000" b="1" i="0">
                 <a:solidFill>
                   <a:srgbClr val="191E19"/>
                 </a:solidFill>
                 <a:latin typeface="Georgia"/>
               </a:rPr>
-              <a:t>The same engine,</a:t>
+              <a:t>Public data becomes useful</a:t>
             </a:r>
           </a:p>
         </p:txBody>
@@ -8211,8 +8310,8 @@
         </p:nvSpPr>
         <p:spPr>
           <a:xfrm>
-            <a:off x="822960" y="1499616"/>
-            <a:ext cx="10545775" cy="640080"/>
+            <a:off x="822960" y="2487168"/>
+            <a:ext cx="10545775" cy="822960"/>
           </a:xfrm>
           <a:prstGeom prst="rect">
             <a:avLst/>
@@ -8234,502 +8333,34 @@
               </a:spcAft>
             </a:pPr>
             <a:r>
-              <a:rPr sz="3600" b="0" i="1">
+              <a:rPr sz="5000" b="0" i="1">
                 <a:solidFill>
                   <a:srgbClr val="2F5D46"/>
                 </a:solidFill>
                 <a:latin typeface="Georgia"/>
               </a:rPr>
-              <a:t>in a chat window</a:t>
-            </a:r>
-          </a:p>
-        </p:txBody>
-      </p:sp>
-      <p:sp>
-        <p:nvSpPr>
-          <p:cNvPr id="6" name="TextBox 5"/>
-          <p:cNvSpPr txBox="1"/>
-          <p:nvPr/>
-        </p:nvSpPr>
-        <p:spPr>
-          <a:xfrm>
-            <a:off x="10820095" y="6345936"/>
-            <a:ext cx="548640" cy="274320"/>
-          </a:xfrm>
-          <a:prstGeom prst="rect">
-            <a:avLst/>
-          </a:prstGeom>
-          <a:noFill/>
-        </p:spPr>
-        <p:txBody>
-          <a:bodyPr wrap="square" anchor="t" lIns="0" rIns="0" tIns="0" bIns="0">
-            <a:spAutoFit/>
-          </a:bodyPr>
-          <a:lstStyle/>
-          <a:p>
-            <a:pPr algn="r">
-              <a:lnSpc>
-                <a:spcPct val="130000"/>
-              </a:lnSpc>
-              <a:spcAft>
-                <a:spcPts val="0"/>
-              </a:spcAft>
-            </a:pPr>
-            <a:r>
-              <a:rPr sz="950" b="0" i="0" spc="100">
-                <a:solidFill>
-                  <a:srgbClr val="5C625A"/>
-                </a:solidFill>
-                <a:latin typeface="Consolas"/>
-              </a:rPr>
-              <a:t>14</a:t>
-            </a:r>
-          </a:p>
-        </p:txBody>
-      </p:sp>
-      <p:sp>
-        <p:nvSpPr>
-          <p:cNvPr id="7" name="TextBox 6"/>
-          <p:cNvSpPr txBox="1"/>
-          <p:nvPr/>
-        </p:nvSpPr>
-        <p:spPr>
-          <a:xfrm>
-            <a:off x="822960" y="2194560"/>
-            <a:ext cx="5394960" cy="914400"/>
-          </a:xfrm>
-          <a:prstGeom prst="rect">
-            <a:avLst/>
-          </a:prstGeom>
-          <a:noFill/>
-        </p:spPr>
-        <p:txBody>
-          <a:bodyPr wrap="square" anchor="t" lIns="0" rIns="0" tIns="0" bIns="0">
-            <a:spAutoFit/>
-          </a:bodyPr>
-          <a:lstStyle/>
-          <a:p>
-            <a:pPr algn="l">
-              <a:lnSpc>
-                <a:spcPct val="150000"/>
-              </a:lnSpc>
-              <a:spcAft>
-                <a:spcPts val="0"/>
-              </a:spcAft>
-            </a:pPr>
-            <a:r>
-              <a:rPr sz="1550" b="0" i="0">
-                <a:solidFill>
-                  <a:srgbClr val="191E19"/>
-                </a:solidFill>
-                <a:latin typeface="Segoe UI"/>
-              </a:rPr>
-              <a:t>One prediction engine, two front doors. The bot shares the exact code the web app calls — a Telegram update in, a formatted forecast out.</a:t>
-            </a:r>
-          </a:p>
-        </p:txBody>
-      </p:sp>
-      <p:sp>
-        <p:nvSpPr>
-          <p:cNvPr id="8" name="TextBox 7"/>
-          <p:cNvSpPr txBox="1"/>
-          <p:nvPr/>
-        </p:nvSpPr>
-        <p:spPr>
-          <a:xfrm>
-            <a:off x="822960" y="3520440"/>
-            <a:ext cx="5303520" cy="256032"/>
-          </a:xfrm>
-          <a:prstGeom prst="rect">
-            <a:avLst/>
-          </a:prstGeom>
-          <a:noFill/>
-        </p:spPr>
-        <p:txBody>
-          <a:bodyPr wrap="square" anchor="t" lIns="0" rIns="0" tIns="0" bIns="0">
-            <a:spAutoFit/>
-          </a:bodyPr>
-          <a:lstStyle/>
-          <a:p>
-            <a:pPr algn="l">
-              <a:lnSpc>
-                <a:spcPct val="130000"/>
-              </a:lnSpc>
-              <a:spcAft>
-                <a:spcPts val="0"/>
-              </a:spcAft>
-            </a:pPr>
-            <a:r>
-              <a:rPr sz="1400" b="1" i="0">
-                <a:solidFill>
-                  <a:srgbClr val="191E19"/>
-                </a:solidFill>
-                <a:latin typeface="Segoe UI"/>
-              </a:rPr>
-              <a:t>Reply in the response body</a:t>
-            </a:r>
-          </a:p>
-        </p:txBody>
-      </p:sp>
-      <p:sp>
-        <p:nvSpPr>
-          <p:cNvPr id="9" name="TextBox 8"/>
-          <p:cNvSpPr txBox="1"/>
-          <p:nvPr/>
-        </p:nvSpPr>
-        <p:spPr>
-          <a:xfrm>
-            <a:off x="822960" y="3767328"/>
-            <a:ext cx="5212080" cy="548640"/>
-          </a:xfrm>
-          <a:prstGeom prst="rect">
-            <a:avLst/>
-          </a:prstGeom>
-          <a:noFill/>
-        </p:spPr>
-        <p:txBody>
-          <a:bodyPr wrap="square" anchor="t" lIns="0" rIns="0" tIns="0" bIns="0">
-            <a:spAutoFit/>
-          </a:bodyPr>
-          <a:lstStyle/>
-          <a:p>
-            <a:pPr algn="l">
-              <a:lnSpc>
-                <a:spcPct val="135000"/>
-              </a:lnSpc>
-              <a:spcAft>
-                <a:spcPts val="0"/>
-              </a:spcAft>
-            </a:pPr>
-            <a:r>
-              <a:rPr sz="1250" b="0" i="0">
-                <a:solidFill>
-                  <a:srgbClr val="5C625A"/>
-                </a:solidFill>
-                <a:latin typeface="Segoe UI"/>
-              </a:rPr>
-              <a:t>the webhook returns the sendMessage call itself — no outbound request, and the bot token never reaches Vercel</a:t>
-            </a:r>
-          </a:p>
-        </p:txBody>
-      </p:sp>
-      <p:sp>
-        <p:nvSpPr>
-          <p:cNvPr id="10" name="TextBox 9"/>
-          <p:cNvSpPr txBox="1"/>
-          <p:nvPr/>
-        </p:nvSpPr>
-        <p:spPr>
-          <a:xfrm>
-            <a:off x="822960" y="4361688"/>
-            <a:ext cx="5303520" cy="256032"/>
-          </a:xfrm>
-          <a:prstGeom prst="rect">
-            <a:avLst/>
-          </a:prstGeom>
-          <a:noFill/>
-        </p:spPr>
-        <p:txBody>
-          <a:bodyPr wrap="square" anchor="t" lIns="0" rIns="0" tIns="0" bIns="0">
-            <a:spAutoFit/>
-          </a:bodyPr>
-          <a:lstStyle/>
-          <a:p>
-            <a:pPr algn="l">
-              <a:lnSpc>
-                <a:spcPct val="130000"/>
-              </a:lnSpc>
-              <a:spcAft>
-                <a:spcPts val="0"/>
-              </a:spcAft>
-            </a:pPr>
-            <a:r>
-              <a:rPr sz="1400" b="1" i="0">
-                <a:solidFill>
-                  <a:srgbClr val="191E19"/>
-                </a:solidFill>
-                <a:latin typeface="Segoe UI"/>
-              </a:rPr>
-              <a:t>Always HTTP 200</a:t>
-            </a:r>
-          </a:p>
-        </p:txBody>
-      </p:sp>
-      <p:sp>
-        <p:nvSpPr>
-          <p:cNvPr id="11" name="TextBox 10"/>
-          <p:cNvSpPr txBox="1"/>
-          <p:nvPr/>
-        </p:nvSpPr>
-        <p:spPr>
-          <a:xfrm>
-            <a:off x="822960" y="4608576"/>
-            <a:ext cx="5212080" cy="548640"/>
-          </a:xfrm>
-          <a:prstGeom prst="rect">
-            <a:avLst/>
-          </a:prstGeom>
-          <a:noFill/>
-        </p:spPr>
-        <p:txBody>
-          <a:bodyPr wrap="square" anchor="t" lIns="0" rIns="0" tIns="0" bIns="0">
-            <a:spAutoFit/>
-          </a:bodyPr>
-          <a:lstStyle/>
-          <a:p>
-            <a:pPr algn="l">
-              <a:lnSpc>
-                <a:spcPct val="135000"/>
-              </a:lnSpc>
-              <a:spcAft>
-                <a:spcPts val="0"/>
-              </a:spcAft>
-            </a:pPr>
-            <a:r>
-              <a:rPr sz="1250" b="0" i="0">
-                <a:solidFill>
-                  <a:srgbClr val="5C625A"/>
-                </a:solidFill>
-                <a:latin typeface="Segoe UI"/>
-              </a:rPr>
-              <a:t>a non-2xx makes Telegram retry the same update forever</a:t>
-            </a:r>
-          </a:p>
-        </p:txBody>
-      </p:sp>
-      <p:sp>
-        <p:nvSpPr>
-          <p:cNvPr id="12" name="TextBox 11"/>
-          <p:cNvSpPr txBox="1"/>
-          <p:nvPr/>
-        </p:nvSpPr>
-        <p:spPr>
-          <a:xfrm>
-            <a:off x="822960" y="5202936"/>
-            <a:ext cx="5303520" cy="256032"/>
-          </a:xfrm>
-          <a:prstGeom prst="rect">
-            <a:avLst/>
-          </a:prstGeom>
-          <a:noFill/>
-        </p:spPr>
-        <p:txBody>
-          <a:bodyPr wrap="square" anchor="t" lIns="0" rIns="0" tIns="0" bIns="0">
-            <a:spAutoFit/>
-          </a:bodyPr>
-          <a:lstStyle/>
-          <a:p>
-            <a:pPr algn="l">
-              <a:lnSpc>
-                <a:spcPct val="130000"/>
-              </a:lnSpc>
-              <a:spcAft>
-                <a:spcPts val="0"/>
-              </a:spcAft>
-            </a:pPr>
-            <a:r>
-              <a:rPr sz="1400" b="1" i="0">
-                <a:solidFill>
-                  <a:srgbClr val="191E19"/>
-                </a:solidFill>
-                <a:latin typeface="Segoe UI"/>
-              </a:rPr>
-              <a:t>Sparkline in Unicode blocks</a:t>
-            </a:r>
-          </a:p>
-        </p:txBody>
-      </p:sp>
-      <p:sp>
-        <p:nvSpPr>
-          <p:cNvPr id="13" name="TextBox 12"/>
-          <p:cNvSpPr txBox="1"/>
-          <p:nvPr/>
-        </p:nvSpPr>
-        <p:spPr>
-          <a:xfrm>
-            <a:off x="822960" y="5449824"/>
-            <a:ext cx="5212080" cy="548640"/>
-          </a:xfrm>
-          <a:prstGeom prst="rect">
-            <a:avLst/>
-          </a:prstGeom>
-          <a:noFill/>
-        </p:spPr>
-        <p:txBody>
-          <a:bodyPr wrap="square" anchor="t" lIns="0" rIns="0" tIns="0" bIns="0">
-            <a:spAutoFit/>
-          </a:bodyPr>
-          <a:lstStyle/>
-          <a:p>
-            <a:pPr algn="l">
-              <a:lnSpc>
-                <a:spcPct val="135000"/>
-              </a:lnSpc>
-              <a:spcAft>
-                <a:spcPts val="0"/>
-              </a:spcAft>
-            </a:pPr>
-            <a:r>
-              <a:rPr sz="1250" b="0" i="0">
-                <a:solidFill>
-                  <a:srgbClr val="5C625A"/>
-                </a:solidFill>
-                <a:latin typeface="Segoe UI"/>
-              </a:rPr>
-              <a:t>the only chart a chat window can render inline</a:t>
-            </a:r>
-          </a:p>
-        </p:txBody>
-      </p:sp>
-      <p:sp>
-        <p:nvSpPr>
-          <p:cNvPr id="14" name="Rectangle 13"/>
-          <p:cNvSpPr/>
-          <p:nvPr/>
-        </p:nvSpPr>
-        <p:spPr>
-          <a:xfrm>
-            <a:off x="6766560" y="2148840"/>
-            <a:ext cx="4572000" cy="3657600"/>
-          </a:xfrm>
-          <a:prstGeom prst="rect">
-            <a:avLst/>
-          </a:prstGeom>
-          <a:solidFill>
-            <a:srgbClr val="FCFBF7"/>
-          </a:solidFill>
-          <a:ln w="12700">
-            <a:solidFill>
-              <a:srgbClr val="DCD9C9"/>
-            </a:solidFill>
-          </a:ln>
-          <a:effectLst/>
-        </p:spPr>
-        <p:style>
-          <a:lnRef idx="1">
-            <a:schemeClr val="accent1"/>
-          </a:lnRef>
-          <a:fillRef idx="3">
-            <a:schemeClr val="accent1"/>
-          </a:fillRef>
-          <a:effectRef idx="2">
-            <a:schemeClr val="accent1"/>
-          </a:effectRef>
-          <a:fontRef idx="minor">
-            <a:schemeClr val="lt1"/>
-          </a:fontRef>
-        </p:style>
-        <p:txBody>
-          <a:bodyPr rtlCol="0" anchor="ctr"/>
-          <a:lstStyle/>
-          <a:p>
-            <a:pPr algn="ctr"/>
-          </a:p>
-        </p:txBody>
-      </p:sp>
-      <p:sp>
-        <p:nvSpPr>
-          <p:cNvPr id="15" name="Rectangle 14"/>
-          <p:cNvSpPr/>
-          <p:nvPr/>
-        </p:nvSpPr>
-        <p:spPr>
-          <a:xfrm>
-            <a:off x="6766560" y="2148840"/>
-            <a:ext cx="45720" cy="3657600"/>
-          </a:xfrm>
-          <a:prstGeom prst="rect">
-            <a:avLst/>
-          </a:prstGeom>
-          <a:solidFill>
-            <a:srgbClr val="2F5D46"/>
-          </a:solidFill>
-          <a:ln>
-            <a:noFill/>
-          </a:ln>
-          <a:effectLst/>
-        </p:spPr>
-        <p:style>
-          <a:lnRef idx="1">
-            <a:schemeClr val="accent1"/>
-          </a:lnRef>
-          <a:fillRef idx="3">
-            <a:schemeClr val="accent1"/>
-          </a:fillRef>
-          <a:effectRef idx="2">
-            <a:schemeClr val="accent1"/>
-          </a:effectRef>
-          <a:fontRef idx="minor">
-            <a:schemeClr val="lt1"/>
-          </a:fontRef>
-        </p:style>
-        <p:txBody>
-          <a:bodyPr rtlCol="0" anchor="ctr"/>
-          <a:lstStyle/>
-          <a:p>
-            <a:pPr algn="ctr"/>
-          </a:p>
-        </p:txBody>
-      </p:sp>
-      <p:sp>
-        <p:nvSpPr>
-          <p:cNvPr id="16" name="TextBox 15"/>
-          <p:cNvSpPr txBox="1"/>
-          <p:nvPr/>
-        </p:nvSpPr>
-        <p:spPr>
-          <a:xfrm>
-            <a:off x="7086600" y="2468880"/>
-            <a:ext cx="4023360" cy="274320"/>
-          </a:xfrm>
-          <a:prstGeom prst="rect">
-            <a:avLst/>
-          </a:prstGeom>
-          <a:noFill/>
-        </p:spPr>
-        <p:txBody>
-          <a:bodyPr wrap="square" anchor="t" lIns="0" rIns="0" tIns="0" bIns="0">
-            <a:spAutoFit/>
-          </a:bodyPr>
-          <a:lstStyle/>
-          <a:p>
-            <a:pPr algn="l">
-              <a:lnSpc>
-                <a:spcPct val="130000"/>
-              </a:lnSpc>
-              <a:spcAft>
-                <a:spcPts val="0"/>
-              </a:spcAft>
-            </a:pPr>
-            <a:r>
-              <a:rPr sz="1300" b="1" i="0">
-                <a:solidFill>
-                  <a:srgbClr val="2F5D46"/>
-                </a:solidFill>
-                <a:latin typeface="Consolas"/>
-              </a:rPr>
-              <a:t>/predict rice phnom penh</a:t>
+              <a:t>when it answers tomorrow</a:t>
             </a:r>
           </a:p>
         </p:txBody>
       </p:sp>
       <p:cxnSp>
         <p:nvCxnSpPr>
-          <p:cNvPr id="17" name="Connector 16"/>
+          <p:cNvPr id="6" name="Connector 5"/>
           <p:cNvCxnSpPr/>
           <p:nvPr/>
         </p:nvCxnSpPr>
         <p:spPr>
           <a:xfrm>
-            <a:off x="7086600" y="2816352"/>
-            <a:ext cx="3931920" cy="0"/>
+            <a:off x="822960" y="3520440"/>
+            <a:ext cx="2926080" cy="0"/>
           </a:xfrm>
           <a:prstGeom prst="line">
             <a:avLst/>
           </a:prstGeom>
-          <a:ln w="12700">
+          <a:ln w="19050">
             <a:solidFill>
-              <a:srgbClr val="DCD9C9"/>
+              <a:srgbClr val="4D8065"/>
             </a:solidFill>
           </a:ln>
         </p:spPr>
@@ -8750,489 +8381,301 @@
       </p:cxnSp>
       <p:sp>
         <p:nvSpPr>
-          <p:cNvPr id="18" name="TextBox 17"/>
-          <p:cNvSpPr txBox="1"/>
-          <p:nvPr/>
-        </p:nvSpPr>
-        <p:spPr>
-          <a:xfrm>
-            <a:off x="7086600" y="2971800"/>
-            <a:ext cx="4023360" cy="274320"/>
-          </a:xfrm>
-          <a:prstGeom prst="rect">
-            <a:avLst/>
-          </a:prstGeom>
-          <a:noFill/>
-        </p:spPr>
-        <p:txBody>
-          <a:bodyPr wrap="square" anchor="t" lIns="0" rIns="0" tIns="0" bIns="0">
-            <a:spAutoFit/>
-          </a:bodyPr>
-          <a:lstStyle/>
-          <a:p>
-            <a:pPr algn="l">
-              <a:lnSpc>
-                <a:spcPct val="130000"/>
-              </a:lnSpc>
-              <a:spcAft>
-                <a:spcPts val="0"/>
-              </a:spcAft>
-            </a:pPr>
-            <a:r>
-              <a:rPr sz="1400" b="1" i="0">
+          <p:cNvPr id="7" name="TextBox 6"/>
+          <p:cNvSpPr txBox="1"/>
+          <p:nvPr/>
+        </p:nvSpPr>
+        <p:spPr>
+          <a:xfrm>
+            <a:off x="822960" y="3886200"/>
+            <a:ext cx="7863840" cy="1143000"/>
+          </a:xfrm>
+          <a:prstGeom prst="rect">
+            <a:avLst/>
+          </a:prstGeom>
+          <a:noFill/>
+        </p:spPr>
+        <p:txBody>
+          <a:bodyPr wrap="square" anchor="t" lIns="0" rIns="0" tIns="0" bIns="0">
+            <a:spAutoFit/>
+          </a:bodyPr>
+          <a:lstStyle/>
+          <a:p>
+            <a:pPr algn="l">
+              <a:lnSpc>
+                <a:spcPct val="145000"/>
+              </a:lnSpc>
+              <a:spcAft>
+                <a:spcPts val="0"/>
+              </a:spcAft>
+            </a:pPr>
+            <a:r>
+              <a:rPr sz="1800" b="0" i="0">
                 <a:solidFill>
                   <a:srgbClr val="191E19"/>
                 </a:solidFill>
+                <a:latin typeface="Segoe UI"/>
+              </a:rPr>
+              <a:t>Cambodia already has valuable food-price records. This project shows how AI can turn those records into a small, explainable forecasting tool that ordinary users can reach from a browser or chat message.</a:t>
+            </a:r>
+          </a:p>
+        </p:txBody>
+      </p:sp>
+      <p:sp>
+        <p:nvSpPr>
+          <p:cNvPr id="8" name="TextBox 7"/>
+          <p:cNvSpPr txBox="1"/>
+          <p:nvPr/>
+        </p:nvSpPr>
+        <p:spPr>
+          <a:xfrm>
+            <a:off x="822960" y="5257800"/>
+            <a:ext cx="1143000" cy="274320"/>
+          </a:xfrm>
+          <a:prstGeom prst="rect">
+            <a:avLst/>
+          </a:prstGeom>
+          <a:noFill/>
+        </p:spPr>
+        <p:txBody>
+          <a:bodyPr wrap="square" anchor="t" lIns="0" rIns="0" tIns="0" bIns="0">
+            <a:spAutoFit/>
+          </a:bodyPr>
+          <a:lstStyle/>
+          <a:p>
+            <a:pPr algn="l">
+              <a:lnSpc>
+                <a:spcPct val="130000"/>
+              </a:lnSpc>
+              <a:spcAft>
+                <a:spcPts val="0"/>
+              </a:spcAft>
+            </a:pPr>
+            <a:r>
+              <a:rPr sz="1000" b="0" i="0" spc="140">
+                <a:solidFill>
+                  <a:srgbClr val="5C625A"/>
+                </a:solidFill>
                 <a:latin typeface="Consolas"/>
               </a:rPr>
-              <a:t>Rice (mixed, low quality)</a:t>
-            </a:r>
-          </a:p>
-        </p:txBody>
-      </p:sp>
-      <p:sp>
-        <p:nvSpPr>
-          <p:cNvPr id="19" name="TextBox 18"/>
-          <p:cNvSpPr txBox="1"/>
-          <p:nvPr/>
-        </p:nvSpPr>
-        <p:spPr>
-          <a:xfrm>
-            <a:off x="7086600" y="3309619"/>
-            <a:ext cx="4023360" cy="274320"/>
-          </a:xfrm>
-          <a:prstGeom prst="rect">
-            <a:avLst/>
-          </a:prstGeom>
-          <a:noFill/>
-        </p:spPr>
-        <p:txBody>
-          <a:bodyPr wrap="square" anchor="t" lIns="0" rIns="0" tIns="0" bIns="0">
-            <a:spAutoFit/>
-          </a:bodyPr>
-          <a:lstStyle/>
-          <a:p>
-            <a:pPr algn="l">
-              <a:lnSpc>
-                <a:spcPct val="130000"/>
-              </a:lnSpc>
-              <a:spcAft>
-                <a:spcPts val="0"/>
-              </a:spcAft>
-            </a:pPr>
-            <a:r>
-              <a:rPr sz="1150" b="0" i="0">
+              <a:t>DATA</a:t>
+            </a:r>
+          </a:p>
+        </p:txBody>
+      </p:sp>
+      <p:sp>
+        <p:nvSpPr>
+          <p:cNvPr id="9" name="TextBox 8"/>
+          <p:cNvSpPr txBox="1"/>
+          <p:nvPr/>
+        </p:nvSpPr>
+        <p:spPr>
+          <a:xfrm>
+            <a:off x="2240280" y="5230368"/>
+            <a:ext cx="5486400" cy="292608"/>
+          </a:xfrm>
+          <a:prstGeom prst="rect">
+            <a:avLst/>
+          </a:prstGeom>
+          <a:noFill/>
+        </p:spPr>
+        <p:txBody>
+          <a:bodyPr wrap="square" anchor="t" lIns="0" rIns="0" tIns="0" bIns="0">
+            <a:spAutoFit/>
+          </a:bodyPr>
+          <a:lstStyle/>
+          <a:p>
+            <a:pPr algn="l">
+              <a:lnSpc>
+                <a:spcPct val="130000"/>
+              </a:lnSpc>
+              <a:spcAft>
+                <a:spcPts val="0"/>
+              </a:spcAft>
+            </a:pPr>
+            <a:r>
+              <a:rPr sz="1350" b="0" i="0">
+                <a:solidFill>
+                  <a:srgbClr val="191E19"/>
+                </a:solidFill>
+                <a:latin typeface="Segoe UI"/>
+              </a:rPr>
+              <a:t>WFP Cambodia food prices</a:t>
+            </a:r>
+          </a:p>
+        </p:txBody>
+      </p:sp>
+      <p:sp>
+        <p:nvSpPr>
+          <p:cNvPr id="10" name="TextBox 9"/>
+          <p:cNvSpPr txBox="1"/>
+          <p:nvPr/>
+        </p:nvSpPr>
+        <p:spPr>
+          <a:xfrm>
+            <a:off x="822960" y="5623560"/>
+            <a:ext cx="1143000" cy="274320"/>
+          </a:xfrm>
+          <a:prstGeom prst="rect">
+            <a:avLst/>
+          </a:prstGeom>
+          <a:noFill/>
+        </p:spPr>
+        <p:txBody>
+          <a:bodyPr wrap="square" anchor="t" lIns="0" rIns="0" tIns="0" bIns="0">
+            <a:spAutoFit/>
+          </a:bodyPr>
+          <a:lstStyle/>
+          <a:p>
+            <a:pPr algn="l">
+              <a:lnSpc>
+                <a:spcPct val="130000"/>
+              </a:lnSpc>
+              <a:spcAft>
+                <a:spcPts val="0"/>
+              </a:spcAft>
+            </a:pPr>
+            <a:r>
+              <a:rPr sz="1000" b="0" i="0" spc="140">
                 <a:solidFill>
                   <a:srgbClr val="5C625A"/>
                 </a:solidFill>
                 <a:latin typeface="Consolas"/>
               </a:rPr>
-              <a:t>Phnom Penh, Phnom Penh · Wholesale</a:t>
-            </a:r>
-          </a:p>
-        </p:txBody>
-      </p:sp>
-      <p:sp>
-        <p:nvSpPr>
-          <p:cNvPr id="20" name="TextBox 19"/>
-          <p:cNvSpPr txBox="1"/>
-          <p:nvPr/>
-        </p:nvSpPr>
-        <p:spPr>
-          <a:xfrm>
-            <a:off x="7086600" y="3731894"/>
-            <a:ext cx="4023360" cy="274320"/>
-          </a:xfrm>
-          <a:prstGeom prst="rect">
-            <a:avLst/>
-          </a:prstGeom>
-          <a:noFill/>
-        </p:spPr>
-        <p:txBody>
-          <a:bodyPr wrap="square" anchor="t" lIns="0" rIns="0" tIns="0" bIns="0">
-            <a:spAutoFit/>
-          </a:bodyPr>
-          <a:lstStyle/>
-          <a:p>
-            <a:pPr algn="l">
-              <a:lnSpc>
-                <a:spcPct val="130000"/>
-              </a:lnSpc>
-              <a:spcAft>
-                <a:spcPts val="0"/>
-              </a:spcAft>
-            </a:pPr>
-            <a:r>
-              <a:rPr sz="1150" b="0" i="0">
+              <a:t>MODEL</a:t>
+            </a:r>
+          </a:p>
+        </p:txBody>
+      </p:sp>
+      <p:sp>
+        <p:nvSpPr>
+          <p:cNvPr id="11" name="TextBox 10"/>
+          <p:cNvSpPr txBox="1"/>
+          <p:nvPr/>
+        </p:nvSpPr>
+        <p:spPr>
+          <a:xfrm>
+            <a:off x="2240280" y="5596128"/>
+            <a:ext cx="5486400" cy="292608"/>
+          </a:xfrm>
+          <a:prstGeom prst="rect">
+            <a:avLst/>
+          </a:prstGeom>
+          <a:noFill/>
+        </p:spPr>
+        <p:txBody>
+          <a:bodyPr wrap="square" anchor="t" lIns="0" rIns="0" tIns="0" bIns="0">
+            <a:spAutoFit/>
+          </a:bodyPr>
+          <a:lstStyle/>
+          <a:p>
+            <a:pPr algn="l">
+              <a:lnSpc>
+                <a:spcPct val="130000"/>
+              </a:lnSpc>
+              <a:spcAft>
+                <a:spcPts val="0"/>
+              </a:spcAft>
+            </a:pPr>
+            <a:r>
+              <a:rPr sz="1350" b="0" i="0">
                 <a:solidFill>
                   <a:srgbClr val="191E19"/>
                 </a:solidFill>
+                <a:latin typeface="Segoe UI"/>
+              </a:rPr>
+              <a:t>XGBoost regression, tested chronologically</a:t>
+            </a:r>
+          </a:p>
+        </p:txBody>
+      </p:sp>
+      <p:sp>
+        <p:nvSpPr>
+          <p:cNvPr id="12" name="TextBox 11"/>
+          <p:cNvSpPr txBox="1"/>
+          <p:nvPr/>
+        </p:nvSpPr>
+        <p:spPr>
+          <a:xfrm>
+            <a:off x="822960" y="5989320"/>
+            <a:ext cx="1143000" cy="274320"/>
+          </a:xfrm>
+          <a:prstGeom prst="rect">
+            <a:avLst/>
+          </a:prstGeom>
+          <a:noFill/>
+        </p:spPr>
+        <p:txBody>
+          <a:bodyPr wrap="square" anchor="t" lIns="0" rIns="0" tIns="0" bIns="0">
+            <a:spAutoFit/>
+          </a:bodyPr>
+          <a:lstStyle/>
+          <a:p>
+            <a:pPr algn="l">
+              <a:lnSpc>
+                <a:spcPct val="130000"/>
+              </a:lnSpc>
+              <a:spcAft>
+                <a:spcPts val="0"/>
+              </a:spcAft>
+            </a:pPr>
+            <a:r>
+              <a:rPr sz="1000" b="0" i="0" spc="140">
+                <a:solidFill>
+                  <a:srgbClr val="5C625A"/>
+                </a:solidFill>
                 <a:latin typeface="Consolas"/>
               </a:rPr>
-              <a:t>Last recorded (2022-06): $0.440 / KG</a:t>
-            </a:r>
-          </a:p>
-        </p:txBody>
-      </p:sp>
-      <p:sp>
-        <p:nvSpPr>
-          <p:cNvPr id="21" name="TextBox 20"/>
-          <p:cNvSpPr txBox="1"/>
-          <p:nvPr/>
-        </p:nvSpPr>
-        <p:spPr>
-          <a:xfrm>
-            <a:off x="7086600" y="4009389"/>
-            <a:ext cx="4023360" cy="274320"/>
-          </a:xfrm>
-          <a:prstGeom prst="rect">
-            <a:avLst/>
-          </a:prstGeom>
-          <a:noFill/>
-        </p:spPr>
-        <p:txBody>
-          <a:bodyPr wrap="square" anchor="t" lIns="0" rIns="0" tIns="0" bIns="0">
-            <a:spAutoFit/>
-          </a:bodyPr>
-          <a:lstStyle/>
-          <a:p>
-            <a:pPr algn="l">
-              <a:lnSpc>
-                <a:spcPct val="130000"/>
-              </a:lnSpc>
-              <a:spcAft>
-                <a:spcPts val="0"/>
-              </a:spcAft>
-            </a:pPr>
-            <a:r>
-              <a:rPr sz="1150" b="0" i="0">
+              <a:t>PRODUCT</a:t>
+            </a:r>
+          </a:p>
+        </p:txBody>
+      </p:sp>
+      <p:sp>
+        <p:nvSpPr>
+          <p:cNvPr id="13" name="TextBox 12"/>
+          <p:cNvSpPr txBox="1"/>
+          <p:nvPr/>
+        </p:nvSpPr>
+        <p:spPr>
+          <a:xfrm>
+            <a:off x="2240280" y="5961888"/>
+            <a:ext cx="5486400" cy="292608"/>
+          </a:xfrm>
+          <a:prstGeom prst="rect">
+            <a:avLst/>
+          </a:prstGeom>
+          <a:noFill/>
+        </p:spPr>
+        <p:txBody>
+          <a:bodyPr wrap="square" anchor="t" lIns="0" rIns="0" tIns="0" bIns="0">
+            <a:spAutoFit/>
+          </a:bodyPr>
+          <a:lstStyle/>
+          <a:p>
+            <a:pPr algn="l">
+              <a:lnSpc>
+                <a:spcPct val="130000"/>
+              </a:lnSpc>
+              <a:spcAft>
+                <a:spcPts val="0"/>
+              </a:spcAft>
+            </a:pPr>
+            <a:r>
+              <a:rPr sz="1350" b="0" i="0">
                 <a:solidFill>
                   <a:srgbClr val="191E19"/>
                 </a:solidFill>
-                <a:latin typeface="Consolas"/>
-              </a:rPr>
-              <a:t>Next period forecast: $0.461</a:t>
-            </a:r>
-          </a:p>
-        </p:txBody>
-      </p:sp>
-      <p:sp>
-        <p:nvSpPr>
-          <p:cNvPr id="22" name="TextBox 21"/>
-          <p:cNvSpPr txBox="1"/>
-          <p:nvPr/>
-        </p:nvSpPr>
-        <p:spPr>
-          <a:xfrm>
-            <a:off x="7086600" y="4286884"/>
-            <a:ext cx="4023360" cy="274320"/>
-          </a:xfrm>
-          <a:prstGeom prst="rect">
-            <a:avLst/>
-          </a:prstGeom>
-          <a:noFill/>
-        </p:spPr>
-        <p:txBody>
-          <a:bodyPr wrap="square" anchor="t" lIns="0" rIns="0" tIns="0" bIns="0">
-            <a:spAutoFit/>
-          </a:bodyPr>
-          <a:lstStyle/>
-          <a:p>
-            <a:pPr algn="l">
-              <a:lnSpc>
-                <a:spcPct val="130000"/>
-              </a:lnSpc>
-              <a:spcAft>
-                <a:spcPts val="0"/>
-              </a:spcAft>
-            </a:pPr>
-            <a:r>
-              <a:rPr sz="1250" b="1" i="0">
-                <a:solidFill>
-                  <a:srgbClr val="A06D05"/>
-                </a:solidFill>
-                <a:latin typeface="Consolas"/>
-              </a:rPr>
-              <a:t>▲ +4.8%</a:t>
-            </a:r>
-          </a:p>
-        </p:txBody>
-      </p:sp>
-      <p:sp>
-        <p:nvSpPr>
-          <p:cNvPr id="23" name="TextBox 22"/>
-          <p:cNvSpPr txBox="1"/>
-          <p:nvPr/>
-        </p:nvSpPr>
-        <p:spPr>
-          <a:xfrm>
-            <a:off x="7086600" y="4733289"/>
-            <a:ext cx="4023360" cy="274320"/>
-          </a:xfrm>
-          <a:prstGeom prst="rect">
-            <a:avLst/>
-          </a:prstGeom>
-          <a:noFill/>
-        </p:spPr>
-        <p:txBody>
-          <a:bodyPr wrap="square" anchor="t" lIns="0" rIns="0" tIns="0" bIns="0">
-            <a:spAutoFit/>
-          </a:bodyPr>
-          <a:lstStyle/>
-          <a:p>
-            <a:pPr algn="l">
-              <a:lnSpc>
-                <a:spcPct val="130000"/>
-              </a:lnSpc>
-              <a:spcAft>
-                <a:spcPts val="0"/>
-              </a:spcAft>
-            </a:pPr>
-            <a:r>
-              <a:rPr sz="1300" b="0" i="0">
-                <a:solidFill>
-                  <a:srgbClr val="2F5D46"/>
-                </a:solidFill>
-                <a:latin typeface="Consolas"/>
-              </a:rPr>
-              <a:t>▁▃▁▁▁▁▂▂▂▁▂▂▁▇▇▇▁▇▁▇▇▇█▇</a:t>
-            </a:r>
-          </a:p>
-        </p:txBody>
-      </p:sp>
-      <p:sp>
-        <p:nvSpPr>
-          <p:cNvPr id="24" name="TextBox 23"/>
-          <p:cNvSpPr txBox="1"/>
-          <p:nvPr/>
-        </p:nvSpPr>
-        <p:spPr>
-          <a:xfrm>
-            <a:off x="7086600" y="5046979"/>
-            <a:ext cx="4023360" cy="274320"/>
-          </a:xfrm>
-          <a:prstGeom prst="rect">
-            <a:avLst/>
-          </a:prstGeom>
-          <a:noFill/>
-        </p:spPr>
-        <p:txBody>
-          <a:bodyPr wrap="square" anchor="t" lIns="0" rIns="0" tIns="0" bIns="0">
-            <a:spAutoFit/>
-          </a:bodyPr>
-          <a:lstStyle/>
-          <a:p>
-            <a:pPr algn="l">
-              <a:lnSpc>
-                <a:spcPct val="130000"/>
-              </a:lnSpc>
-              <a:spcAft>
-                <a:spcPts val="0"/>
-              </a:spcAft>
-            </a:pPr>
-            <a:r>
-              <a:rPr sz="1050" b="0" i="0">
-                <a:solidFill>
-                  <a:srgbClr val="5C625A"/>
-                </a:solidFill>
-                <a:latin typeface="Consolas"/>
-              </a:rPr>
-              <a:t>2020-05 → 2022-06, 24 observations</a:t>
-            </a:r>
-          </a:p>
-        </p:txBody>
-      </p:sp>
-    </p:spTree>
-  </p:cSld>
-  <p:clrMapOvr>
-    <a:masterClrMapping/>
-  </p:clrMapOvr>
-</p:sld>
-</file>
-
-<file path=ppt/slides/slide16.xml><?xml version="1.0" encoding="utf-8"?>
-<p:sld xmlns:a="http://schemas.openxmlformats.org/drawingml/2006/main" xmlns:p="http://schemas.openxmlformats.org/presentationml/2006/main" xmlns:r="http://schemas.openxmlformats.org/officeDocument/2006/relationships">
-  <p:cSld>
-    <p:spTree>
-      <p:nvGrpSpPr>
-        <p:cNvPr id="1" name=""/>
-        <p:cNvGrpSpPr/>
-        <p:nvPr/>
-      </p:nvGrpSpPr>
-      <p:grpSpPr/>
-      <p:sp>
-        <p:nvSpPr>
-          <p:cNvPr id="2" name="Rectangle 1"/>
-          <p:cNvSpPr/>
-          <p:nvPr/>
-        </p:nvSpPr>
-        <p:spPr>
-          <a:xfrm>
-            <a:off x="0" y="0"/>
-            <a:ext cx="12191695" cy="6858000"/>
-          </a:xfrm>
-          <a:prstGeom prst="rect">
-            <a:avLst/>
-          </a:prstGeom>
-          <a:solidFill>
-            <a:srgbClr val="E9E7DB"/>
-          </a:solidFill>
-          <a:ln>
-            <a:noFill/>
-          </a:ln>
-          <a:effectLst/>
-        </p:spPr>
-        <p:style>
-          <a:lnRef idx="1">
-            <a:schemeClr val="accent1"/>
-          </a:lnRef>
-          <a:fillRef idx="3">
-            <a:schemeClr val="accent1"/>
-          </a:fillRef>
-          <a:effectRef idx="2">
-            <a:schemeClr val="accent1"/>
-          </a:effectRef>
-          <a:fontRef idx="minor">
-            <a:schemeClr val="lt1"/>
-          </a:fontRef>
-        </p:style>
-        <p:txBody>
-          <a:bodyPr rtlCol="0" anchor="ctr"/>
-          <a:lstStyle/>
-          <a:p>
-            <a:pPr algn="ctr"/>
-          </a:p>
-        </p:txBody>
-      </p:sp>
-      <p:sp>
-        <p:nvSpPr>
-          <p:cNvPr id="3" name="TextBox 2"/>
-          <p:cNvSpPr txBox="1"/>
-          <p:nvPr/>
-        </p:nvSpPr>
-        <p:spPr>
-          <a:xfrm>
-            <a:off x="822960" y="566928"/>
-            <a:ext cx="10545775" cy="274320"/>
-          </a:xfrm>
-          <a:prstGeom prst="rect">
-            <a:avLst/>
-          </a:prstGeom>
-          <a:noFill/>
-        </p:spPr>
-        <p:txBody>
-          <a:bodyPr wrap="square" anchor="t" lIns="0" rIns="0" tIns="0" bIns="0">
-            <a:spAutoFit/>
-          </a:bodyPr>
-          <a:lstStyle/>
-          <a:p>
-            <a:pPr algn="l">
-              <a:lnSpc>
-                <a:spcPct val="130000"/>
-              </a:lnSpc>
-              <a:spcAft>
-                <a:spcPts val="0"/>
-              </a:spcAft>
-            </a:pPr>
-            <a:r>
-              <a:rPr sz="1050" b="0" i="0" spc="200">
-                <a:solidFill>
-                  <a:srgbClr val="5C625A"/>
-                </a:solidFill>
-                <a:latin typeface="Consolas"/>
-              </a:rPr>
-              <a:t>LIMITATIONS</a:t>
-            </a:r>
-          </a:p>
-        </p:txBody>
-      </p:sp>
-      <p:sp>
-        <p:nvSpPr>
-          <p:cNvPr id="4" name="TextBox 3"/>
-          <p:cNvSpPr txBox="1"/>
-          <p:nvPr/>
-        </p:nvSpPr>
-        <p:spPr>
-          <a:xfrm>
-            <a:off x="822960" y="932688"/>
-            <a:ext cx="10545775" cy="640080"/>
-          </a:xfrm>
-          <a:prstGeom prst="rect">
-            <a:avLst/>
-          </a:prstGeom>
-          <a:noFill/>
-        </p:spPr>
-        <p:txBody>
-          <a:bodyPr wrap="square" anchor="t" lIns="0" rIns="0" tIns="0" bIns="0">
-            <a:spAutoFit/>
-          </a:bodyPr>
-          <a:lstStyle/>
-          <a:p>
-            <a:pPr algn="l">
-              <a:lnSpc>
-                <a:spcPct val="105000"/>
-              </a:lnSpc>
-              <a:spcAft>
-                <a:spcPts val="0"/>
-              </a:spcAft>
-            </a:pPr>
-            <a:r>
-              <a:rPr sz="3600" b="1" i="0">
-                <a:solidFill>
-                  <a:srgbClr val="191E19"/>
-                </a:solidFill>
-                <a:latin typeface="Georgia"/>
-              </a:rPr>
-              <a:t>What this model</a:t>
-            </a:r>
-          </a:p>
-        </p:txBody>
-      </p:sp>
-      <p:sp>
-        <p:nvSpPr>
-          <p:cNvPr id="5" name="TextBox 4"/>
-          <p:cNvSpPr txBox="1"/>
-          <p:nvPr/>
-        </p:nvSpPr>
-        <p:spPr>
-          <a:xfrm>
-            <a:off x="822960" y="1499616"/>
-            <a:ext cx="10545775" cy="640080"/>
-          </a:xfrm>
-          <a:prstGeom prst="rect">
-            <a:avLst/>
-          </a:prstGeom>
-          <a:noFill/>
-        </p:spPr>
-        <p:txBody>
-          <a:bodyPr wrap="square" anchor="t" lIns="0" rIns="0" tIns="0" bIns="0">
-            <a:spAutoFit/>
-          </a:bodyPr>
-          <a:lstStyle/>
-          <a:p>
-            <a:pPr algn="l">
-              <a:lnSpc>
-                <a:spcPct val="105000"/>
-              </a:lnSpc>
-              <a:spcAft>
-                <a:spcPts val="0"/>
-              </a:spcAft>
-            </a:pPr>
-            <a:r>
-              <a:rPr sz="3600" b="0" i="1">
-                <a:solidFill>
-                  <a:srgbClr val="2F5D46"/>
-                </a:solidFill>
-                <a:latin typeface="Georgia"/>
-              </a:rPr>
-              <a:t>cannot do</a:t>
-            </a:r>
-          </a:p>
-        </p:txBody>
-      </p:sp>
-      <p:sp>
-        <p:nvSpPr>
-          <p:cNvPr id="6" name="TextBox 5"/>
+                <a:latin typeface="Segoe UI"/>
+              </a:rPr>
+              <a:t>Nuxt app, API and Telegram bot</a:t>
+            </a:r>
+          </a:p>
+        </p:txBody>
+      </p:sp>
+      <p:sp>
+        <p:nvSpPr>
+          <p:cNvPr id="14" name="TextBox 13"/>
           <p:cNvSpPr txBox="1"/>
           <p:nvPr/>
         </p:nvSpPr>
@@ -9268,1829 +8711,6 @@
                 <a:latin typeface="Consolas"/>
               </a:rPr>
               <a:t>15</a:t>
-            </a:r>
-          </a:p>
-        </p:txBody>
-      </p:sp>
-      <p:sp>
-        <p:nvSpPr>
-          <p:cNvPr id="7" name="Rectangle 6"/>
-          <p:cNvSpPr/>
-          <p:nvPr/>
-        </p:nvSpPr>
-        <p:spPr>
-          <a:xfrm>
-            <a:off x="822960" y="2340864"/>
-            <a:ext cx="45720" cy="548640"/>
-          </a:xfrm>
-          <a:prstGeom prst="rect">
-            <a:avLst/>
-          </a:prstGeom>
-          <a:solidFill>
-            <a:srgbClr val="6B2545"/>
-          </a:solidFill>
-          <a:ln>
-            <a:noFill/>
-          </a:ln>
-          <a:effectLst/>
-        </p:spPr>
-        <p:style>
-          <a:lnRef idx="1">
-            <a:schemeClr val="accent1"/>
-          </a:lnRef>
-          <a:fillRef idx="3">
-            <a:schemeClr val="accent1"/>
-          </a:fillRef>
-          <a:effectRef idx="2">
-            <a:schemeClr val="accent1"/>
-          </a:effectRef>
-          <a:fontRef idx="minor">
-            <a:schemeClr val="lt1"/>
-          </a:fontRef>
-        </p:style>
-        <p:txBody>
-          <a:bodyPr rtlCol="0" anchor="ctr"/>
-          <a:lstStyle/>
-          <a:p>
-            <a:pPr algn="ctr"/>
-          </a:p>
-        </p:txBody>
-      </p:sp>
-      <p:sp>
-        <p:nvSpPr>
-          <p:cNvPr id="8" name="TextBox 7"/>
-          <p:cNvSpPr txBox="1"/>
-          <p:nvPr/>
-        </p:nvSpPr>
-        <p:spPr>
-          <a:xfrm>
-            <a:off x="1097280" y="2286000"/>
-            <a:ext cx="10058400" cy="274320"/>
-          </a:xfrm>
-          <a:prstGeom prst="rect">
-            <a:avLst/>
-          </a:prstGeom>
-          <a:noFill/>
-        </p:spPr>
-        <p:txBody>
-          <a:bodyPr wrap="square" anchor="t" lIns="0" rIns="0" tIns="0" bIns="0">
-            <a:spAutoFit/>
-          </a:bodyPr>
-          <a:lstStyle/>
-          <a:p>
-            <a:pPr algn="l">
-              <a:lnSpc>
-                <a:spcPct val="130000"/>
-              </a:lnSpc>
-              <a:spcAft>
-                <a:spcPts val="0"/>
-              </a:spcAft>
-            </a:pPr>
-            <a:r>
-              <a:rPr sz="1550" b="1" i="0">
-                <a:solidFill>
-                  <a:srgbClr val="191E19"/>
-                </a:solidFill>
-                <a:latin typeface="Segoe UI"/>
-              </a:rPr>
-              <a:t>One period ahead, and no further</a:t>
-            </a:r>
-          </a:p>
-        </p:txBody>
-      </p:sp>
-      <p:sp>
-        <p:nvSpPr>
-          <p:cNvPr id="9" name="TextBox 8"/>
-          <p:cNvSpPr txBox="1"/>
-          <p:nvPr/>
-        </p:nvSpPr>
-        <p:spPr>
-          <a:xfrm>
-            <a:off x="1097280" y="2587752"/>
-            <a:ext cx="9692640" cy="457200"/>
-          </a:xfrm>
-          <a:prstGeom prst="rect">
-            <a:avLst/>
-          </a:prstGeom>
-          <a:noFill/>
-        </p:spPr>
-        <p:txBody>
-          <a:bodyPr wrap="square" anchor="t" lIns="0" rIns="0" tIns="0" bIns="0">
-            <a:spAutoFit/>
-          </a:bodyPr>
-          <a:lstStyle/>
-          <a:p>
-            <a:pPr algn="l">
-              <a:lnSpc>
-                <a:spcPct val="140000"/>
-              </a:lnSpc>
-              <a:spcAft>
-                <a:spcPts val="0"/>
-              </a:spcAft>
-            </a:pPr>
-            <a:r>
-              <a:rPr sz="1350" b="0" i="0">
-                <a:solidFill>
-                  <a:srgbClr val="5C625A"/>
-                </a:solidFill>
-                <a:latin typeface="Segoe UI"/>
-              </a:rPr>
-              <a:t>Every feature is a recent price. Feed the model its own output and error compounds fast — there is no multi-step forecast here.</a:t>
-            </a:r>
-          </a:p>
-        </p:txBody>
-      </p:sp>
-      <p:sp>
-        <p:nvSpPr>
-          <p:cNvPr id="10" name="Rectangle 9"/>
-          <p:cNvSpPr/>
-          <p:nvPr/>
-        </p:nvSpPr>
-        <p:spPr>
-          <a:xfrm>
-            <a:off x="822960" y="3364992"/>
-            <a:ext cx="45720" cy="548640"/>
-          </a:xfrm>
-          <a:prstGeom prst="rect">
-            <a:avLst/>
-          </a:prstGeom>
-          <a:solidFill>
-            <a:srgbClr val="6B2545"/>
-          </a:solidFill>
-          <a:ln>
-            <a:noFill/>
-          </a:ln>
-          <a:effectLst/>
-        </p:spPr>
-        <p:style>
-          <a:lnRef idx="1">
-            <a:schemeClr val="accent1"/>
-          </a:lnRef>
-          <a:fillRef idx="3">
-            <a:schemeClr val="accent1"/>
-          </a:fillRef>
-          <a:effectRef idx="2">
-            <a:schemeClr val="accent1"/>
-          </a:effectRef>
-          <a:fontRef idx="minor">
-            <a:schemeClr val="lt1"/>
-          </a:fontRef>
-        </p:style>
-        <p:txBody>
-          <a:bodyPr rtlCol="0" anchor="ctr"/>
-          <a:lstStyle/>
-          <a:p>
-            <a:pPr algn="ctr"/>
-          </a:p>
-        </p:txBody>
-      </p:sp>
-      <p:sp>
-        <p:nvSpPr>
-          <p:cNvPr id="11" name="TextBox 10"/>
-          <p:cNvSpPr txBox="1"/>
-          <p:nvPr/>
-        </p:nvSpPr>
-        <p:spPr>
-          <a:xfrm>
-            <a:off x="1097280" y="3310128"/>
-            <a:ext cx="10058400" cy="274320"/>
-          </a:xfrm>
-          <a:prstGeom prst="rect">
-            <a:avLst/>
-          </a:prstGeom>
-          <a:noFill/>
-        </p:spPr>
-        <p:txBody>
-          <a:bodyPr wrap="square" anchor="t" lIns="0" rIns="0" tIns="0" bIns="0">
-            <a:spAutoFit/>
-          </a:bodyPr>
-          <a:lstStyle/>
-          <a:p>
-            <a:pPr algn="l">
-              <a:lnSpc>
-                <a:spcPct val="130000"/>
-              </a:lnSpc>
-              <a:spcAft>
-                <a:spcPts val="0"/>
-              </a:spcAft>
-            </a:pPr>
-            <a:r>
-              <a:rPr sz="1550" b="1" i="0">
-                <a:solidFill>
-                  <a:srgbClr val="191E19"/>
-                </a:solidFill>
-                <a:latin typeface="Segoe UI"/>
-              </a:rPr>
-              <a:t>It cannot see shocks coming</a:t>
-            </a:r>
-          </a:p>
-        </p:txBody>
-      </p:sp>
-      <p:sp>
-        <p:nvSpPr>
-          <p:cNvPr id="12" name="TextBox 11"/>
-          <p:cNvSpPr txBox="1"/>
-          <p:nvPr/>
-        </p:nvSpPr>
-        <p:spPr>
-          <a:xfrm>
-            <a:off x="1097280" y="3611880"/>
-            <a:ext cx="9692640" cy="457200"/>
-          </a:xfrm>
-          <a:prstGeom prst="rect">
-            <a:avLst/>
-          </a:prstGeom>
-          <a:noFill/>
-        </p:spPr>
-        <p:txBody>
-          <a:bodyPr wrap="square" anchor="t" lIns="0" rIns="0" tIns="0" bIns="0">
-            <a:spAutoFit/>
-          </a:bodyPr>
-          <a:lstStyle/>
-          <a:p>
-            <a:pPr algn="l">
-              <a:lnSpc>
-                <a:spcPct val="140000"/>
-              </a:lnSpc>
-              <a:spcAft>
-                <a:spcPts val="0"/>
-              </a:spcAft>
-            </a:pPr>
-            <a:r>
-              <a:rPr sz="1350" b="0" i="0">
-                <a:solidFill>
-                  <a:srgbClr val="5C625A"/>
-                </a:solidFill>
-                <a:latin typeface="Segoe UI"/>
-              </a:rPr>
-              <a:t>Fuel costs, export bans, floods, festival demand. None are in the feature set, and they are exactly what moves prices sharply.</a:t>
-            </a:r>
-          </a:p>
-        </p:txBody>
-      </p:sp>
-      <p:sp>
-        <p:nvSpPr>
-          <p:cNvPr id="13" name="Rectangle 12"/>
-          <p:cNvSpPr/>
-          <p:nvPr/>
-        </p:nvSpPr>
-        <p:spPr>
-          <a:xfrm>
-            <a:off x="822960" y="4389120"/>
-            <a:ext cx="45720" cy="548640"/>
-          </a:xfrm>
-          <a:prstGeom prst="rect">
-            <a:avLst/>
-          </a:prstGeom>
-          <a:solidFill>
-            <a:srgbClr val="6B2545"/>
-          </a:solidFill>
-          <a:ln>
-            <a:noFill/>
-          </a:ln>
-          <a:effectLst/>
-        </p:spPr>
-        <p:style>
-          <a:lnRef idx="1">
-            <a:schemeClr val="accent1"/>
-          </a:lnRef>
-          <a:fillRef idx="3">
-            <a:schemeClr val="accent1"/>
-          </a:fillRef>
-          <a:effectRef idx="2">
-            <a:schemeClr val="accent1"/>
-          </a:effectRef>
-          <a:fontRef idx="minor">
-            <a:schemeClr val="lt1"/>
-          </a:fontRef>
-        </p:style>
-        <p:txBody>
-          <a:bodyPr rtlCol="0" anchor="ctr"/>
-          <a:lstStyle/>
-          <a:p>
-            <a:pPr algn="ctr"/>
-          </a:p>
-        </p:txBody>
-      </p:sp>
-      <p:sp>
-        <p:nvSpPr>
-          <p:cNvPr id="14" name="TextBox 13"/>
-          <p:cNvSpPr txBox="1"/>
-          <p:nvPr/>
-        </p:nvSpPr>
-        <p:spPr>
-          <a:xfrm>
-            <a:off x="1097280" y="4334256"/>
-            <a:ext cx="10058400" cy="274320"/>
-          </a:xfrm>
-          <a:prstGeom prst="rect">
-            <a:avLst/>
-          </a:prstGeom>
-          <a:noFill/>
-        </p:spPr>
-        <p:txBody>
-          <a:bodyPr wrap="square" anchor="t" lIns="0" rIns="0" tIns="0" bIns="0">
-            <a:spAutoFit/>
-          </a:bodyPr>
-          <a:lstStyle/>
-          <a:p>
-            <a:pPr algn="l">
-              <a:lnSpc>
-                <a:spcPct val="130000"/>
-              </a:lnSpc>
-              <a:spcAft>
-                <a:spcPts val="0"/>
-              </a:spcAft>
-            </a:pPr>
-            <a:r>
-              <a:rPr sz="1550" b="1" i="0">
-                <a:solidFill>
-                  <a:srgbClr val="191E19"/>
-                </a:solidFill>
-                <a:latin typeface="Segoe UI"/>
-              </a:rPr>
-              <a:t>Stale series forecast from stale prices</a:t>
-            </a:r>
-          </a:p>
-        </p:txBody>
-      </p:sp>
-      <p:sp>
-        <p:nvSpPr>
-          <p:cNvPr id="15" name="TextBox 14"/>
-          <p:cNvSpPr txBox="1"/>
-          <p:nvPr/>
-        </p:nvSpPr>
-        <p:spPr>
-          <a:xfrm>
-            <a:off x="1097280" y="4636008"/>
-            <a:ext cx="9692640" cy="457200"/>
-          </a:xfrm>
-          <a:prstGeom prst="rect">
-            <a:avLst/>
-          </a:prstGeom>
-          <a:noFill/>
-        </p:spPr>
-        <p:txBody>
-          <a:bodyPr wrap="square" anchor="t" lIns="0" rIns="0" tIns="0" bIns="0">
-            <a:spAutoFit/>
-          </a:bodyPr>
-          <a:lstStyle/>
-          <a:p>
-            <a:pPr algn="l">
-              <a:lnSpc>
-                <a:spcPct val="140000"/>
-              </a:lnSpc>
-              <a:spcAft>
-                <a:spcPts val="0"/>
-              </a:spcAft>
-            </a:pPr>
-            <a:r>
-              <a:rPr sz="1350" b="0" i="0">
-                <a:solidFill>
-                  <a:srgbClr val="5C625A"/>
-                </a:solidFill>
-                <a:latin typeface="Segoe UI"/>
-              </a:rPr>
-              <a:t>A series last reported in 2022 gets a 2022-shaped answer. Honest, but not useful for today.</a:t>
-            </a:r>
-          </a:p>
-        </p:txBody>
-      </p:sp>
-      <p:sp>
-        <p:nvSpPr>
-          <p:cNvPr id="16" name="Rectangle 15"/>
-          <p:cNvSpPr/>
-          <p:nvPr/>
-        </p:nvSpPr>
-        <p:spPr>
-          <a:xfrm>
-            <a:off x="822960" y="5413248"/>
-            <a:ext cx="45720" cy="548640"/>
-          </a:xfrm>
-          <a:prstGeom prst="rect">
-            <a:avLst/>
-          </a:prstGeom>
-          <a:solidFill>
-            <a:srgbClr val="6B2545"/>
-          </a:solidFill>
-          <a:ln>
-            <a:noFill/>
-          </a:ln>
-          <a:effectLst/>
-        </p:spPr>
-        <p:style>
-          <a:lnRef idx="1">
-            <a:schemeClr val="accent1"/>
-          </a:lnRef>
-          <a:fillRef idx="3">
-            <a:schemeClr val="accent1"/>
-          </a:fillRef>
-          <a:effectRef idx="2">
-            <a:schemeClr val="accent1"/>
-          </a:effectRef>
-          <a:fontRef idx="minor">
-            <a:schemeClr val="lt1"/>
-          </a:fontRef>
-        </p:style>
-        <p:txBody>
-          <a:bodyPr rtlCol="0" anchor="ctr"/>
-          <a:lstStyle/>
-          <a:p>
-            <a:pPr algn="ctr"/>
-          </a:p>
-        </p:txBody>
-      </p:sp>
-      <p:sp>
-        <p:nvSpPr>
-          <p:cNvPr id="17" name="TextBox 16"/>
-          <p:cNvSpPr txBox="1"/>
-          <p:nvPr/>
-        </p:nvSpPr>
-        <p:spPr>
-          <a:xfrm>
-            <a:off x="1097280" y="5358384"/>
-            <a:ext cx="10058400" cy="274320"/>
-          </a:xfrm>
-          <a:prstGeom prst="rect">
-            <a:avLst/>
-          </a:prstGeom>
-          <a:noFill/>
-        </p:spPr>
-        <p:txBody>
-          <a:bodyPr wrap="square" anchor="t" lIns="0" rIns="0" tIns="0" bIns="0">
-            <a:spAutoFit/>
-          </a:bodyPr>
-          <a:lstStyle/>
-          <a:p>
-            <a:pPr algn="l">
-              <a:lnSpc>
-                <a:spcPct val="130000"/>
-              </a:lnSpc>
-              <a:spcAft>
-                <a:spcPts val="0"/>
-              </a:spcAft>
-            </a:pPr>
-            <a:r>
-              <a:rPr sz="1550" b="1" i="0">
-                <a:solidFill>
-                  <a:srgbClr val="191E19"/>
-                </a:solidFill>
-                <a:latin typeface="Segoe UI"/>
-              </a:rPr>
-              <a:t>No uncertainty interval</a:t>
-            </a:r>
-          </a:p>
-        </p:txBody>
-      </p:sp>
-      <p:sp>
-        <p:nvSpPr>
-          <p:cNvPr id="18" name="TextBox 17"/>
-          <p:cNvSpPr txBox="1"/>
-          <p:nvPr/>
-        </p:nvSpPr>
-        <p:spPr>
-          <a:xfrm>
-            <a:off x="1097280" y="5660136"/>
-            <a:ext cx="9692640" cy="457200"/>
-          </a:xfrm>
-          <a:prstGeom prst="rect">
-            <a:avLst/>
-          </a:prstGeom>
-          <a:noFill/>
-        </p:spPr>
-        <p:txBody>
-          <a:bodyPr wrap="square" anchor="t" lIns="0" rIns="0" tIns="0" bIns="0">
-            <a:spAutoFit/>
-          </a:bodyPr>
-          <a:lstStyle/>
-          <a:p>
-            <a:pPr algn="l">
-              <a:lnSpc>
-                <a:spcPct val="140000"/>
-              </a:lnSpc>
-              <a:spcAft>
-                <a:spcPts val="0"/>
-              </a:spcAft>
-            </a:pPr>
-            <a:r>
-              <a:rPr sz="1350" b="0" i="0">
-                <a:solidFill>
-                  <a:srgbClr val="5C625A"/>
-                </a:solidFill>
-                <a:latin typeface="Segoe UI"/>
-              </a:rPr>
-              <a:t>A single number, not a range. The dashed line signals doubt visually, but does not quantify it.</a:t>
-            </a:r>
-          </a:p>
-        </p:txBody>
-      </p:sp>
-    </p:spTree>
-  </p:cSld>
-  <p:clrMapOvr>
-    <a:masterClrMapping/>
-  </p:clrMapOvr>
-</p:sld>
-</file>
-
-<file path=ppt/slides/slide17.xml><?xml version="1.0" encoding="utf-8"?>
-<p:sld xmlns:a="http://schemas.openxmlformats.org/drawingml/2006/main" xmlns:p="http://schemas.openxmlformats.org/presentationml/2006/main" xmlns:r="http://schemas.openxmlformats.org/officeDocument/2006/relationships">
-  <p:cSld>
-    <p:spTree>
-      <p:nvGrpSpPr>
-        <p:cNvPr id="1" name=""/>
-        <p:cNvGrpSpPr/>
-        <p:nvPr/>
-      </p:nvGrpSpPr>
-      <p:grpSpPr/>
-      <p:sp>
-        <p:nvSpPr>
-          <p:cNvPr id="2" name="Rectangle 1"/>
-          <p:cNvSpPr/>
-          <p:nvPr/>
-        </p:nvSpPr>
-        <p:spPr>
-          <a:xfrm>
-            <a:off x="0" y="0"/>
-            <a:ext cx="12191695" cy="6858000"/>
-          </a:xfrm>
-          <a:prstGeom prst="rect">
-            <a:avLst/>
-          </a:prstGeom>
-          <a:solidFill>
-            <a:srgbClr val="E9E7DB"/>
-          </a:solidFill>
-          <a:ln>
-            <a:noFill/>
-          </a:ln>
-          <a:effectLst/>
-        </p:spPr>
-        <p:style>
-          <a:lnRef idx="1">
-            <a:schemeClr val="accent1"/>
-          </a:lnRef>
-          <a:fillRef idx="3">
-            <a:schemeClr val="accent1"/>
-          </a:fillRef>
-          <a:effectRef idx="2">
-            <a:schemeClr val="accent1"/>
-          </a:effectRef>
-          <a:fontRef idx="minor">
-            <a:schemeClr val="lt1"/>
-          </a:fontRef>
-        </p:style>
-        <p:txBody>
-          <a:bodyPr rtlCol="0" anchor="ctr"/>
-          <a:lstStyle/>
-          <a:p>
-            <a:pPr algn="ctr"/>
-          </a:p>
-        </p:txBody>
-      </p:sp>
-      <p:sp>
-        <p:nvSpPr>
-          <p:cNvPr id="3" name="TextBox 2"/>
-          <p:cNvSpPr txBox="1"/>
-          <p:nvPr/>
-        </p:nvSpPr>
-        <p:spPr>
-          <a:xfrm>
-            <a:off x="822960" y="566928"/>
-            <a:ext cx="10545775" cy="274320"/>
-          </a:xfrm>
-          <a:prstGeom prst="rect">
-            <a:avLst/>
-          </a:prstGeom>
-          <a:noFill/>
-        </p:spPr>
-        <p:txBody>
-          <a:bodyPr wrap="square" anchor="t" lIns="0" rIns="0" tIns="0" bIns="0">
-            <a:spAutoFit/>
-          </a:bodyPr>
-          <a:lstStyle/>
-          <a:p>
-            <a:pPr algn="l">
-              <a:lnSpc>
-                <a:spcPct val="130000"/>
-              </a:lnSpc>
-              <a:spcAft>
-                <a:spcPts val="0"/>
-              </a:spcAft>
-            </a:pPr>
-            <a:r>
-              <a:rPr sz="1050" b="0" i="0" spc="200">
-                <a:solidFill>
-                  <a:srgbClr val="5C625A"/>
-                </a:solidFill>
-                <a:latin typeface="Consolas"/>
-              </a:rPr>
-              <a:t>IF I KEPT GOING</a:t>
-            </a:r>
-          </a:p>
-        </p:txBody>
-      </p:sp>
-      <p:sp>
-        <p:nvSpPr>
-          <p:cNvPr id="4" name="TextBox 3"/>
-          <p:cNvSpPr txBox="1"/>
-          <p:nvPr/>
-        </p:nvSpPr>
-        <p:spPr>
-          <a:xfrm>
-            <a:off x="822960" y="932688"/>
-            <a:ext cx="10545775" cy="640080"/>
-          </a:xfrm>
-          <a:prstGeom prst="rect">
-            <a:avLst/>
-          </a:prstGeom>
-          <a:noFill/>
-        </p:spPr>
-        <p:txBody>
-          <a:bodyPr wrap="square" anchor="t" lIns="0" rIns="0" tIns="0" bIns="0">
-            <a:spAutoFit/>
-          </a:bodyPr>
-          <a:lstStyle/>
-          <a:p>
-            <a:pPr algn="l">
-              <a:lnSpc>
-                <a:spcPct val="105000"/>
-              </a:lnSpc>
-              <a:spcAft>
-                <a:spcPts val="0"/>
-              </a:spcAft>
-            </a:pPr>
-            <a:r>
-              <a:rPr sz="3600" b="1" i="0">
-                <a:solidFill>
-                  <a:srgbClr val="191E19"/>
-                </a:solidFill>
-                <a:latin typeface="Georgia"/>
-              </a:rPr>
-              <a:t>Three things</a:t>
-            </a:r>
-          </a:p>
-        </p:txBody>
-      </p:sp>
-      <p:sp>
-        <p:nvSpPr>
-          <p:cNvPr id="5" name="TextBox 4"/>
-          <p:cNvSpPr txBox="1"/>
-          <p:nvPr/>
-        </p:nvSpPr>
-        <p:spPr>
-          <a:xfrm>
-            <a:off x="822960" y="1499616"/>
-            <a:ext cx="10545775" cy="640080"/>
-          </a:xfrm>
-          <a:prstGeom prst="rect">
-            <a:avLst/>
-          </a:prstGeom>
-          <a:noFill/>
-        </p:spPr>
-        <p:txBody>
-          <a:bodyPr wrap="square" anchor="t" lIns="0" rIns="0" tIns="0" bIns="0">
-            <a:spAutoFit/>
-          </a:bodyPr>
-          <a:lstStyle/>
-          <a:p>
-            <a:pPr algn="l">
-              <a:lnSpc>
-                <a:spcPct val="105000"/>
-              </a:lnSpc>
-              <a:spcAft>
-                <a:spcPts val="0"/>
-              </a:spcAft>
-            </a:pPr>
-            <a:r>
-              <a:rPr sz="3600" b="0" i="1">
-                <a:solidFill>
-                  <a:srgbClr val="2F5D46"/>
-                </a:solidFill>
-                <a:latin typeface="Georgia"/>
-              </a:rPr>
-              <a:t>I would add next</a:t>
-            </a:r>
-          </a:p>
-        </p:txBody>
-      </p:sp>
-      <p:sp>
-        <p:nvSpPr>
-          <p:cNvPr id="6" name="TextBox 5"/>
-          <p:cNvSpPr txBox="1"/>
-          <p:nvPr/>
-        </p:nvSpPr>
-        <p:spPr>
-          <a:xfrm>
-            <a:off x="10820095" y="6345936"/>
-            <a:ext cx="548640" cy="274320"/>
-          </a:xfrm>
-          <a:prstGeom prst="rect">
-            <a:avLst/>
-          </a:prstGeom>
-          <a:noFill/>
-        </p:spPr>
-        <p:txBody>
-          <a:bodyPr wrap="square" anchor="t" lIns="0" rIns="0" tIns="0" bIns="0">
-            <a:spAutoFit/>
-          </a:bodyPr>
-          <a:lstStyle/>
-          <a:p>
-            <a:pPr algn="r">
-              <a:lnSpc>
-                <a:spcPct val="130000"/>
-              </a:lnSpc>
-              <a:spcAft>
-                <a:spcPts val="0"/>
-              </a:spcAft>
-            </a:pPr>
-            <a:r>
-              <a:rPr sz="950" b="0" i="0" spc="100">
-                <a:solidFill>
-                  <a:srgbClr val="5C625A"/>
-                </a:solidFill>
-                <a:latin typeface="Consolas"/>
-              </a:rPr>
-              <a:t>16</a:t>
-            </a:r>
-          </a:p>
-        </p:txBody>
-      </p:sp>
-      <p:sp>
-        <p:nvSpPr>
-          <p:cNvPr id="7" name="Rectangle 6"/>
-          <p:cNvSpPr/>
-          <p:nvPr/>
-        </p:nvSpPr>
-        <p:spPr>
-          <a:xfrm>
-            <a:off x="822960" y="2286000"/>
-            <a:ext cx="3291840" cy="2926080"/>
-          </a:xfrm>
-          <a:prstGeom prst="rect">
-            <a:avLst/>
-          </a:prstGeom>
-          <a:solidFill>
-            <a:srgbClr val="FCFBF7"/>
-          </a:solidFill>
-          <a:ln w="12700">
-            <a:solidFill>
-              <a:srgbClr val="DCD9C9"/>
-            </a:solidFill>
-          </a:ln>
-          <a:effectLst/>
-        </p:spPr>
-        <p:style>
-          <a:lnRef idx="1">
-            <a:schemeClr val="accent1"/>
-          </a:lnRef>
-          <a:fillRef idx="3">
-            <a:schemeClr val="accent1"/>
-          </a:fillRef>
-          <a:effectRef idx="2">
-            <a:schemeClr val="accent1"/>
-          </a:effectRef>
-          <a:fontRef idx="minor">
-            <a:schemeClr val="lt1"/>
-          </a:fontRef>
-        </p:style>
-        <p:txBody>
-          <a:bodyPr rtlCol="0" anchor="ctr"/>
-          <a:lstStyle/>
-          <a:p>
-            <a:pPr algn="ctr"/>
-          </a:p>
-        </p:txBody>
-      </p:sp>
-      <p:sp>
-        <p:nvSpPr>
-          <p:cNvPr id="8" name="Rectangle 7"/>
-          <p:cNvSpPr/>
-          <p:nvPr/>
-        </p:nvSpPr>
-        <p:spPr>
-          <a:xfrm>
-            <a:off x="822960" y="2286000"/>
-            <a:ext cx="45720" cy="2926080"/>
-          </a:xfrm>
-          <a:prstGeom prst="rect">
-            <a:avLst/>
-          </a:prstGeom>
-          <a:solidFill>
-            <a:srgbClr val="2F5D46"/>
-          </a:solidFill>
-          <a:ln>
-            <a:noFill/>
-          </a:ln>
-          <a:effectLst/>
-        </p:spPr>
-        <p:style>
-          <a:lnRef idx="1">
-            <a:schemeClr val="accent1"/>
-          </a:lnRef>
-          <a:fillRef idx="3">
-            <a:schemeClr val="accent1"/>
-          </a:fillRef>
-          <a:effectRef idx="2">
-            <a:schemeClr val="accent1"/>
-          </a:effectRef>
-          <a:fontRef idx="minor">
-            <a:schemeClr val="lt1"/>
-          </a:fontRef>
-        </p:style>
-        <p:txBody>
-          <a:bodyPr rtlCol="0" anchor="ctr"/>
-          <a:lstStyle/>
-          <a:p>
-            <a:pPr algn="ctr"/>
-          </a:p>
-        </p:txBody>
-      </p:sp>
-      <p:sp>
-        <p:nvSpPr>
-          <p:cNvPr id="9" name="TextBox 8"/>
-          <p:cNvSpPr txBox="1"/>
-          <p:nvPr/>
-        </p:nvSpPr>
-        <p:spPr>
-          <a:xfrm>
-            <a:off x="1188720" y="2651760"/>
-            <a:ext cx="2651760" cy="640080"/>
-          </a:xfrm>
-          <a:prstGeom prst="rect">
-            <a:avLst/>
-          </a:prstGeom>
-          <a:noFill/>
-        </p:spPr>
-        <p:txBody>
-          <a:bodyPr wrap="square" anchor="t" lIns="0" rIns="0" tIns="0" bIns="0">
-            <a:spAutoFit/>
-          </a:bodyPr>
-          <a:lstStyle/>
-          <a:p>
-            <a:pPr algn="l">
-              <a:lnSpc>
-                <a:spcPct val="115000"/>
-              </a:lnSpc>
-              <a:spcAft>
-                <a:spcPts val="0"/>
-              </a:spcAft>
-            </a:pPr>
-            <a:r>
-              <a:rPr sz="1900" b="1" i="0">
-                <a:solidFill>
-                  <a:srgbClr val="191E19"/>
-                </a:solidFill>
-                <a:latin typeface="Georgia"/>
-              </a:rPr>
-              <a:t>Prediction intervals</a:t>
-            </a:r>
-          </a:p>
-        </p:txBody>
-      </p:sp>
-      <p:sp>
-        <p:nvSpPr>
-          <p:cNvPr id="10" name="TextBox 9"/>
-          <p:cNvSpPr txBox="1"/>
-          <p:nvPr/>
-        </p:nvSpPr>
-        <p:spPr>
-          <a:xfrm>
-            <a:off x="1188720" y="3520440"/>
-            <a:ext cx="2606040" cy="1463040"/>
-          </a:xfrm>
-          <a:prstGeom prst="rect">
-            <a:avLst/>
-          </a:prstGeom>
-          <a:noFill/>
-        </p:spPr>
-        <p:txBody>
-          <a:bodyPr wrap="square" anchor="t" lIns="0" rIns="0" tIns="0" bIns="0">
-            <a:spAutoFit/>
-          </a:bodyPr>
-          <a:lstStyle/>
-          <a:p>
-            <a:pPr algn="l">
-              <a:lnSpc>
-                <a:spcPct val="145000"/>
-              </a:lnSpc>
-              <a:spcAft>
-                <a:spcPts val="0"/>
-              </a:spcAft>
-            </a:pPr>
-            <a:r>
-              <a:rPr sz="1350" b="0" i="0">
-                <a:solidFill>
-                  <a:srgbClr val="5C625A"/>
-                </a:solidFill>
-                <a:latin typeface="Segoe UI"/>
-              </a:rPr>
-              <a:t>Quantile regression at 10/90 to turn the dashed line into a shaded band — the honest version of the same signal.</a:t>
-            </a:r>
-          </a:p>
-        </p:txBody>
-      </p:sp>
-      <p:sp>
-        <p:nvSpPr>
-          <p:cNvPr id="11" name="Rectangle 10"/>
-          <p:cNvSpPr/>
-          <p:nvPr/>
-        </p:nvSpPr>
-        <p:spPr>
-          <a:xfrm>
-            <a:off x="4343400" y="2286000"/>
-            <a:ext cx="3291840" cy="2926080"/>
-          </a:xfrm>
-          <a:prstGeom prst="rect">
-            <a:avLst/>
-          </a:prstGeom>
-          <a:solidFill>
-            <a:srgbClr val="FCFBF7"/>
-          </a:solidFill>
-          <a:ln w="12700">
-            <a:solidFill>
-              <a:srgbClr val="DCD9C9"/>
-            </a:solidFill>
-          </a:ln>
-          <a:effectLst/>
-        </p:spPr>
-        <p:style>
-          <a:lnRef idx="1">
-            <a:schemeClr val="accent1"/>
-          </a:lnRef>
-          <a:fillRef idx="3">
-            <a:schemeClr val="accent1"/>
-          </a:fillRef>
-          <a:effectRef idx="2">
-            <a:schemeClr val="accent1"/>
-          </a:effectRef>
-          <a:fontRef idx="minor">
-            <a:schemeClr val="lt1"/>
-          </a:fontRef>
-        </p:style>
-        <p:txBody>
-          <a:bodyPr rtlCol="0" anchor="ctr"/>
-          <a:lstStyle/>
-          <a:p>
-            <a:pPr algn="ctr"/>
-          </a:p>
-        </p:txBody>
-      </p:sp>
-      <p:sp>
-        <p:nvSpPr>
-          <p:cNvPr id="12" name="Rectangle 11"/>
-          <p:cNvSpPr/>
-          <p:nvPr/>
-        </p:nvSpPr>
-        <p:spPr>
-          <a:xfrm>
-            <a:off x="4343400" y="2286000"/>
-            <a:ext cx="45720" cy="2926080"/>
-          </a:xfrm>
-          <a:prstGeom prst="rect">
-            <a:avLst/>
-          </a:prstGeom>
-          <a:solidFill>
-            <a:srgbClr val="2F5D46"/>
-          </a:solidFill>
-          <a:ln>
-            <a:noFill/>
-          </a:ln>
-          <a:effectLst/>
-        </p:spPr>
-        <p:style>
-          <a:lnRef idx="1">
-            <a:schemeClr val="accent1"/>
-          </a:lnRef>
-          <a:fillRef idx="3">
-            <a:schemeClr val="accent1"/>
-          </a:fillRef>
-          <a:effectRef idx="2">
-            <a:schemeClr val="accent1"/>
-          </a:effectRef>
-          <a:fontRef idx="minor">
-            <a:schemeClr val="lt1"/>
-          </a:fontRef>
-        </p:style>
-        <p:txBody>
-          <a:bodyPr rtlCol="0" anchor="ctr"/>
-          <a:lstStyle/>
-          <a:p>
-            <a:pPr algn="ctr"/>
-          </a:p>
-        </p:txBody>
-      </p:sp>
-      <p:sp>
-        <p:nvSpPr>
-          <p:cNvPr id="13" name="TextBox 12"/>
-          <p:cNvSpPr txBox="1"/>
-          <p:nvPr/>
-        </p:nvSpPr>
-        <p:spPr>
-          <a:xfrm>
-            <a:off x="4709160" y="2651760"/>
-            <a:ext cx="2651760" cy="640080"/>
-          </a:xfrm>
-          <a:prstGeom prst="rect">
-            <a:avLst/>
-          </a:prstGeom>
-          <a:noFill/>
-        </p:spPr>
-        <p:txBody>
-          <a:bodyPr wrap="square" anchor="t" lIns="0" rIns="0" tIns="0" bIns="0">
-            <a:spAutoFit/>
-          </a:bodyPr>
-          <a:lstStyle/>
-          <a:p>
-            <a:pPr algn="l">
-              <a:lnSpc>
-                <a:spcPct val="115000"/>
-              </a:lnSpc>
-              <a:spcAft>
-                <a:spcPts val="0"/>
-              </a:spcAft>
-            </a:pPr>
-            <a:r>
-              <a:rPr sz="1900" b="1" i="0">
-                <a:solidFill>
-                  <a:srgbClr val="191E19"/>
-                </a:solidFill>
-                <a:latin typeface="Georgia"/>
-              </a:rPr>
-              <a:t>Exogenous features</a:t>
-            </a:r>
-          </a:p>
-        </p:txBody>
-      </p:sp>
-      <p:sp>
-        <p:nvSpPr>
-          <p:cNvPr id="14" name="TextBox 13"/>
-          <p:cNvSpPr txBox="1"/>
-          <p:nvPr/>
-        </p:nvSpPr>
-        <p:spPr>
-          <a:xfrm>
-            <a:off x="4709160" y="3520440"/>
-            <a:ext cx="2606040" cy="1463040"/>
-          </a:xfrm>
-          <a:prstGeom prst="rect">
-            <a:avLst/>
-          </a:prstGeom>
-          <a:noFill/>
-        </p:spPr>
-        <p:txBody>
-          <a:bodyPr wrap="square" anchor="t" lIns="0" rIns="0" tIns="0" bIns="0">
-            <a:spAutoFit/>
-          </a:bodyPr>
-          <a:lstStyle/>
-          <a:p>
-            <a:pPr algn="l">
-              <a:lnSpc>
-                <a:spcPct val="145000"/>
-              </a:lnSpc>
-              <a:spcAft>
-                <a:spcPts val="0"/>
-              </a:spcAft>
-            </a:pPr>
-            <a:r>
-              <a:rPr sz="1350" b="0" i="0">
-                <a:solidFill>
-                  <a:srgbClr val="5C625A"/>
-                </a:solidFill>
-                <a:latin typeface="Segoe UI"/>
-              </a:rPr>
-              <a:t>Fuel price, rainfall, and the lunar calendar for festival demand. The categorical features contribute two percent; these might not.</a:t>
-            </a:r>
-          </a:p>
-        </p:txBody>
-      </p:sp>
-      <p:sp>
-        <p:nvSpPr>
-          <p:cNvPr id="15" name="Rectangle 14"/>
-          <p:cNvSpPr/>
-          <p:nvPr/>
-        </p:nvSpPr>
-        <p:spPr>
-          <a:xfrm>
-            <a:off x="7863840" y="2286000"/>
-            <a:ext cx="3291840" cy="2926080"/>
-          </a:xfrm>
-          <a:prstGeom prst="rect">
-            <a:avLst/>
-          </a:prstGeom>
-          <a:solidFill>
-            <a:srgbClr val="FCFBF7"/>
-          </a:solidFill>
-          <a:ln w="12700">
-            <a:solidFill>
-              <a:srgbClr val="DCD9C9"/>
-            </a:solidFill>
-          </a:ln>
-          <a:effectLst/>
-        </p:spPr>
-        <p:style>
-          <a:lnRef idx="1">
-            <a:schemeClr val="accent1"/>
-          </a:lnRef>
-          <a:fillRef idx="3">
-            <a:schemeClr val="accent1"/>
-          </a:fillRef>
-          <a:effectRef idx="2">
-            <a:schemeClr val="accent1"/>
-          </a:effectRef>
-          <a:fontRef idx="minor">
-            <a:schemeClr val="lt1"/>
-          </a:fontRef>
-        </p:style>
-        <p:txBody>
-          <a:bodyPr rtlCol="0" anchor="ctr"/>
-          <a:lstStyle/>
-          <a:p>
-            <a:pPr algn="ctr"/>
-          </a:p>
-        </p:txBody>
-      </p:sp>
-      <p:sp>
-        <p:nvSpPr>
-          <p:cNvPr id="16" name="Rectangle 15"/>
-          <p:cNvSpPr/>
-          <p:nvPr/>
-        </p:nvSpPr>
-        <p:spPr>
-          <a:xfrm>
-            <a:off x="7863840" y="2286000"/>
-            <a:ext cx="45720" cy="2926080"/>
-          </a:xfrm>
-          <a:prstGeom prst="rect">
-            <a:avLst/>
-          </a:prstGeom>
-          <a:solidFill>
-            <a:srgbClr val="2F5D46"/>
-          </a:solidFill>
-          <a:ln>
-            <a:noFill/>
-          </a:ln>
-          <a:effectLst/>
-        </p:spPr>
-        <p:style>
-          <a:lnRef idx="1">
-            <a:schemeClr val="accent1"/>
-          </a:lnRef>
-          <a:fillRef idx="3">
-            <a:schemeClr val="accent1"/>
-          </a:fillRef>
-          <a:effectRef idx="2">
-            <a:schemeClr val="accent1"/>
-          </a:effectRef>
-          <a:fontRef idx="minor">
-            <a:schemeClr val="lt1"/>
-          </a:fontRef>
-        </p:style>
-        <p:txBody>
-          <a:bodyPr rtlCol="0" anchor="ctr"/>
-          <a:lstStyle/>
-          <a:p>
-            <a:pPr algn="ctr"/>
-          </a:p>
-        </p:txBody>
-      </p:sp>
-      <p:sp>
-        <p:nvSpPr>
-          <p:cNvPr id="17" name="TextBox 16"/>
-          <p:cNvSpPr txBox="1"/>
-          <p:nvPr/>
-        </p:nvSpPr>
-        <p:spPr>
-          <a:xfrm>
-            <a:off x="8229600" y="2651760"/>
-            <a:ext cx="2651760" cy="640080"/>
-          </a:xfrm>
-          <a:prstGeom prst="rect">
-            <a:avLst/>
-          </a:prstGeom>
-          <a:noFill/>
-        </p:spPr>
-        <p:txBody>
-          <a:bodyPr wrap="square" anchor="t" lIns="0" rIns="0" tIns="0" bIns="0">
-            <a:spAutoFit/>
-          </a:bodyPr>
-          <a:lstStyle/>
-          <a:p>
-            <a:pPr algn="l">
-              <a:lnSpc>
-                <a:spcPct val="115000"/>
-              </a:lnSpc>
-              <a:spcAft>
-                <a:spcPts val="0"/>
-              </a:spcAft>
-            </a:pPr>
-            <a:r>
-              <a:rPr sz="1900" b="1" i="0">
-                <a:solidFill>
-                  <a:srgbClr val="191E19"/>
-                </a:solidFill>
-                <a:latin typeface="Georgia"/>
-              </a:rPr>
-              <a:t>Retraining on a schedule</a:t>
-            </a:r>
-          </a:p>
-        </p:txBody>
-      </p:sp>
-      <p:sp>
-        <p:nvSpPr>
-          <p:cNvPr id="18" name="TextBox 17"/>
-          <p:cNvSpPr txBox="1"/>
-          <p:nvPr/>
-        </p:nvSpPr>
-        <p:spPr>
-          <a:xfrm>
-            <a:off x="8229600" y="3520440"/>
-            <a:ext cx="2606040" cy="1463040"/>
-          </a:xfrm>
-          <a:prstGeom prst="rect">
-            <a:avLst/>
-          </a:prstGeom>
-          <a:noFill/>
-        </p:spPr>
-        <p:txBody>
-          <a:bodyPr wrap="square" anchor="t" lIns="0" rIns="0" tIns="0" bIns="0">
-            <a:spAutoFit/>
-          </a:bodyPr>
-          <a:lstStyle/>
-          <a:p>
-            <a:pPr algn="l">
-              <a:lnSpc>
-                <a:spcPct val="145000"/>
-              </a:lnSpc>
-              <a:spcAft>
-                <a:spcPts val="0"/>
-              </a:spcAft>
-            </a:pPr>
-            <a:r>
-              <a:rPr sz="1350" b="0" i="0">
-                <a:solidFill>
-                  <a:srgbClr val="5C625A"/>
-                </a:solidFill>
-                <a:latin typeface="Segoe UI"/>
-              </a:rPr>
-              <a:t>The export script already runs headless. A monthly job against the live HDX feed would keep every series current.</a:t>
-            </a:r>
-          </a:p>
-        </p:txBody>
-      </p:sp>
-    </p:spTree>
-  </p:cSld>
-  <p:clrMapOvr>
-    <a:masterClrMapping/>
-  </p:clrMapOvr>
-</p:sld>
-</file>
-
-<file path=ppt/slides/slide18.xml><?xml version="1.0" encoding="utf-8"?>
-<p:sld xmlns:a="http://schemas.openxmlformats.org/drawingml/2006/main" xmlns:p="http://schemas.openxmlformats.org/presentationml/2006/main" xmlns:r="http://schemas.openxmlformats.org/officeDocument/2006/relationships">
-  <p:cSld>
-    <p:spTree>
-      <p:nvGrpSpPr>
-        <p:cNvPr id="1" name=""/>
-        <p:cNvGrpSpPr/>
-        <p:nvPr/>
-      </p:nvGrpSpPr>
-      <p:grpSpPr/>
-      <p:sp>
-        <p:nvSpPr>
-          <p:cNvPr id="2" name="Rectangle 1"/>
-          <p:cNvSpPr/>
-          <p:nvPr/>
-        </p:nvSpPr>
-        <p:spPr>
-          <a:xfrm>
-            <a:off x="0" y="0"/>
-            <a:ext cx="12191695" cy="6858000"/>
-          </a:xfrm>
-          <a:prstGeom prst="rect">
-            <a:avLst/>
-          </a:prstGeom>
-          <a:solidFill>
-            <a:srgbClr val="E9E7DB"/>
-          </a:solidFill>
-          <a:ln>
-            <a:noFill/>
-          </a:ln>
-          <a:effectLst/>
-        </p:spPr>
-        <p:style>
-          <a:lnRef idx="1">
-            <a:schemeClr val="accent1"/>
-          </a:lnRef>
-          <a:fillRef idx="3">
-            <a:schemeClr val="accent1"/>
-          </a:fillRef>
-          <a:effectRef idx="2">
-            <a:schemeClr val="accent1"/>
-          </a:effectRef>
-          <a:fontRef idx="minor">
-            <a:schemeClr val="lt1"/>
-          </a:fontRef>
-        </p:style>
-        <p:txBody>
-          <a:bodyPr rtlCol="0" anchor="ctr"/>
-          <a:lstStyle/>
-          <a:p>
-            <a:pPr algn="ctr"/>
-          </a:p>
-        </p:txBody>
-      </p:sp>
-      <p:sp>
-        <p:nvSpPr>
-          <p:cNvPr id="3" name="TextBox 2"/>
-          <p:cNvSpPr txBox="1"/>
-          <p:nvPr/>
-        </p:nvSpPr>
-        <p:spPr>
-          <a:xfrm>
-            <a:off x="822960" y="1463040"/>
-            <a:ext cx="10545775" cy="274320"/>
-          </a:xfrm>
-          <a:prstGeom prst="rect">
-            <a:avLst/>
-          </a:prstGeom>
-          <a:noFill/>
-        </p:spPr>
-        <p:txBody>
-          <a:bodyPr wrap="square" anchor="t" lIns="0" rIns="0" tIns="0" bIns="0">
-            <a:spAutoFit/>
-          </a:bodyPr>
-          <a:lstStyle/>
-          <a:p>
-            <a:pPr algn="l">
-              <a:lnSpc>
-                <a:spcPct val="130000"/>
-              </a:lnSpc>
-              <a:spcAft>
-                <a:spcPts val="0"/>
-              </a:spcAft>
-            </a:pPr>
-            <a:r>
-              <a:rPr sz="1100" b="0" i="0" spc="260">
-                <a:solidFill>
-                  <a:srgbClr val="2F5D46"/>
-                </a:solidFill>
-                <a:latin typeface="Consolas"/>
-              </a:rPr>
-              <a:t>THANK YOU</a:t>
-            </a:r>
-          </a:p>
-        </p:txBody>
-      </p:sp>
-      <p:sp>
-        <p:nvSpPr>
-          <p:cNvPr id="4" name="TextBox 3"/>
-          <p:cNvSpPr txBox="1"/>
-          <p:nvPr/>
-        </p:nvSpPr>
-        <p:spPr>
-          <a:xfrm>
-            <a:off x="822960" y="1965960"/>
-            <a:ext cx="10545775" cy="1005840"/>
-          </a:xfrm>
-          <a:prstGeom prst="rect">
-            <a:avLst/>
-          </a:prstGeom>
-          <a:noFill/>
-        </p:spPr>
-        <p:txBody>
-          <a:bodyPr wrap="square" anchor="t" lIns="0" rIns="0" tIns="0" bIns="0">
-            <a:spAutoFit/>
-          </a:bodyPr>
-          <a:lstStyle/>
-          <a:p>
-            <a:pPr algn="l">
-              <a:lnSpc>
-                <a:spcPct val="100000"/>
-              </a:lnSpc>
-              <a:spcAft>
-                <a:spcPts val="0"/>
-              </a:spcAft>
-            </a:pPr>
-            <a:r>
-              <a:rPr sz="5800" b="1" i="0">
-                <a:solidFill>
-                  <a:srgbClr val="191E19"/>
-                </a:solidFill>
-                <a:latin typeface="Georgia"/>
-              </a:rPr>
-              <a:t>Questions</a:t>
-            </a:r>
-          </a:p>
-        </p:txBody>
-      </p:sp>
-      <p:sp>
-        <p:nvSpPr>
-          <p:cNvPr id="5" name="TextBox 4"/>
-          <p:cNvSpPr txBox="1"/>
-          <p:nvPr/>
-        </p:nvSpPr>
-        <p:spPr>
-          <a:xfrm>
-            <a:off x="822960" y="2788920"/>
-            <a:ext cx="10545775" cy="1005840"/>
-          </a:xfrm>
-          <a:prstGeom prst="rect">
-            <a:avLst/>
-          </a:prstGeom>
-          <a:noFill/>
-        </p:spPr>
-        <p:txBody>
-          <a:bodyPr wrap="square" anchor="t" lIns="0" rIns="0" tIns="0" bIns="0">
-            <a:spAutoFit/>
-          </a:bodyPr>
-          <a:lstStyle/>
-          <a:p>
-            <a:pPr algn="l">
-              <a:lnSpc>
-                <a:spcPct val="100000"/>
-              </a:lnSpc>
-              <a:spcAft>
-                <a:spcPts val="0"/>
-              </a:spcAft>
-            </a:pPr>
-            <a:r>
-              <a:rPr sz="5800" b="0" i="1">
-                <a:solidFill>
-                  <a:srgbClr val="2F5D46"/>
-                </a:solidFill>
-                <a:latin typeface="Georgia"/>
-              </a:rPr>
-              <a:t>welcome</a:t>
-            </a:r>
-          </a:p>
-        </p:txBody>
-      </p:sp>
-      <p:cxnSp>
-        <p:nvCxnSpPr>
-          <p:cNvPr id="6" name="Connector 5"/>
-          <p:cNvCxnSpPr/>
-          <p:nvPr/>
-        </p:nvCxnSpPr>
-        <p:spPr>
-          <a:xfrm>
-            <a:off x="822960" y="4023360"/>
-            <a:ext cx="2926080" cy="0"/>
-          </a:xfrm>
-          <a:prstGeom prst="line">
-            <a:avLst/>
-          </a:prstGeom>
-          <a:ln w="19050">
-            <a:solidFill>
-              <a:srgbClr val="4D8065"/>
-            </a:solidFill>
-          </a:ln>
-        </p:spPr>
-        <p:style>
-          <a:lnRef idx="2">
-            <a:schemeClr val="accent1"/>
-          </a:lnRef>
-          <a:fillRef idx="0">
-            <a:schemeClr val="accent1"/>
-          </a:fillRef>
-          <a:effectRef idx="1">
-            <a:schemeClr val="accent1"/>
-          </a:effectRef>
-          <a:fontRef idx="minor">
-            <a:schemeClr val="tx1"/>
-          </a:fontRef>
-        </p:style>
-      </p:cxnSp>
-      <p:sp>
-        <p:nvSpPr>
-          <p:cNvPr id="7" name="TextBox 6"/>
-          <p:cNvSpPr txBox="1"/>
-          <p:nvPr/>
-        </p:nvSpPr>
-        <p:spPr>
-          <a:xfrm>
-            <a:off x="822960" y="4389120"/>
-            <a:ext cx="1280160" cy="274320"/>
-          </a:xfrm>
-          <a:prstGeom prst="rect">
-            <a:avLst/>
-          </a:prstGeom>
-          <a:noFill/>
-        </p:spPr>
-        <p:txBody>
-          <a:bodyPr wrap="square" anchor="t" lIns="0" rIns="0" tIns="0" bIns="0">
-            <a:spAutoFit/>
-          </a:bodyPr>
-          <a:lstStyle/>
-          <a:p>
-            <a:pPr algn="l">
-              <a:lnSpc>
-                <a:spcPct val="130000"/>
-              </a:lnSpc>
-              <a:spcAft>
-                <a:spcPts val="0"/>
-              </a:spcAft>
-            </a:pPr>
-            <a:r>
-              <a:rPr sz="1000" b="0" i="0" spc="140">
-                <a:solidFill>
-                  <a:srgbClr val="5C625A"/>
-                </a:solidFill>
-                <a:latin typeface="Consolas"/>
-              </a:rPr>
-              <a:t>DATA</a:t>
-            </a:r>
-          </a:p>
-        </p:txBody>
-      </p:sp>
-      <p:sp>
-        <p:nvSpPr>
-          <p:cNvPr id="8" name="TextBox 7"/>
-          <p:cNvSpPr txBox="1"/>
-          <p:nvPr/>
-        </p:nvSpPr>
-        <p:spPr>
-          <a:xfrm>
-            <a:off x="2377440" y="4361688"/>
-            <a:ext cx="7315200" cy="292608"/>
-          </a:xfrm>
-          <a:prstGeom prst="rect">
-            <a:avLst/>
-          </a:prstGeom>
-          <a:noFill/>
-        </p:spPr>
-        <p:txBody>
-          <a:bodyPr wrap="square" anchor="t" lIns="0" rIns="0" tIns="0" bIns="0">
-            <a:spAutoFit/>
-          </a:bodyPr>
-          <a:lstStyle/>
-          <a:p>
-            <a:pPr algn="l">
-              <a:lnSpc>
-                <a:spcPct val="130000"/>
-              </a:lnSpc>
-              <a:spcAft>
-                <a:spcPts val="0"/>
-              </a:spcAft>
-            </a:pPr>
-            <a:r>
-              <a:rPr sz="1400" b="0" i="0">
-                <a:solidFill>
-                  <a:srgbClr val="191E19"/>
-                </a:solidFill>
-                <a:latin typeface="Segoe UI"/>
-              </a:rPr>
-              <a:t>WFP Global Food Prices — Cambodia</a:t>
-            </a:r>
-          </a:p>
-        </p:txBody>
-      </p:sp>
-      <p:sp>
-        <p:nvSpPr>
-          <p:cNvPr id="9" name="TextBox 8"/>
-          <p:cNvSpPr txBox="1"/>
-          <p:nvPr/>
-        </p:nvSpPr>
-        <p:spPr>
-          <a:xfrm>
-            <a:off x="822960" y="4800600"/>
-            <a:ext cx="1280160" cy="274320"/>
-          </a:xfrm>
-          <a:prstGeom prst="rect">
-            <a:avLst/>
-          </a:prstGeom>
-          <a:noFill/>
-        </p:spPr>
-        <p:txBody>
-          <a:bodyPr wrap="square" anchor="t" lIns="0" rIns="0" tIns="0" bIns="0">
-            <a:spAutoFit/>
-          </a:bodyPr>
-          <a:lstStyle/>
-          <a:p>
-            <a:pPr algn="l">
-              <a:lnSpc>
-                <a:spcPct val="130000"/>
-              </a:lnSpc>
-              <a:spcAft>
-                <a:spcPts val="0"/>
-              </a:spcAft>
-            </a:pPr>
-            <a:r>
-              <a:rPr sz="1000" b="0" i="0" spc="140">
-                <a:solidFill>
-                  <a:srgbClr val="5C625A"/>
-                </a:solidFill>
-                <a:latin typeface="Consolas"/>
-              </a:rPr>
-              <a:t>MODEL</a:t>
-            </a:r>
-          </a:p>
-        </p:txBody>
-      </p:sp>
-      <p:sp>
-        <p:nvSpPr>
-          <p:cNvPr id="10" name="TextBox 9"/>
-          <p:cNvSpPr txBox="1"/>
-          <p:nvPr/>
-        </p:nvSpPr>
-        <p:spPr>
-          <a:xfrm>
-            <a:off x="2377440" y="4773168"/>
-            <a:ext cx="7315200" cy="292608"/>
-          </a:xfrm>
-          <a:prstGeom prst="rect">
-            <a:avLst/>
-          </a:prstGeom>
-          <a:noFill/>
-        </p:spPr>
-        <p:txBody>
-          <a:bodyPr wrap="square" anchor="t" lIns="0" rIns="0" tIns="0" bIns="0">
-            <a:spAutoFit/>
-          </a:bodyPr>
-          <a:lstStyle/>
-          <a:p>
-            <a:pPr algn="l">
-              <a:lnSpc>
-                <a:spcPct val="130000"/>
-              </a:lnSpc>
-              <a:spcAft>
-                <a:spcPts val="0"/>
-              </a:spcAft>
-            </a:pPr>
-            <a:r>
-              <a:rPr sz="1400" b="0" i="0">
-                <a:solidFill>
-                  <a:srgbClr val="191E19"/>
-                </a:solidFill>
-                <a:latin typeface="Segoe UI"/>
-              </a:rPr>
-              <a:t>XGBoost · 400 trees · scikit-learn pipeline</a:t>
-            </a:r>
-          </a:p>
-        </p:txBody>
-      </p:sp>
-      <p:sp>
-        <p:nvSpPr>
-          <p:cNvPr id="11" name="TextBox 10"/>
-          <p:cNvSpPr txBox="1"/>
-          <p:nvPr/>
-        </p:nvSpPr>
-        <p:spPr>
-          <a:xfrm>
-            <a:off x="822960" y="5212080"/>
-            <a:ext cx="1280160" cy="274320"/>
-          </a:xfrm>
-          <a:prstGeom prst="rect">
-            <a:avLst/>
-          </a:prstGeom>
-          <a:noFill/>
-        </p:spPr>
-        <p:txBody>
-          <a:bodyPr wrap="square" anchor="t" lIns="0" rIns="0" tIns="0" bIns="0">
-            <a:spAutoFit/>
-          </a:bodyPr>
-          <a:lstStyle/>
-          <a:p>
-            <a:pPr algn="l">
-              <a:lnSpc>
-                <a:spcPct val="130000"/>
-              </a:lnSpc>
-              <a:spcAft>
-                <a:spcPts val="0"/>
-              </a:spcAft>
-            </a:pPr>
-            <a:r>
-              <a:rPr sz="1000" b="0" i="0" spc="140">
-                <a:solidFill>
-                  <a:srgbClr val="5C625A"/>
-                </a:solidFill>
-                <a:latin typeface="Consolas"/>
-              </a:rPr>
-              <a:t>RUNTIME</a:t>
-            </a:r>
-          </a:p>
-        </p:txBody>
-      </p:sp>
-      <p:sp>
-        <p:nvSpPr>
-          <p:cNvPr id="12" name="TextBox 11"/>
-          <p:cNvSpPr txBox="1"/>
-          <p:nvPr/>
-        </p:nvSpPr>
-        <p:spPr>
-          <a:xfrm>
-            <a:off x="2377440" y="5184648"/>
-            <a:ext cx="7315200" cy="292608"/>
-          </a:xfrm>
-          <a:prstGeom prst="rect">
-            <a:avLst/>
-          </a:prstGeom>
-          <a:noFill/>
-        </p:spPr>
-        <p:txBody>
-          <a:bodyPr wrap="square" anchor="t" lIns="0" rIns="0" tIns="0" bIns="0">
-            <a:spAutoFit/>
-          </a:bodyPr>
-          <a:lstStyle/>
-          <a:p>
-            <a:pPr algn="l">
-              <a:lnSpc>
-                <a:spcPct val="130000"/>
-              </a:lnSpc>
-              <a:spcAft>
-                <a:spcPts val="0"/>
-              </a:spcAft>
-            </a:pPr>
-            <a:r>
-              <a:rPr sz="1400" b="0" i="0">
-                <a:solidFill>
-                  <a:srgbClr val="191E19"/>
-                </a:solidFill>
-                <a:latin typeface="Segoe UI"/>
-              </a:rPr>
-              <a:t>Nuxt 4 · Nitro · TypeScript tree traversal</a:t>
-            </a:r>
-          </a:p>
-        </p:txBody>
-      </p:sp>
-      <p:sp>
-        <p:nvSpPr>
-          <p:cNvPr id="13" name="TextBox 12"/>
-          <p:cNvSpPr txBox="1"/>
-          <p:nvPr/>
-        </p:nvSpPr>
-        <p:spPr>
-          <a:xfrm>
-            <a:off x="822960" y="5623560"/>
-            <a:ext cx="1280160" cy="274320"/>
-          </a:xfrm>
-          <a:prstGeom prst="rect">
-            <a:avLst/>
-          </a:prstGeom>
-          <a:noFill/>
-        </p:spPr>
-        <p:txBody>
-          <a:bodyPr wrap="square" anchor="t" lIns="0" rIns="0" tIns="0" bIns="0">
-            <a:spAutoFit/>
-          </a:bodyPr>
-          <a:lstStyle/>
-          <a:p>
-            <a:pPr algn="l">
-              <a:lnSpc>
-                <a:spcPct val="130000"/>
-              </a:lnSpc>
-              <a:spcAft>
-                <a:spcPts val="0"/>
-              </a:spcAft>
-            </a:pPr>
-            <a:r>
-              <a:rPr sz="1000" b="0" i="0" spc="140">
-                <a:solidFill>
-                  <a:srgbClr val="5C625A"/>
-                </a:solidFill>
-                <a:latin typeface="Consolas"/>
-              </a:rPr>
-              <a:t>SURFACES</a:t>
-            </a:r>
-          </a:p>
-        </p:txBody>
-      </p:sp>
-      <p:sp>
-        <p:nvSpPr>
-          <p:cNvPr id="14" name="TextBox 13"/>
-          <p:cNvSpPr txBox="1"/>
-          <p:nvPr/>
-        </p:nvSpPr>
-        <p:spPr>
-          <a:xfrm>
-            <a:off x="2377440" y="5596128"/>
-            <a:ext cx="7315200" cy="292608"/>
-          </a:xfrm>
-          <a:prstGeom prst="rect">
-            <a:avLst/>
-          </a:prstGeom>
-          <a:noFill/>
-        </p:spPr>
-        <p:txBody>
-          <a:bodyPr wrap="square" anchor="t" lIns="0" rIns="0" tIns="0" bIns="0">
-            <a:spAutoFit/>
-          </a:bodyPr>
-          <a:lstStyle/>
-          <a:p>
-            <a:pPr algn="l">
-              <a:lnSpc>
-                <a:spcPct val="130000"/>
-              </a:lnSpc>
-              <a:spcAft>
-                <a:spcPts val="0"/>
-              </a:spcAft>
-            </a:pPr>
-            <a:r>
-              <a:rPr sz="1400" b="0" i="0">
-                <a:solidFill>
-                  <a:srgbClr val="191E19"/>
-                </a:solidFill>
-                <a:latin typeface="Segoe UI"/>
-              </a:rPr>
-              <a:t>Web app · Telegram bot · one shared engine</a:t>
             </a:r>
           </a:p>
         </p:txBody>
@@ -11494,7 +9114,7 @@
                 </a:solidFill>
                 <a:latin typeface="Georgia"/>
               </a:rPr>
-              <a:t>A price rise lands hardest on the people with the least slack.</a:t>
+              <a:t>No simple food-price forecast exists.</a:t>
             </a:r>
           </a:p>
         </p:txBody>
@@ -11507,7 +9127,7 @@
         </p:nvSpPr>
         <p:spPr>
           <a:xfrm>
-            <a:off x="1188720" y="3675888"/>
+            <a:off x="1188720" y="3922776"/>
             <a:ext cx="128016" cy="128016"/>
           </a:xfrm>
           <a:prstGeom prst="rect">
@@ -11551,7 +9171,7 @@
         </p:nvSpPr>
         <p:spPr>
           <a:xfrm>
-            <a:off x="1481328" y="3611880"/>
+            <a:off x="1481328" y="3858768"/>
             <a:ext cx="4005072" cy="548640"/>
           </a:xfrm>
           <a:prstGeom prst="rect">
@@ -11580,7 +9200,7 @@
                 </a:solidFill>
                 <a:latin typeface="Segoe UI"/>
               </a:rPr>
-              <a:t>For a low-income household food is the largest monthly cost, so a price rise is not an inconvenience.</a:t>
+              <a:t>Prices are public, but hard to use.</a:t>
             </a:r>
           </a:p>
         </p:txBody>
@@ -11593,7 +9213,7 @@
         </p:nvSpPr>
         <p:spPr>
           <a:xfrm>
-            <a:off x="1188720" y="4389120"/>
+            <a:off x="1188720" y="4636008"/>
             <a:ext cx="128016" cy="128016"/>
           </a:xfrm>
           <a:prstGeom prst="rect">
@@ -11637,7 +9257,7 @@
         </p:nvSpPr>
         <p:spPr>
           <a:xfrm>
-            <a:off x="1481328" y="4325112"/>
+            <a:off x="1481328" y="4572000"/>
             <a:ext cx="4005072" cy="548640"/>
           </a:xfrm>
           <a:prstGeom prst="rect">
@@ -11666,7 +9286,7 @@
                 </a:solidFill>
                 <a:latin typeface="Segoe UI"/>
               </a:rPr>
-              <a:t>WFP tracks these markets to catch that early, but publishes what prices were — not what they will be.</a:t>
+              <a:t>People need warning before prices rise.</a:t>
             </a:r>
           </a:p>
         </p:txBody>
@@ -11679,7 +9299,7 @@
         </p:nvSpPr>
         <p:spPr>
           <a:xfrm>
-            <a:off x="1188720" y="5102352"/>
+            <a:off x="1188720" y="5349240"/>
             <a:ext cx="128016" cy="128016"/>
           </a:xfrm>
           <a:prstGeom prst="rect">
@@ -11723,7 +9343,7 @@
         </p:nvSpPr>
         <p:spPr>
           <a:xfrm>
-            <a:off x="1481328" y="5038344"/>
+            <a:off x="1481328" y="5285232"/>
             <a:ext cx="4005072" cy="548640"/>
           </a:xfrm>
           <a:prstGeom prst="rect">
@@ -11752,7 +9372,7 @@
                 </a:solidFill>
                 <a:latin typeface="Segoe UI"/>
               </a:rPr>
-              <a:t>And the record itself ships as a 85,107-row CSV: readable by analysts, nobody else.</a:t>
+              <a:t>A CSV is not enough for everyday users.</a:t>
             </a:r>
           </a:p>
         </p:txBody>
@@ -11926,7 +9546,7 @@
                 </a:solidFill>
                 <a:latin typeface="Georgia"/>
               </a:rPr>
-              <a:t>Make the answer reachable in two clicks or one message.</a:t>
+              <a:t>Make the forecast easy to reach.</a:t>
             </a:r>
           </a:p>
         </p:txBody>
@@ -11939,7 +9559,7 @@
         </p:nvSpPr>
         <p:spPr>
           <a:xfrm>
-            <a:off x="6702552" y="3675888"/>
+            <a:off x="6702552" y="3922776"/>
             <a:ext cx="128016" cy="128016"/>
           </a:xfrm>
           <a:prstGeom prst="rect">
@@ -11983,7 +9603,7 @@
         </p:nvSpPr>
         <p:spPr>
           <a:xfrm>
-            <a:off x="6995160" y="3611880"/>
+            <a:off x="6995160" y="3858768"/>
             <a:ext cx="4005072" cy="548640"/>
           </a:xfrm>
           <a:prstGeom prst="rect">
@@ -12012,7 +9632,7 @@
                 </a:solidFill>
                 <a:latin typeface="Segoe UI"/>
               </a:rPr>
-              <a:t>3,442 price series across 46 commodities and 76 markets, charted for anyone with a browser.</a:t>
+              <a:t>46 commodities and 76 markets.</a:t>
             </a:r>
           </a:p>
         </p:txBody>
@@ -12025,7 +9645,7 @@
         </p:nvSpPr>
         <p:spPr>
           <a:xfrm>
-            <a:off x="6702552" y="4389120"/>
+            <a:off x="6702552" y="4636008"/>
             <a:ext cx="128016" cy="128016"/>
           </a:xfrm>
           <a:prstGeom prst="rect">
@@ -12069,7 +9689,7 @@
         </p:nvSpPr>
         <p:spPr>
           <a:xfrm>
-            <a:off x="6995160" y="4325112"/>
+            <a:off x="6995160" y="4572000"/>
             <a:ext cx="4005072" cy="548640"/>
           </a:xfrm>
           <a:prstGeom prst="rect">
@@ -12098,7 +9718,7 @@
                 </a:solidFill>
                 <a:latin typeface="Segoe UI"/>
               </a:rPr>
-              <a:t>A next-period forecast on each, with the line between recorded and predicted drawn honestly.</a:t>
+              <a:t>Choose a food and market.</a:t>
             </a:r>
           </a:p>
         </p:txBody>
@@ -12111,7 +9731,7 @@
         </p:nvSpPr>
         <p:spPr>
           <a:xfrm>
-            <a:off x="6702552" y="5102352"/>
+            <a:off x="6702552" y="5349240"/>
             <a:ext cx="128016" cy="128016"/>
           </a:xfrm>
           <a:prstGeom prst="rect">
@@ -12155,7 +9775,7 @@
         </p:nvSpPr>
         <p:spPr>
           <a:xfrm>
-            <a:off x="6995160" y="5038344"/>
+            <a:off x="6995160" y="5285232"/>
             <a:ext cx="4005072" cy="548640"/>
           </a:xfrm>
           <a:prstGeom prst="rect">
@@ -12184,7 +9804,7 @@
                 </a:solidFill>
                 <a:latin typeface="Segoe UI"/>
               </a:rPr>
-              <a:t>Free to run — so a ministry, an NGO or a co-op could stand the same thing up on its own feed.</a:t>
+              <a:t>See price history, trend and forecast.</a:t>
             </a:r>
           </a:p>
         </p:txBody>
@@ -12268,7 +9888,7 @@
                 </a:solidFill>
                 <a:latin typeface="Consolas"/>
               </a:rPr>
-              <a:t>A demonstration on a snapshot, not a deployed service — the data ends March 2026 and the app says so, series by series.</a:t>
+              <a:t>Core claim: this project does not invent new food-price data; it makes public data predictive, accessible and honest about uncertainty.</a:t>
             </a:r>
           </a:p>
         </p:txBody>
@@ -13596,7 +11216,7 @@
                 </a:solidFill>
                 <a:latin typeface="Segoe UI"/>
               </a:rPr>
-              <a:t>46 commodities · 76 markets · 4,035 series</a:t>
+              <a:t>46 commodities · 76 markets · 3,280 series</a:t>
             </a:r>
           </a:p>
         </p:txBody>
@@ -16628,7 +14248,7 @@
                 </a:solidFill>
                 <a:latin typeface="Segoe UI"/>
               </a:rPr>
-              <a:t>Random Forest (reproduced)</a:t>
+              <a:t>Random Forest (retrained)</a:t>
             </a:r>
           </a:p>
         </p:txBody>
@@ -16884,7 +14504,7 @@
                 </a:solidFill>
                 <a:latin typeface="Consolas"/>
               </a:rPr>
-              <a:t>0.1642</a:t>
+              <a:t>0.1641</a:t>
             </a:r>
           </a:p>
         </p:txBody>
@@ -16926,7 +14546,7 @@
                 </a:solidFill>
                 <a:latin typeface="Consolas"/>
               </a:rPr>
-              <a:t>0.3295</a:t>
+              <a:t>0.3303</a:t>
             </a:r>
           </a:p>
         </p:txBody>
@@ -16968,7 +14588,7 @@
                 </a:solidFill>
                 <a:latin typeface="Consolas"/>
               </a:rPr>
-              <a:t>0.9506</a:t>
+              <a:t>0.9504</a:t>
             </a:r>
           </a:p>
         </p:txBody>
@@ -17589,7 +15209,7 @@
                 </a:solidFill>
                 <a:latin typeface="Consolas"/>
               </a:rPr>
-              <a:t>0.951</a:t>
+              <a:t>0.950</a:t>
             </a:r>
           </a:p>
         </p:txBody>
@@ -17805,7 +15425,7 @@
                 </a:solidFill>
                 <a:latin typeface="Consolas"/>
               </a:rPr>
-              <a:t>8.7%</a:t>
+              <a:t>8.8%</a:t>
             </a:r>
           </a:p>
         </p:txBody>
@@ -18217,7 +15837,7 @@
         <p:spPr>
           <a:xfrm>
             <a:off x="3108960" y="2377440"/>
-            <a:ext cx="2781523" cy="256032"/>
+            <a:ext cx="3366672" cy="256032"/>
           </a:xfrm>
           <a:prstGeom prst="rect">
             <a:avLst/>
@@ -18260,7 +15880,7 @@
         </p:nvSpPr>
         <p:spPr>
           <a:xfrm>
-            <a:off x="6000211" y="2359152"/>
+            <a:off x="6585360" y="2359152"/>
             <a:ext cx="914400" cy="274320"/>
           </a:xfrm>
           <a:prstGeom prst="rect">
@@ -18289,7 +15909,7 @@
                 </a:solidFill>
                 <a:latin typeface="Consolas"/>
               </a:rPr>
-              <a:t>56.3%</a:t>
+              <a:t>68.2%</a:t>
             </a:r>
           </a:p>
         </p:txBody>
@@ -18345,7 +15965,7 @@
         <p:spPr>
           <a:xfrm>
             <a:off x="3108960" y="2852928"/>
-            <a:ext cx="2030794" cy="256032"/>
+            <a:ext cx="1475928" cy="256032"/>
           </a:xfrm>
           <a:prstGeom prst="rect">
             <a:avLst/>
@@ -18388,7 +16008,7 @@
         </p:nvSpPr>
         <p:spPr>
           <a:xfrm>
-            <a:off x="5249482" y="2834640"/>
+            <a:off x="4694616" y="2834640"/>
             <a:ext cx="914400" cy="274320"/>
           </a:xfrm>
           <a:prstGeom prst="rect">
@@ -18417,7 +16037,7 @@
                 </a:solidFill>
                 <a:latin typeface="Consolas"/>
               </a:rPr>
-              <a:t>41.1%</a:t>
+              <a:t>29.9%</a:t>
             </a:r>
           </a:p>
         </p:txBody>
@@ -18459,7 +16079,7 @@
                 </a:solidFill>
                 <a:latin typeface="Consolas"/>
               </a:rPr>
-              <a:t>lag_3</a:t>
+              <a:t>category_enc</a:t>
             </a:r>
           </a:p>
         </p:txBody>
@@ -18473,7 +16093,7 @@
         <p:spPr>
           <a:xfrm>
             <a:off x="3108960" y="3328416"/>
-            <a:ext cx="43148" cy="256032"/>
+            <a:ext cx="18288" cy="256032"/>
           </a:xfrm>
           <a:prstGeom prst="rect">
             <a:avLst/>
@@ -18516,7 +16136,7 @@
         </p:nvSpPr>
         <p:spPr>
           <a:xfrm>
-            <a:off x="3261836" y="3310128"/>
+            <a:off x="3236976" y="3310128"/>
             <a:ext cx="914400" cy="274320"/>
           </a:xfrm>
           <a:prstGeom prst="rect">
@@ -18545,7 +16165,7 @@
                 </a:solidFill>
                 <a:latin typeface="Consolas"/>
               </a:rPr>
-              <a:t>0.9%</a:t>
+              <a:t>0.4%</a:t>
             </a:r>
           </a:p>
         </p:txBody>
@@ -18601,7 +16221,7 @@
         <p:spPr>
           <a:xfrm>
             <a:off x="3108960" y="3803904"/>
-            <a:ext cx="20361" cy="256032"/>
+            <a:ext cx="18288" cy="256032"/>
           </a:xfrm>
           <a:prstGeom prst="rect">
             <a:avLst/>
@@ -18644,7 +16264,7 @@
         </p:nvSpPr>
         <p:spPr>
           <a:xfrm>
-            <a:off x="3239049" y="3785616"/>
+            <a:off x="3236976" y="3785616"/>
             <a:ext cx="914400" cy="274320"/>
           </a:xfrm>
           <a:prstGeom prst="rect">
@@ -18715,7 +16335,7 @@
                 </a:solidFill>
                 <a:latin typeface="Consolas"/>
               </a:rPr>
-              <a:t>category_enc</a:t>
+              <a:t>lag_3</a:t>
             </a:r>
           </a:p>
         </p:txBody>
@@ -18729,7 +16349,7 @@
         <p:spPr>
           <a:xfrm>
             <a:off x="3108960" y="4279392"/>
-            <a:ext cx="19071" cy="256032"/>
+            <a:ext cx="18288" cy="256032"/>
           </a:xfrm>
           <a:prstGeom prst="rect">
             <a:avLst/>
@@ -18772,7 +16392,7 @@
         </p:nvSpPr>
         <p:spPr>
           <a:xfrm>
-            <a:off x="3237759" y="4261104"/>
+            <a:off x="3236976" y="4261104"/>
             <a:ext cx="914400" cy="274320"/>
           </a:xfrm>
           <a:prstGeom prst="rect">
@@ -18801,7 +16421,7 @@
                 </a:solidFill>
                 <a:latin typeface="Consolas"/>
               </a:rPr>
-              <a:t>0.4%</a:t>
+              <a:t>0.3%</a:t>
             </a:r>
           </a:p>
         </p:txBody>
@@ -18843,7 +16463,7 @@
                 </a:solidFill>
                 <a:latin typeface="Consolas"/>
               </a:rPr>
-              <a:t>month</a:t>
+              <a:t>quarter</a:t>
             </a:r>
           </a:p>
         </p:txBody>
@@ -19103,7 +16723,7 @@
                 </a:solidFill>
                 <a:latin typeface="Georgia"/>
               </a:rPr>
-              <a:t>97% of the model</a:t>
+              <a:t>98% of the model</a:t>
             </a:r>
           </a:p>
           <a:p>

--- a/reports/Cambodia_Food_Price_Forecast.pptx
+++ b/reports/Cambodia_Food_Price_Forecast.pptx
@@ -3344,7 +3344,7 @@
                 </a:solidFill>
                 <a:latin typeface="Segoe UI"/>
               </a:rPr>
-              <a:t>Forecasting food commodity prices in Cambodia — from World Food Programme price monitoring to a web app and a Telegram bot.</a:t>
+              <a:t>Forecasting food commodity prices in Cambodia — from World Food Programme price monitoring to a web app and API.</a:t>
             </a:r>
           </a:p>
         </p:txBody>
@@ -5615,7 +5615,7 @@
                 </a:solidFill>
                 <a:latin typeface="Segoe UI"/>
               </a:rPr>
-              <a:t>19 tests cover the traversal, the fuzzy matching, the commodity/market splitter and every failure path.</a:t>
+              <a:t>17 tests cover the traversal, fuzzy matching, forecast periods and every failure path.</a:t>
             </a:r>
           </a:p>
         </p:txBody>
@@ -5887,7 +5887,7 @@
                 </a:solidFill>
                 <a:latin typeface="Segoe UI"/>
               </a:rPr>
-              <a:t>The model is not left in the notebook. Nuxt serves the same prediction engine through a web page, API routes and a Telegram webhook.</a:t>
+              <a:t>The model is not left in the notebook. Nuxt serves the same prediction engine through a web page and API routes.</a:t>
             </a:r>
           </a:p>
         </p:txBody>
@@ -6229,7 +6229,7 @@
                 </a:solidFill>
                 <a:latin typeface="Segoe UI"/>
               </a:rPr>
-              <a:t>Telegram</a:t>
+              <a:t>Deployment</a:t>
             </a:r>
           </a:p>
         </p:txBody>
@@ -6271,134 +6271,6 @@
                 </a:solidFill>
                 <a:latin typeface="Segoe UI"/>
               </a:rPr>
-              <a:t>/predict rice phnom penh gives a fast text answer with a small sparkline.</a:t>
-            </a:r>
-          </a:p>
-        </p:txBody>
-      </p:sp>
-      <p:sp>
-        <p:nvSpPr>
-          <p:cNvPr id="17" name="Rectangle 16"/>
-          <p:cNvSpPr/>
-          <p:nvPr/>
-        </p:nvSpPr>
-        <p:spPr>
-          <a:xfrm>
-            <a:off x="822960" y="5367528"/>
-            <a:ext cx="54864" cy="438912"/>
-          </a:xfrm>
-          <a:prstGeom prst="rect">
-            <a:avLst/>
-          </a:prstGeom>
-          <a:solidFill>
-            <a:srgbClr val="2F5D46"/>
-          </a:solidFill>
-          <a:ln>
-            <a:noFill/>
-          </a:ln>
-          <a:effectLst/>
-        </p:spPr>
-        <p:style>
-          <a:lnRef idx="1">
-            <a:schemeClr val="accent1"/>
-          </a:lnRef>
-          <a:fillRef idx="3">
-            <a:schemeClr val="accent1"/>
-          </a:fillRef>
-          <a:effectRef idx="2">
-            <a:schemeClr val="accent1"/>
-          </a:effectRef>
-          <a:fontRef idx="minor">
-            <a:schemeClr val="lt1"/>
-          </a:fontRef>
-        </p:style>
-        <p:txBody>
-          <a:bodyPr rtlCol="0" anchor="ctr"/>
-          <a:lstStyle/>
-          <a:p>
-            <a:pPr algn="ctr"/>
-          </a:p>
-        </p:txBody>
-      </p:sp>
-      <p:sp>
-        <p:nvSpPr>
-          <p:cNvPr id="18" name="TextBox 17"/>
-          <p:cNvSpPr txBox="1"/>
-          <p:nvPr/>
-        </p:nvSpPr>
-        <p:spPr>
-          <a:xfrm>
-            <a:off x="1097280" y="5312664"/>
-            <a:ext cx="1325880" cy="274320"/>
-          </a:xfrm>
-          <a:prstGeom prst="rect">
-            <a:avLst/>
-          </a:prstGeom>
-          <a:noFill/>
-        </p:spPr>
-        <p:txBody>
-          <a:bodyPr wrap="square" anchor="t" lIns="0" rIns="0" tIns="0" bIns="0">
-            <a:spAutoFit/>
-          </a:bodyPr>
-          <a:lstStyle/>
-          <a:p>
-            <a:pPr algn="l">
-              <a:lnSpc>
-                <a:spcPct val="130000"/>
-              </a:lnSpc>
-              <a:spcAft>
-                <a:spcPts val="0"/>
-              </a:spcAft>
-            </a:pPr>
-            <a:r>
-              <a:rPr sz="1450" b="1" i="0">
-                <a:solidFill>
-                  <a:srgbClr val="191E19"/>
-                </a:solidFill>
-                <a:latin typeface="Segoe UI"/>
-              </a:rPr>
-              <a:t>Deployment</a:t>
-            </a:r>
-          </a:p>
-        </p:txBody>
-      </p:sp>
-      <p:sp>
-        <p:nvSpPr>
-          <p:cNvPr id="19" name="TextBox 18"/>
-          <p:cNvSpPr txBox="1"/>
-          <p:nvPr/>
-        </p:nvSpPr>
-        <p:spPr>
-          <a:xfrm>
-            <a:off x="2514600" y="5312664"/>
-            <a:ext cx="3886200" cy="457200"/>
-          </a:xfrm>
-          <a:prstGeom prst="rect">
-            <a:avLst/>
-          </a:prstGeom>
-          <a:noFill/>
-        </p:spPr>
-        <p:txBody>
-          <a:bodyPr wrap="square" anchor="t" lIns="0" rIns="0" tIns="0" bIns="0">
-            <a:spAutoFit/>
-          </a:bodyPr>
-          <a:lstStyle/>
-          <a:p>
-            <a:pPr algn="l">
-              <a:lnSpc>
-                <a:spcPct val="135000"/>
-              </a:lnSpc>
-              <a:spcAft>
-                <a:spcPts val="0"/>
-              </a:spcAft>
-            </a:pPr>
-            <a:r>
-              <a:rPr sz="1280" b="0" i="0">
-                <a:solidFill>
-                  <a:srgbClr val="5C625A"/>
-                </a:solidFill>
-                <a:latin typeface="Segoe UI"/>
-              </a:rPr>
               <a:t>Vercel only receives the Nuxt app and JSON artifacts, not Python ML libraries.</a:t>
             </a:r>
           </a:p>
@@ -6406,7 +6278,7 @@
       </p:sp>
       <p:pic>
         <p:nvPicPr>
-          <p:cNvPr id="20" name="Picture 19" descr="hero.png"/>
+          <p:cNvPr id="17" name="Picture 16" descr="hero.png"/>
           <p:cNvPicPr>
             <a:picLocks noChangeAspect="1"/>
           </p:cNvPicPr>
@@ -6430,7 +6302,7 @@
       </p:pic>
       <p:sp>
         <p:nvSpPr>
-          <p:cNvPr id="21" name="TextBox 20"/>
+          <p:cNvPr id="18" name="TextBox 17"/>
           <p:cNvSpPr txBox="1"/>
           <p:nvPr/>
         </p:nvSpPr>
@@ -6465,7 +6337,7 @@
                 </a:solidFill>
                 <a:latin typeface="Consolas"/>
               </a:rPr>
-              <a:t>One trained model, one TypeScript engine, two user-facing surfaces.</a:t>
+              <a:t>One trained model, one TypeScript engine, one focused web product.</a:t>
             </a:r>
           </a:p>
         </p:txBody>
@@ -8416,7 +8288,7 @@
                 </a:solidFill>
                 <a:latin typeface="Segoe UI"/>
               </a:rPr>
-              <a:t>Cambodia already has valuable food-price records. This project shows how AI can turn those records into a small, explainable forecasting tool that ordinary users can reach from a browser or chat message.</a:t>
+              <a:t>Cambodia already has valuable food-price records. This project shows how AI can turn those records into a small, explainable forecasting tool that ordinary users can reach from a browser.</a:t>
             </a:r>
           </a:p>
         </p:txBody>
@@ -8668,7 +8540,7 @@
                 </a:solidFill>
                 <a:latin typeface="Segoe UI"/>
               </a:rPr>
-              <a:t>Nuxt app, API and Telegram bot</a:t>
+              <a:t>Nuxt web app and API</a:t>
             </a:r>
           </a:p>
         </p:txBody>
